--- a/examples/pptx/immersion-1-2-workflow-map.pptx
+++ b/examples/pptx/immersion-1-2-workflow-map.pptx
@@ -554,7 +554,7 @@
           <a:lstStyle/>
           <a:p>
             <a:r>
-              <a:t>Open by connecting to the last session. They have a precise problem. This hour turns that one sentence into a picture of how the solution actually runs, step by step. Nothing gets built until the path is drawn.</a:t>
+              <a:t>This is session 1.2, Mapping the Workflow. We take the problem you sharpened last hour and turn it into a picture of how the solution actually runs.</a:t>
             </a:r>
           </a:p>
         </p:txBody>
@@ -624,7 +624,7 @@
           <a:lstStyle/>
           <a:p>
             <a:r>
-              <a:t>Insist on the middle being ONE thing. The moment a step does two things, it is two steps. That discipline is what makes the map assignable later in 1.3.</a:t>
+              <a:t>Every step has three parts: an input, which is what arrives and the shape it arrives in; a transform, the one thing this step does; and an output, what leaves ready for the next step.</a:t>
             </a:r>
           </a:p>
         </p:txBody>
@@ -694,7 +694,7 @@
           <a:lstStyle/>
           <a:p>
             <a:r>
-              <a:t>Backwards is deliberate. Forward decomposition drifts into what is easy to build; backwards keeps every step justified by the output it serves. Have them try it right now on paper.</a:t>
+              <a:t>Decomposing is three moves. Name the output — what the user finally gets. Work backwards, asking what must exist before it. And stop at raw input, meaning whatever you actually receive.</a:t>
             </a:r>
           </a:p>
         </p:txBody>
@@ -764,7 +764,7 @@
           <a:lstStyle/>
           <a:p>
             <a:r>
-              <a:t>Reinforce the previous slide. The middle item is the test: if a step does not serve the output, cut it. Teams add steps because they are interesting, not because they are needed.</a:t>
+              <a:t>Start from the output, because working forwards drifts toward whatever is easy. Backwards makes every step earn its place, and you spot the missing middle sooner.</a:t>
             </a:r>
           </a:p>
         </p:txBody>
@@ -834,7 +834,7 @@
           <a:lstStyle/>
           <a:p>
             <a:r>
-              <a:t>Work left to right out loud, then ask the room to do row three for their own project. The pattern is the same every time: name the verb and name the output shape.</a:t>
+              <a:t>Vague on the left, concrete on the right. “Process the data” becomes “parse CSV to records”; “use AI” becomes “Claude drafts a summary”.</a:t>
             </a:r>
           </a:p>
         </p:txBody>
@@ -904,7 +904,7 @@
           <a:lstStyle/>
           <a:p>
             <a:r>
-              <a:t>Three checks for right-sized steps. The first is what makes 1.3 possible — if a step cannot have one owner, the team will collide on it tomorrow.</a:t>
+              <a:t>A step is the right size when one person could own it, you could test it on its own, and it fits in a morning.</a:t>
             </a:r>
           </a:p>
         </p:txBody>
@@ -974,7 +974,7 @@
           <a:lstStyle/>
           <a:p>
             <a:r>
-              <a:t>Both failure modes in one view. Coarse is more dangerous because it looks finished. Fine is annoying but recoverable. Aim for five to nine steps for a three-day build.</a:t>
+              <a:t>Too coarse is “build the pipeline” — it hides the hard part and cannot be assigned. Too fine is “open the file” — twenty trivial boxes, which is noise rather than a map.</a:t>
             </a:r>
           </a:p>
         </p:txBody>
@@ -1044,7 +1044,7 @@
           <a:lstStyle/>
           <a:p>
             <a:r>
-              <a:t>The last two lines do the work. Bounding the count stops Claude producing a twenty-box map, and forbidding tools keeps this about the path, not the stack — the stack is session 2.1.</a:t>
+              <a:t>Here is the prompt. Paste your 1.1 statement, ask it to work backwards from the output, list each step with its input and output, stop at the raw input you have, five to nine steps, no tools yet.</a:t>
             </a:r>
           </a:p>
         </p:txBody>
@@ -1114,7 +1114,7 @@
           <a:lstStyle/>
           <a:p>
             <a:r>
-              <a:t>Walk the resume example from 1.1 end to end. Four steps, each with a clear input and output. Ask which step they think is riskiest — plant the seed for the risk pass in section three.</a:t>
+              <a:t>A worked example: resume files arrive at intake, parse pulls text out of each file, score matches them against the role, and report produces a ranked list with gaps.</a:t>
             </a:r>
           </a:p>
         </p:txBody>
@@ -1184,7 +1184,7 @@
           <a:lstStyle/>
           <a:p>
             <a:r>
-              <a:t>The third is the most common and the most expensive. Data acquisition is always a step, never an assumption — 1.1's second gate already told them the data has to exist today.</a:t>
+              <a:t>Four mistakes to watch for: starting after the messy part, one step quietly doing three things, no step for getting the data at all, and an output nobody ever defined.</a:t>
             </a:r>
           </a:p>
         </p:txBody>
@@ -1254,7 +1254,7 @@
           <a:lstStyle/>
           <a:p>
             <a:r>
-              <a:t>Push hard toward linear. Branches are real but they multiply the work. Note them on the map as future paths and build the single line through the middle this week.</a:t>
+              <a:t>Linear means one path start to end, easy to demo — that is what you pick for Day 2. Branching means cases split the path; it is harder to finish, so note it and defer it.</a:t>
             </a:r>
           </a:p>
         </p:txBody>
@@ -1324,7 +1324,7 @@
           <a:lstStyle/>
           <a:p>
             <a:r>
-              <a:t>Longer than the last session, and the output is visual rather than verbal. Name the artifact now: a shareable diagram, not notes. If they leave with prose, this hour did not land.</a:t>
+              <a:t>We have fifty-five minutes, and you leave with one thing: a diagram of your workflow that your whole team can see and share.</a:t>
             </a:r>
           </a:p>
         </p:txBody>
@@ -1394,7 +1394,7 @@
           <a:lstStyle/>
           <a:p>
             <a:r>
-              <a:t>Name it now because Day 2 is built entirely on it. Everything they defer today — bad inputs, empty files, weird encodings — becomes Day 3's attack surface, which is exactly where it belongs.</a:t>
+              <a:t>The happy path is the one route through your map where nothing fails.</a:t>
             </a:r>
           </a:p>
         </p:txBody>
@@ -1464,7 +1464,7 @@
           <a:lstStyle/>
           <a:p>
             <a:r>
-              <a:t>Have them literally trace it on their diagram. Listing edge cases without building them is the discipline — writing them down stops the team relitigating whether to handle them now.</a:t>
+              <a:t>Mark it as one line through the map. Label every branch as later, and list your edge cases without building them.</a:t>
             </a:r>
           </a:p>
         </p:txBody>
@@ -1534,7 +1534,7 @@
           <a:lstStyle/>
           <a:p>
             <a:r>
-              <a:t>The portable line for this section. Every vague box on the map becomes an argument tomorrow when someone has to build it. Repeat this when a team wants to move on with a fuzzy middle.</a:t>
+              <a:t>A gap in the map is a gap in Day 2. That is why the middle matters.</a:t>
             </a:r>
           </a:p>
         </p:txBody>
@@ -1604,7 +1604,7 @@
           <a:lstStyle/>
           <a:p>
             <a:r>
-              <a:t>Second objective. The map exists in someone's head or notebook. This section makes it a thing the whole team can see, change, and send by link.</a:t>
+              <a:t>Second objective: turning that list of steps into a picture the whole team can hold.</a:t>
             </a:r>
           </a:p>
         </p:txBody>
@@ -1674,7 +1674,7 @@
           <a:lstStyle/>
           <a:p>
             <a:r>
-              <a:t>Stress standalone and by link. It is not a message in a transcript; it is a document with its own address that keeps working after the conversation is gone.</a:t>
+              <a:t>A Claude Artifact is standalone content Claude builds for you, which you share by link.</a:t>
             </a:r>
           </a:p>
         </p:txBody>
@@ -1744,7 +1744,7 @@
           <a:lstStyle/>
           <a:p>
             <a:r>
-              <a:t>The middle row is the real argument. A diagram makes disagreement visible in seconds; prose lets two people nod at completely different mental models for a whole day.</a:t>
+              <a:t>A described workflow lives in a transcript, each person pictures it differently, and it gets re-explained every time. A drawn one is one picture with one meaning, disagreement shows up fast, and you send it as a link.</a:t>
             </a:r>
           </a:p>
         </p:txBody>
@@ -1814,7 +1814,7 @@
           <a:lstStyle/>
           <a:p>
             <a:r>
-              <a:t>Map these to the syllabus wording: see, revise, share by link. The revise point matters most today — the map will change three times in this hour and that is healthy.</a:t>
+              <a:t>An Artifact gives you three things: you see the whole path at once, you revise it in seconds, and you share it with the whole team through one link.</a:t>
             </a:r>
           </a:p>
         </p:txBody>
@@ -1884,7 +1884,7 @@
           <a:lstStyle/>
           <a:p>
             <a:r>
-              <a:t>Do this live at the laptops, ten minutes. Step three is the point of the exercise: the first diagram is always slightly wrong, and correcting it is how the team converges.</a:t>
+              <a:t>Three steps. Paste in your list from section one. Ask for a diagram — boxes and arrows, top down. Then fix it out loud until it matches what you meant.</a:t>
             </a:r>
           </a:p>
         </p:txBody>
@@ -1954,7 +1954,7 @@
           <a:lstStyle/>
           <a:p>
             <a:r>
-              <a:t>Labelling the arrows is the trick. It forces the input and output of every step to be named, and it exposes any place where two steps do not actually connect.</a:t>
+              <a:t>Here is that prompt. Paste the steps, ask for a flow diagram top to bottom, one box per step, and label every arrow with what passes between the steps.</a:t>
             </a:r>
           </a:p>
         </p:txBody>
@@ -2024,7 +2024,7 @@
           <a:lstStyle/>
           <a:p>
             <a:r>
-              <a:t>This is the acceptance test for their diagram. Walk the room and check all four. Missing arrow labels is the usual failure and the fastest to fix.</a:t>
+              <a:t>Four things must appear: raw input and where it enters, one box per step, what passes on each arrow, and the delivered output.</a:t>
             </a:r>
           </a:p>
         </p:txBody>
@@ -2094,7 +2094,7 @@
           <a:lstStyle/>
           <a:p>
             <a:r>
-              <a:t>The three syllabus objectives plus the risk pass at the end. Flag that the last item is the one that saves Day 3 — most teams skip it and pay later.</a:t>
+              <a:t>Four things this hour. We decompose the problem into steps, turn that map into an Artifact, name what each step needs, and finish by finding how the riskiest step fails.</a:t>
             </a:r>
           </a:p>
         </p:txBody>
@@ -2164,7 +2164,7 @@
           <a:lstStyle/>
           <a:p>
             <a:r>
-              <a:t>Small conventions that keep the map readable when it is projected on a wall tomorrow. Long labels are a sign a box is doing too much — send them back to the granularity test.</a:t>
+              <a:t>Three conventions: top to bottom reads fastest, one verb per box, and keep labels under five words.</a:t>
             </a:r>
           </a:p>
         </p:txBody>
@@ -2234,7 +2234,7 @@
           <a:lstStyle/>
           <a:p>
             <a:r>
-              <a:t>Revising together is what turns one person's map into the team's map. If one teammate stays quiet through this, they will build a different system tomorrow.</a:t>
+              <a:t>Revise it together. Ask for the change out loud, re-read the new version as a group, and stop when nobody objects.</a:t>
             </a:r>
           </a:p>
         </p:txBody>
@@ -2304,7 +2304,7 @@
           <a:lstStyle/>
           <a:p>
             <a:r>
-              <a:t>All three are quiet failures. Suggest pasting the link into the Claude Project from 1.1 right now, so the map lives beside the problem statement it serves.</a:t>
+              <a:t>Three pitfalls: a pretty diagram nobody rechecks, boxes with no arrow labels, and a link that never actually got shared.</a:t>
             </a:r>
           </a:p>
         </p:txBody>
@@ -2374,7 +2374,7 @@
           <a:lstStyle/>
           <a:p>
             <a:r>
-              <a:t>Close the loop with session 1.1. The Project is the shared brain; the Artifact link belongs in it. Give them thirty seconds to actually paste it before moving on.</a:t>
+              <a:t>A map that lives in a chat scrolls away by noon. One that lives in your Project sits beside the problem statement, where you will find it again.</a:t>
             </a:r>
           </a:p>
         </p:txBody>
@@ -2444,7 +2444,7 @@
           <a:lstStyle/>
           <a:p>
             <a:r>
-              <a:t>Third objective. A map of boxes is not yet a plan. Each box needs a resource named, and there are exactly four kinds worth distinguishing.</a:t>
+              <a:t>Third objective: every box on that diagram gets annotated with what it actually needs to run.</a:t>
             </a:r>
           </a:p>
         </p:txBody>
@@ -2514,7 +2514,7 @@
           <a:lstStyle/>
           <a:p>
             <a:r>
-              <a:t>Read them in this order every time. The fourth is the one teams forget to allow — some steps should keep a person in the loop, and saying so now is a design decision, not a failure.</a:t>
+              <a:t>There are four kinds of need. Data, meaning something must be supplied. A tool — code, an API, or a model call. A routine, meaning it runs on a schedule. Or a human, where a person decides.</a:t>
             </a:r>
           </a:p>
         </p:txBody>
@@ -2584,7 +2584,7 @@
           <a:lstStyle/>
           <a:p>
             <a:r>
-              <a:t>The third is the important habit. An honest question mark on the map is worth more than a confident guess — it tells the team exactly where to spend the next hour.</a:t>
+              <a:t>Annotate every box: at least one need per step, say which of the four it is, and mark the unknowns rather than skipping them.</a:t>
             </a:r>
           </a:p>
         </p:txBody>
@@ -2654,7 +2654,7 @@
           <a:lstStyle/>
           <a:p>
             <a:r>
-              <a:t>The key phrase is without you starting it. If a step must happen every morning, or every time new data lands, it is a routine and not a thing a person remembers to do.</a:t>
+              <a:t>A Claude Routine is a prompt that Claude runs on a schedule, without anyone asking.</a:t>
             </a:r>
           </a:p>
         </p:txBody>
@@ -2724,7 +2724,7 @@
           <a:lstStyle/>
           <a:p>
             <a:r>
-              <a:t>The third test is the sharpest. If being late costs more than being slightly wrong, automate it. Day 3 revisits routines for ongoing checks after the week ends.</a:t>
+              <a:t>A step is a routine when it repeats on a clock, when nobody should have to remember it, and when being late is worse than being imperfect.</a:t>
             </a:r>
           </a:p>
         </p:txBody>
@@ -2794,7 +2794,7 @@
           <a:lstStyle/>
           <a:p>
             <a:r>
-              <a:t>A routine is just a step with a clock attached. Point out that this is the same step from their map, only scheduled — no new logic, just a trigger.</a:t>
+              <a:t>Here is one written out. Every weekday at eight: read new files in intake, score each against the role, append to the ranked sheet, and flag anything scoring low.</a:t>
             </a:r>
           </a:p>
         </p:txBody>
@@ -2864,7 +2864,7 @@
           <a:lstStyle/>
           <a:p>
             <a:r>
-              <a:t>Ask it about their own problem and let the silence sit. Most teams can name the input and the output but go vague in the middle. That vague middle is exactly what this session makes concrete.</a:t>
+              <a:t>Here is the question for your own problem. You can name your input and you can name your output. How do you actually get from one to the other?</a:t>
             </a:r>
           </a:p>
         </p:txBody>
@@ -2934,7 +2934,7 @@
           <a:lstStyle/>
           <a:p>
             <a:r>
-              <a:t>Waits is the operative word. If the system proceeds without the judgement, the human is not in the loop — they are being notified, which is a different and much weaker thing.</a:t>
+              <a:t>A human decision is a step where a person judges and the system waits for them.</a:t>
             </a:r>
           </a:p>
         </p:txBody>
@@ -3004,7 +3004,7 @@
           <a:lstStyle/>
           <a:p>
             <a:r>
-              <a:t>These are the three honest reasons. Note that none of them is the model is not good enough — that is a capability question, and it changes; these do not.</a:t>
+              <a:t>Keep a human in the loop when being wrong is expensive, when the call needs context the system does not have, and when someone has to be accountable.</a:t>
             </a:r>
           </a:p>
         </p:txBody>
@@ -3074,7 +3074,7 @@
           <a:lstStyle/>
           <a:p>
             <a:r>
-              <a:t>The worked example, annotated. Ask the room which row would hurt most if it silently failed. That question is the hinge into the risk pass on the next slide.</a:t>
+              <a:t>The worked example, annotated. Intake needs data plus a routine. Parse needs a tool. Score needs a model call. And approving the list needs a human decision.</a:t>
             </a:r>
           </a:p>
         </p:txBody>
@@ -3144,7 +3144,7 @@
           <a:lstStyle/>
           <a:p>
             <a:r>
-              <a:t>Not the hardest step, and not the most interesting. The one that costs the most if it breaks. Those are often different boxes, and teams instinctively pick the interesting one.</a:t>
+              <a:t>The riskiest step is the one whose failure would waste the most of your time.</a:t>
             </a:r>
           </a:p>
         </p:txBody>
@@ -3214,7 +3214,7 @@
           <a:lstStyle/>
           <a:p>
             <a:r>
-              <a:t>Force a single choice. Teams want to name three risky steps and then address none of them properly. One step, three failure modes, in the next ten minutes.</a:t>
+              <a:t>Find it in three moves. Mark the boxes you cannot describe. Ask which one stalls everything after it. Then pick one — only one gets this attention.</a:t>
             </a:r>
           </a:p>
         </p:txBody>
@@ -3284,7 +3284,7 @@
           <a:lstStyle/>
           <a:p>
             <a:r>
-              <a:t>Most likely first, not most dramatic. The early warning sign is what makes this actionable — it tells them what to watch for tomorrow while they build.</a:t>
+              <a:t>Here is the prompt for that. Describe the step, ask for the three most likely ways it fails in practice, most likely first, each with its early warning sign, and no fixes yet.</a:t>
             </a:r>
           </a:p>
         </p:txBody>
@@ -3354,7 +3354,7 @@
           <a:lstStyle/>
           <a:p>
             <a:r>
-              <a:t>Three axes to prompt them if Claude's answers feel thin. Access failures are the most under-predicted and the most annoying, because no amount of clever code fixes a missing credential.</a:t>
+              <a:t>Steps usually fail in three places. The input arrives wrong or not at all. The transform works, but not on real data. Or access fails — the key, the quota, or the approval.</a:t>
             </a:r>
           </a:p>
         </p:txBody>
@@ -3424,7 +3424,7 @@
           <a:lstStyle/>
           <a:p>
             <a:r>
-              <a:t>Three concrete moves, all available today. The third connects straight to 1.3 — the riskiest step should go to whoever is most likely to get it done, not whoever wants it.</a:t>
+              <a:t>Do three things with those failures: build the warning sign in first, stub the step if it might not land, and give the risky box your best owner.</a:t>
             </a:r>
           </a:p>
         </p:txBody>
@@ -3494,7 +3494,7 @@
           <a:lstStyle/>
           <a:p>
             <a:r>
-              <a:t>Intake wins on all three, so it gets the risk work. Walk the second row: Parse blocks everything after it but is well understood, so it is a schedule risk, not a design risk.</a:t>
+              <a:t>Three steps against three criteria. Intake is unknown, blocks the rest, and is hard to fix — it takes all three. Parse blocks the rest but is known. Score is unknown but blocks nothing.</a:t>
             </a:r>
           </a:p>
         </p:txBody>
@@ -3564,7 +3564,7 @@
           <a:lstStyle/>
           <a:p>
             <a:r>
-              <a:t>Unwritten risk is the same as unknown risk. Have them add it to the Artifact now, while the map is open, rather than promising to do it after the break.</a:t>
+              <a:t>Write the risk down: put it on the diagram, name the warning sign, and say who is watching for it.</a:t>
             </a:r>
           </a:p>
         </p:txBody>
@@ -3634,7 +3634,7 @@
           <a:lstStyle/>
           <a:p>
             <a:r>
-              <a:t>The bridge slide. A problem statement says what is wrong; a workflow says how you get from raw input to a delivered answer. You need both before any code exists.</a:t>
+              <a:t>Last hour you produced one precise sentence about what is wrong. This hour you draw the path that gets it solved.</a:t>
             </a:r>
           </a:p>
         </p:txBody>
@@ -3704,7 +3704,7 @@
           <a:lstStyle/>
           <a:p>
             <a:r>
-              <a:t>The exit criteria. Read them slowly and have teams self-assess out loud. Anyone missing the second can fix it in two minutes before 1.3 starts.</a:t>
+              <a:t>You are done when the map runs input to output, it is an Artifact with a link, every box names what it needs, and the riskiest step has three named failures.</a:t>
             </a:r>
           </a:p>
         </p:txBody>
@@ -3774,7 +3774,7 @@
           <a:lstStyle/>
           <a:p>
             <a:r>
-              <a:t>The concrete output of the hour. If a team cannot show all three, they are not ready to divide the work in 1.3 — flag it now rather than at eleven o'clock.</a:t>
+              <a:t>You leave with one shared diagram, four kinds of need annotated, and three named failures.</a:t>
             </a:r>
           </a:p>
         </p:txBody>
@@ -3844,7 +3844,7 @@
           <a:lstStyle/>
           <a:p>
             <a:r>
-              <a:t>The bridge into session 1.3. Make the dependency explicit: you can only assign owners to steps that exist, so the quality of that hour depends entirely on the map they just drew.</a:t>
+              <a:t>Next session we give every step one owner, run the workstreams in parallel, and put the board in GitHub.</a:t>
             </a:r>
           </a:p>
         </p:txBody>
@@ -3914,7 +3914,7 @@
           <a:lstStyle/>
           <a:p>
             <a:r>
-              <a:t>Close on a question that reveals priorities. The answer is usually the riskiest step, which is exactly the one they should build first. Let that land, then send them to the break.</a:t>
+              <a:t>One question to take with you: which box comes last? If two people answer differently, your map is not finished.</a:t>
             </a:r>
           </a:p>
         </p:txBody>
@@ -3984,7 +3984,7 @@
           <a:lstStyle/>
           <a:p>
             <a:r>
-              <a:t>The arc in four moves. Return here whenever the room loses the thread. Point out that only the last move is optional-feeling, and it is the one that matters most on Day 3.</a:t>
+              <a:t>Four moves to get there: break the problem into steps, draw them as an Artifact, annotate what each one needs, then stress the map to find where it breaks.</a:t>
             </a:r>
           </a:p>
         </p:txBody>
@@ -4054,7 +4054,7 @@
           <a:lstStyle/>
           <a:p>
             <a:r>
-              <a:t>First objective. The goal is a stepwise path from raw input to delivered output — no gaps, no magic middle where the hard part quietly lives.</a:t>
+              <a:t>First objective: a stepwise path from raw input to delivered output, with no gaps in the middle.</a:t>
             </a:r>
           </a:p>
         </p:txBody>
@@ -4124,7 +4124,7 @@
           <a:lstStyle/>
           <a:p>
             <a:r>
-              <a:t>Both ends matter. Teams often start mid-stream, assuming clean data appears from somewhere. The workflow starts at whatever genuinely arrives, in whatever state it arrives in.</a:t>
+              <a:t>A workflow is the ordered set of steps that carries you from raw input all the way to a delivered output. Both ends of that sentence matter as much as the middle.</a:t>
             </a:r>
           </a:p>
         </p:txBody>
@@ -4194,7 +4194,7 @@
           <a:lstStyle/>
           <a:p>
             <a:r>
-              <a:t>This is the unit test for a step. If you cannot say what goes in and what comes out, it is not a step yet — it is a wish, and it will hide the hard work until Day 2.</a:t>
+              <a:t>A step is one change, with a named input and a named output. If you cannot name both, it is not a step yet.</a:t>
             </a:r>
           </a:p>
         </p:txBody>

--- a/examples/pptx/immersion-1-2-workflow-map.pptx
+++ b/examples/pptx/immersion-1-2-workflow-map.pptx
@@ -57,7 +57,6 @@
     <p:sldId id="305" r:id="rId57"/>
     <p:sldId id="306" r:id="rId58"/>
     <p:sldId id="307" r:id="rId59"/>
-    <p:sldId id="308" r:id="rId60"/>
   </p:sldIdLst>
   <p:sldSz cx="12192000" cy="6858000" type="screen16x9"/>
   <p:notesSz cx="6858000" cy="9144000"/>
@@ -3869,76 +3868,6 @@
 </p:notes>
 </file>
 
-<file path=ppt/notesSlides/notesSlide53.xml><?xml version="1.0" encoding="utf-8"?>
-<p:notes xmlns:a="http://schemas.openxmlformats.org/drawingml/2006/main" xmlns:p="http://schemas.openxmlformats.org/presentationml/2006/main" xmlns:r="http://schemas.openxmlformats.org/officeDocument/2006/relationships">
-  <p:cSld>
-    <p:spTree>
-      <p:nvGrpSpPr>
-        <p:cNvPr id="1" name=""/>
-        <p:cNvGrpSpPr/>
-        <p:nvPr/>
-      </p:nvGrpSpPr>
-      <p:grpSpPr>
-        <a:xfrm>
-          <a:off x="0" y="0"/>
-          <a:ext cx="0" cy="0"/>
-          <a:chOff x="0" y="0"/>
-          <a:chExt cx="0" cy="0"/>
-        </a:xfrm>
-      </p:grpSpPr>
-      <p:sp>
-        <p:nvSpPr>
-          <p:cNvPr id="2" name="Slide Image Placeholder 1"/>
-          <p:cNvSpPr>
-            <a:spLocks noGrp="1"/>
-          </p:cNvSpPr>
-          <p:nvPr>
-            <p:ph type="sldImg" idx="2"/>
-          </p:nvPr>
-        </p:nvSpPr>
-        <p:spPr/>
-      </p:sp>
-      <p:sp>
-        <p:nvSpPr>
-          <p:cNvPr id="3" name="Notes Placeholder 2"/>
-          <p:cNvSpPr>
-            <a:spLocks noGrp="1"/>
-          </p:cNvSpPr>
-          <p:nvPr>
-            <p:ph type="body" idx="3" sz="quarter"/>
-          </p:nvPr>
-        </p:nvSpPr>
-        <p:spPr/>
-        <p:txBody>
-          <a:bodyPr/>
-          <a:lstStyle/>
-          <a:p>
-            <a:r>
-              <a:t>One question to take with you: which box comes last? If two people answer differently, your map is not finished.</a:t>
-            </a:r>
-          </a:p>
-        </p:txBody>
-      </p:sp>
-      <p:sp>
-        <p:nvSpPr>
-          <p:cNvPr id="4" name="Slide Number Placeholder 3"/>
-          <p:cNvSpPr>
-            <a:spLocks noGrp="1"/>
-          </p:cNvSpPr>
-          <p:nvPr>
-            <p:ph type="sldNum" idx="5" sz="quarter"/>
-          </p:nvPr>
-        </p:nvSpPr>
-        <p:spPr/>
-      </p:sp>
-    </p:spTree>
-  </p:cSld>
-  <p:clrMapOvr>
-    <a:masterClrMapping/>
-  </p:clrMapOvr>
-</p:notes>
-</file>
-
 <file path=ppt/notesSlides/notesSlide6.xml><?xml version="1.0" encoding="utf-8"?>
 <p:notes xmlns:a="http://schemas.openxmlformats.org/drawingml/2006/main" xmlns:p="http://schemas.openxmlformats.org/presentationml/2006/main" xmlns:r="http://schemas.openxmlformats.org/officeDocument/2006/relationships">
   <p:cSld>
@@ -5682,7 +5611,7 @@
             <a:r>
               <a:rPr sz="3400" b="1" i="0">
                 <a:solidFill>
-                  <a:srgbClr val="123A6B"/>
+                  <a:srgbClr val="0072CE"/>
                 </a:solidFill>
                 <a:latin typeface="Arial"/>
               </a:rPr>
@@ -5719,7 +5648,7 @@
             <a:r>
               <a:rPr sz="3400" b="1" i="0">
                 <a:solidFill>
-                  <a:srgbClr val="123A6B"/>
+                  <a:srgbClr val="0072CE"/>
                 </a:solidFill>
                 <a:latin typeface="Arial"/>
               </a:rPr>
@@ -6611,6 +6540,43 @@
         <p:spPr>
           <a:xfrm>
             <a:off x="6233160" y="1499616"/>
+            <a:ext cx="5958840" cy="609600"/>
+          </a:xfrm>
+          <a:prstGeom prst="rect">
+            <a:avLst/>
+          </a:prstGeom>
+          <a:noFill/>
+        </p:spPr>
+        <p:txBody>
+          <a:bodyPr wrap="none" lIns="0" rIns="0">
+            <a:noAutofit/>
+          </a:bodyPr>
+          <a:lstStyle/>
+          <a:p>
+            <a:pPr algn="l"/>
+            <a:r>
+              <a:rPr sz="3400" b="0" i="0">
+                <a:solidFill>
+                  <a:srgbClr val="0A2240"/>
+                </a:solidFill>
+                <a:latin typeface="Arial"/>
+              </a:rPr>
+              <a:t>Built with customers.</a:t>
+            </a:r>
+          </a:p>
+        </p:txBody>
+      </p:sp>
+      <p:sp>
+        <p:nvSpPr>
+          <p:cNvPr id="7" name="TextBox 6"/>
+          <p:cNvSpPr/>
+          <p:nvPr>
+            <p:ph type="body" idx="2"/>
+          </p:nvPr>
+        </p:nvSpPr>
+        <p:spPr>
+          <a:xfrm>
+            <a:off x="6233160" y="2383536"/>
             <a:ext cx="5501640" cy="1127760"/>
           </a:xfrm>
           <a:prstGeom prst="rect">
@@ -6632,44 +6598,7 @@
                 </a:solidFill>
                 <a:latin typeface="Arial"/>
               </a:rPr>
-              <a:t>Built with customers, not just for them.</a:t>
-            </a:r>
-          </a:p>
-        </p:txBody>
-      </p:sp>
-      <p:sp>
-        <p:nvSpPr>
-          <p:cNvPr id="7" name="TextBox 6"/>
-          <p:cNvSpPr/>
-          <p:nvPr>
-            <p:ph type="body" idx="2"/>
-          </p:nvPr>
-        </p:nvSpPr>
-        <p:spPr>
-          <a:xfrm>
-            <a:off x="6233160" y="2901696"/>
-            <a:ext cx="5501640" cy="1127760"/>
-          </a:xfrm>
-          <a:prstGeom prst="rect">
-            <a:avLst/>
-          </a:prstGeom>
-          <a:noFill/>
-        </p:spPr>
-        <p:txBody>
-          <a:bodyPr wrap="square" lIns="0" rIns="0">
-            <a:noAutofit/>
-          </a:bodyPr>
-          <a:lstStyle/>
-          <a:p>
-            <a:pPr algn="l"/>
-            <a:r>
-              <a:rPr sz="3400" b="0" i="0">
-                <a:solidFill>
-                  <a:srgbClr val="0A2240"/>
-                </a:solidFill>
-                <a:latin typeface="Arial"/>
-              </a:rPr>
-              <a:t>60% faster rollout; 50% fewer tickets.</a:t>
+              <a:t>60% faster; 50% fewer tickets</a:t>
             </a:r>
           </a:p>
         </p:txBody>
@@ -6688,405 +6617,6 @@
 </file>
 
 <file path=ppt/slideLayouts/slideLayout18.xml><?xml version="1.0" encoding="utf-8"?>
-<p:sldLayout xmlns:a="http://schemas.openxmlformats.org/drawingml/2006/main" xmlns:r="http://schemas.openxmlformats.org/officeDocument/2006/relationships" xmlns:p="http://schemas.openxmlformats.org/presentationml/2006/main" type="blank" preserve="1">
-  <p:cSld name="slidekit · Card Grid">
-    <p:bg>
-      <p:bgPr>
-        <a:solidFill>
-          <a:srgbClr val="FFFFFF"/>
-        </a:solidFill>
-        <a:effectLst/>
-      </p:bgPr>
-    </p:bg>
-    <p:spTree>
-      <p:nvGrpSpPr>
-        <p:cNvPr id="1" name=""/>
-        <p:cNvGrpSpPr/>
-        <p:nvPr/>
-      </p:nvGrpSpPr>
-      <p:grpSpPr>
-        <a:xfrm>
-          <a:off x="0" y="0"/>
-          <a:ext cx="0" cy="0"/>
-          <a:chOff x="0" y="0"/>
-          <a:chExt cx="0" cy="0"/>
-        </a:xfrm>
-      </p:grpSpPr>
-      <p:sp>
-        <p:nvSpPr>
-          <p:cNvPr id="4" name="Slide Number Placeholder 3"/>
-          <p:cNvSpPr>
-            <a:spLocks noGrp="1"/>
-          </p:cNvSpPr>
-          <p:nvPr>
-            <p:ph type="sldNum" sz="quarter" idx="12"/>
-          </p:nvPr>
-        </p:nvSpPr>
-        <p:spPr>
-          <a:xfrm>
-            <a:off x="11186160" y="6035040"/>
-            <a:ext cx="548640" cy="365760"/>
-          </a:xfrm>
-        </p:spPr>
-        <p:txBody>
-          <a:bodyPr/>
-          <a:lstStyle/>
-          <a:p>
-            <a:fld id="{C1FF6DA9-008F-8B48-92A6-B652298478BF}" type="slidenum">
-              <a:rPr lang="en-US" smtClean="0"/>
-              <a:t>‹#›</a:t>
-            </a:fld>
-            <a:endParaRPr lang="en-US"/>
-          </a:p>
-        </p:txBody>
-      </p:sp>
-      <p:sp>
-        <p:nvSpPr>
-          <p:cNvPr id="5" name="TextBox 4"/>
-          <p:cNvSpPr/>
-          <p:nvPr>
-            <p:ph type="title"/>
-          </p:nvPr>
-        </p:nvSpPr>
-        <p:spPr>
-          <a:xfrm>
-            <a:off x="457200" y="457200"/>
-            <a:ext cx="11277600" cy="768096"/>
-          </a:xfrm>
-          <a:prstGeom prst="rect">
-            <a:avLst/>
-          </a:prstGeom>
-          <a:noFill/>
-        </p:spPr>
-        <p:txBody>
-          <a:bodyPr wrap="none" lIns="0" rIns="0">
-            <a:noAutofit/>
-          </a:bodyPr>
-          <a:lstStyle/>
-          <a:p>
-            <a:pPr algn="l"/>
-            <a:r>
-              <a:rPr sz="4200" b="1" i="0">
-                <a:solidFill>
-                  <a:srgbClr val="0072CE"/>
-                </a:solidFill>
-                <a:latin typeface="Arial"/>
-              </a:rPr>
-              <a:t>What We Offer</a:t>
-            </a:r>
-          </a:p>
-        </p:txBody>
-      </p:sp>
-      <p:sp>
-        <p:nvSpPr>
-          <p:cNvPr id="6" name="TextBox 5"/>
-          <p:cNvSpPr/>
-          <p:nvPr>
-            <p:ph type="body" idx="1"/>
-          </p:nvPr>
-        </p:nvSpPr>
-        <p:spPr>
-          <a:xfrm>
-            <a:off x="457200" y="1499616"/>
-            <a:ext cx="2831366" cy="518159"/>
-          </a:xfrm>
-          <a:prstGeom prst="rect">
-            <a:avLst/>
-          </a:prstGeom>
-          <a:noFill/>
-        </p:spPr>
-        <p:txBody>
-          <a:bodyPr wrap="none" lIns="0" rIns="0">
-            <a:noAutofit/>
-          </a:bodyPr>
-          <a:lstStyle/>
-          <a:p>
-            <a:pPr algn="l"/>
-            <a:r>
-              <a:rPr sz="3400" b="1" i="0">
-                <a:solidFill>
-                  <a:srgbClr val="0A2240"/>
-                </a:solidFill>
-                <a:latin typeface="Arial"/>
-              </a:rPr>
-              <a:t>Insights</a:t>
-            </a:r>
-          </a:p>
-        </p:txBody>
-      </p:sp>
-      <p:sp>
-        <p:nvSpPr>
-          <p:cNvPr id="7" name="TextBox 6"/>
-          <p:cNvSpPr/>
-          <p:nvPr>
-            <p:ph type="body" idx="2"/>
-          </p:nvPr>
-        </p:nvSpPr>
-        <p:spPr>
-          <a:xfrm>
-            <a:off x="457200" y="2154935"/>
-            <a:ext cx="2613660" cy="3605785"/>
-          </a:xfrm>
-          <a:prstGeom prst="rect">
-            <a:avLst/>
-          </a:prstGeom>
-          <a:noFill/>
-        </p:spPr>
-        <p:txBody>
-          <a:bodyPr wrap="square" lIns="0" rIns="0">
-            <a:noAutofit/>
-          </a:bodyPr>
-          <a:lstStyle/>
-          <a:p>
-            <a:pPr algn="l"/>
-            <a:r>
-              <a:rPr sz="3400" b="0" i="0">
-                <a:solidFill>
-                  <a:srgbClr val="0A2240"/>
-                </a:solidFill>
-                <a:latin typeface="Arial"/>
-              </a:rPr>
-              <a:t>Live data and AI analytics.</a:t>
-            </a:r>
-          </a:p>
-        </p:txBody>
-      </p:sp>
-      <p:sp>
-        <p:nvSpPr>
-          <p:cNvPr id="8" name="TextBox 7"/>
-          <p:cNvSpPr/>
-          <p:nvPr>
-            <p:ph type="body" idx="3"/>
-          </p:nvPr>
-        </p:nvSpPr>
-        <p:spPr>
-          <a:xfrm>
-            <a:off x="3345180" y="1499616"/>
-            <a:ext cx="2909292" cy="518159"/>
-          </a:xfrm>
-          <a:prstGeom prst="rect">
-            <a:avLst/>
-          </a:prstGeom>
-          <a:noFill/>
-        </p:spPr>
-        <p:txBody>
-          <a:bodyPr wrap="none" lIns="0" rIns="0">
-            <a:noAutofit/>
-          </a:bodyPr>
-          <a:lstStyle/>
-          <a:p>
-            <a:pPr algn="l"/>
-            <a:r>
-              <a:rPr sz="3400" b="1" i="0">
-                <a:solidFill>
-                  <a:srgbClr val="0A2240"/>
-                </a:solidFill>
-                <a:latin typeface="Arial"/>
-              </a:rPr>
-              <a:t>Security</a:t>
-            </a:r>
-          </a:p>
-        </p:txBody>
-      </p:sp>
-      <p:sp>
-        <p:nvSpPr>
-          <p:cNvPr id="9" name="TextBox 8"/>
-          <p:cNvSpPr/>
-          <p:nvPr>
-            <p:ph type="body" idx="4"/>
-          </p:nvPr>
-        </p:nvSpPr>
-        <p:spPr>
-          <a:xfrm>
-            <a:off x="3345180" y="2154935"/>
-            <a:ext cx="2613660" cy="3605785"/>
-          </a:xfrm>
-          <a:prstGeom prst="rect">
-            <a:avLst/>
-          </a:prstGeom>
-          <a:noFill/>
-        </p:spPr>
-        <p:txBody>
-          <a:bodyPr wrap="square" lIns="0" rIns="0">
-            <a:noAutofit/>
-          </a:bodyPr>
-          <a:lstStyle/>
-          <a:p>
-            <a:pPr algn="l"/>
-            <a:r>
-              <a:rPr sz="3400" b="0" i="0">
-                <a:solidFill>
-                  <a:srgbClr val="0A2240"/>
-                </a:solidFill>
-                <a:latin typeface="Arial"/>
-              </a:rPr>
-              <a:t>Zero-trust, SOC 2 ready.</a:t>
-            </a:r>
-          </a:p>
-        </p:txBody>
-      </p:sp>
-      <p:sp>
-        <p:nvSpPr>
-          <p:cNvPr id="10" name="TextBox 9"/>
-          <p:cNvSpPr/>
-          <p:nvPr>
-            <p:ph type="body" idx="5"/>
-          </p:nvPr>
-        </p:nvSpPr>
-        <p:spPr>
-          <a:xfrm>
-            <a:off x="6233160" y="1499616"/>
-            <a:ext cx="2613660" cy="518159"/>
-          </a:xfrm>
-          <a:prstGeom prst="rect">
-            <a:avLst/>
-          </a:prstGeom>
-          <a:noFill/>
-        </p:spPr>
-        <p:txBody>
-          <a:bodyPr wrap="none" lIns="0" rIns="0">
-            <a:noAutofit/>
-          </a:bodyPr>
-          <a:lstStyle/>
-          <a:p>
-            <a:pPr algn="l"/>
-            <a:r>
-              <a:rPr sz="3400" b="1" i="0">
-                <a:solidFill>
-                  <a:srgbClr val="0A2240"/>
-                </a:solidFill>
-                <a:latin typeface="Arial"/>
-              </a:rPr>
-              <a:t>Speed</a:t>
-            </a:r>
-          </a:p>
-        </p:txBody>
-      </p:sp>
-      <p:sp>
-        <p:nvSpPr>
-          <p:cNvPr id="11" name="TextBox 10"/>
-          <p:cNvSpPr/>
-          <p:nvPr>
-            <p:ph type="body" idx="6"/>
-          </p:nvPr>
-        </p:nvSpPr>
-        <p:spPr>
-          <a:xfrm>
-            <a:off x="6233160" y="2154935"/>
-            <a:ext cx="2613660" cy="3605785"/>
-          </a:xfrm>
-          <a:prstGeom prst="rect">
-            <a:avLst/>
-          </a:prstGeom>
-          <a:noFill/>
-        </p:spPr>
-        <p:txBody>
-          <a:bodyPr wrap="square" lIns="0" rIns="0">
-            <a:noAutofit/>
-          </a:bodyPr>
-          <a:lstStyle/>
-          <a:p>
-            <a:pPr algn="l"/>
-            <a:r>
-              <a:rPr sz="3400" b="0" i="0">
-                <a:solidFill>
-                  <a:srgbClr val="0A2240"/>
-                </a:solidFill>
-                <a:latin typeface="Arial"/>
-              </a:rPr>
-              <a:t>Sub-100ms p99 latency.</a:t>
-            </a:r>
-          </a:p>
-        </p:txBody>
-      </p:sp>
-      <p:sp>
-        <p:nvSpPr>
-          <p:cNvPr id="12" name="TextBox 11"/>
-          <p:cNvSpPr/>
-          <p:nvPr>
-            <p:ph type="body" idx="7"/>
-          </p:nvPr>
-        </p:nvSpPr>
-        <p:spPr>
-          <a:xfrm>
-            <a:off x="9121140" y="1499616"/>
-            <a:ext cx="2613660" cy="518159"/>
-          </a:xfrm>
-          <a:prstGeom prst="rect">
-            <a:avLst/>
-          </a:prstGeom>
-          <a:noFill/>
-        </p:spPr>
-        <p:txBody>
-          <a:bodyPr wrap="none" lIns="0" rIns="0">
-            <a:noAutofit/>
-          </a:bodyPr>
-          <a:lstStyle/>
-          <a:p>
-            <a:pPr algn="l"/>
-            <a:r>
-              <a:rPr sz="3400" b="1" i="0">
-                <a:solidFill>
-                  <a:srgbClr val="0A2240"/>
-                </a:solidFill>
-                <a:latin typeface="Arial"/>
-              </a:rPr>
-              <a:t>APIs</a:t>
-            </a:r>
-          </a:p>
-        </p:txBody>
-      </p:sp>
-      <p:sp>
-        <p:nvSpPr>
-          <p:cNvPr id="13" name="TextBox 12"/>
-          <p:cNvSpPr/>
-          <p:nvPr>
-            <p:ph type="body" idx="8"/>
-          </p:nvPr>
-        </p:nvSpPr>
-        <p:spPr>
-          <a:xfrm>
-            <a:off x="9121140" y="2154935"/>
-            <a:ext cx="2613660" cy="3605785"/>
-          </a:xfrm>
-          <a:prstGeom prst="rect">
-            <a:avLst/>
-          </a:prstGeom>
-          <a:noFill/>
-        </p:spPr>
-        <p:txBody>
-          <a:bodyPr wrap="square" lIns="0" rIns="0">
-            <a:noAutofit/>
-          </a:bodyPr>
-          <a:lstStyle/>
-          <a:p>
-            <a:pPr algn="l"/>
-            <a:r>
-              <a:rPr sz="3400" b="0" i="0">
-                <a:solidFill>
-                  <a:srgbClr val="0A2240"/>
-                </a:solidFill>
-                <a:latin typeface="Arial"/>
-              </a:rPr>
-              <a:t>300+ open connectors.</a:t>
-            </a:r>
-          </a:p>
-        </p:txBody>
-      </p:sp>
-    </p:spTree>
-    <p:extLst>
-      <p:ext uri="{BB962C8B-B14F-4D97-AF65-F5344CB8AC3E}">
-        <p14:creationId xmlns:p14="http://schemas.microsoft.com/office/powerpoint/2010/main" val="1212999818"/>
-      </p:ext>
-    </p:extLst>
-  </p:cSld>
-  <p:clrMapOvr>
-    <a:masterClrMapping/>
-  </p:clrMapOvr>
-</p:sldLayout>
-</file>
-
-<file path=ppt/slideLayouts/slideLayout19.xml><?xml version="1.0" encoding="utf-8"?>
 <p:sldLayout xmlns:a="http://schemas.openxmlformats.org/drawingml/2006/main" xmlns:r="http://schemas.openxmlformats.org/officeDocument/2006/relationships" xmlns:p="http://schemas.openxmlformats.org/presentationml/2006/main" type="blank" preserve="1">
   <p:cSld name="slidekit · Section Divider">
     <p:bg>
@@ -7241,6 +6771,511 @@
                 <a:latin typeface="Arial"/>
               </a:rPr>
               <a:t>Where We Stand Today</a:t>
+            </a:r>
+          </a:p>
+        </p:txBody>
+      </p:sp>
+    </p:spTree>
+    <p:extLst>
+      <p:ext uri="{BB962C8B-B14F-4D97-AF65-F5344CB8AC3E}">
+        <p14:creationId xmlns:p14="http://schemas.microsoft.com/office/powerpoint/2010/main" val="1212999818"/>
+      </p:ext>
+    </p:extLst>
+  </p:cSld>
+  <p:clrMapOvr>
+    <a:masterClrMapping/>
+  </p:clrMapOvr>
+</p:sldLayout>
+</file>
+
+<file path=ppt/slideLayouts/slideLayout19.xml><?xml version="1.0" encoding="utf-8"?>
+<p:sldLayout xmlns:a="http://schemas.openxmlformats.org/drawingml/2006/main" xmlns:r="http://schemas.openxmlformats.org/officeDocument/2006/relationships" xmlns:p="http://schemas.openxmlformats.org/presentationml/2006/main" type="blank" preserve="1">
+  <p:cSld name="slidekit · Agenda">
+    <p:bg>
+      <p:bgPr>
+        <a:solidFill>
+          <a:srgbClr val="FFFFFF"/>
+        </a:solidFill>
+        <a:effectLst/>
+      </p:bgPr>
+    </p:bg>
+    <p:spTree>
+      <p:nvGrpSpPr>
+        <p:cNvPr id="1" name=""/>
+        <p:cNvGrpSpPr/>
+        <p:nvPr/>
+      </p:nvGrpSpPr>
+      <p:grpSpPr>
+        <a:xfrm>
+          <a:off x="0" y="0"/>
+          <a:ext cx="0" cy="0"/>
+          <a:chOff x="0" y="0"/>
+          <a:chExt cx="0" cy="0"/>
+        </a:xfrm>
+      </p:grpSpPr>
+      <p:sp>
+        <p:nvSpPr>
+          <p:cNvPr id="4" name="Slide Number Placeholder 3"/>
+          <p:cNvSpPr>
+            <a:spLocks noGrp="1"/>
+          </p:cNvSpPr>
+          <p:nvPr>
+            <p:ph type="sldNum" sz="quarter" idx="12"/>
+          </p:nvPr>
+        </p:nvSpPr>
+        <p:spPr>
+          <a:xfrm>
+            <a:off x="11186160" y="6035040"/>
+            <a:ext cx="548640" cy="365760"/>
+          </a:xfrm>
+        </p:spPr>
+        <p:txBody>
+          <a:bodyPr/>
+          <a:lstStyle/>
+          <a:p>
+            <a:fld id="{C1FF6DA9-008F-8B48-92A6-B652298478BF}" type="slidenum">
+              <a:rPr lang="en-US" smtClean="0"/>
+              <a:t>‹#›</a:t>
+            </a:fld>
+            <a:endParaRPr lang="en-US"/>
+          </a:p>
+        </p:txBody>
+      </p:sp>
+      <p:sp>
+        <p:nvSpPr>
+          <p:cNvPr id="5" name="TextBox 4"/>
+          <p:cNvSpPr/>
+          <p:nvPr>
+            <p:ph type="title"/>
+          </p:nvPr>
+        </p:nvSpPr>
+        <p:spPr>
+          <a:xfrm>
+            <a:off x="457200" y="457200"/>
+            <a:ext cx="11277600" cy="768096"/>
+          </a:xfrm>
+          <a:prstGeom prst="rect">
+            <a:avLst/>
+          </a:prstGeom>
+          <a:noFill/>
+        </p:spPr>
+        <p:txBody>
+          <a:bodyPr wrap="none" lIns="0" rIns="0">
+            <a:noAutofit/>
+          </a:bodyPr>
+          <a:lstStyle/>
+          <a:p>
+            <a:pPr algn="l"/>
+            <a:r>
+              <a:rPr sz="4200" b="1" i="0">
+                <a:solidFill>
+                  <a:srgbClr val="0072CE"/>
+                </a:solidFill>
+                <a:latin typeface="Arial"/>
+              </a:rPr>
+              <a:t>What We Will Cover</a:t>
+            </a:r>
+          </a:p>
+        </p:txBody>
+      </p:sp>
+      <p:sp>
+        <p:nvSpPr>
+          <p:cNvPr id="6" name="Rectangle 5"/>
+          <p:cNvSpPr/>
+          <p:nvPr>
+            <p:ph type="body" idx="1"/>
+          </p:nvPr>
+        </p:nvSpPr>
+        <p:spPr>
+          <a:xfrm>
+            <a:off x="457200" y="1280160"/>
+            <a:ext cx="11277600" cy="64008"/>
+          </a:xfrm>
+          <a:prstGeom prst="rect">
+            <a:avLst/>
+          </a:prstGeom>
+          <a:solidFill>
+            <a:srgbClr val="0072CE"/>
+          </a:solidFill>
+          <a:ln>
+            <a:noFill/>
+          </a:ln>
+          <a:effectLst/>
+        </p:spPr>
+        <p:txBody>
+          <a:bodyPr rtlCol="0" anchor="ctr"/>
+          <a:lstStyle/>
+          <a:p>
+            <a:pPr algn="ctr"/>
+          </a:p>
+        </p:txBody>
+      </p:sp>
+      <p:sp>
+        <p:nvSpPr>
+          <p:cNvPr id="7" name="TextBox 6"/>
+          <p:cNvSpPr/>
+          <p:nvPr>
+            <p:ph type="body" idx="2"/>
+          </p:nvPr>
+        </p:nvSpPr>
+        <p:spPr>
+          <a:xfrm>
+            <a:off x="457200" y="1618488"/>
+            <a:ext cx="951348" cy="518159"/>
+          </a:xfrm>
+          <a:prstGeom prst="rect">
+            <a:avLst/>
+          </a:prstGeom>
+          <a:noFill/>
+        </p:spPr>
+        <p:txBody>
+          <a:bodyPr wrap="none" lIns="0" rIns="0">
+            <a:noAutofit/>
+          </a:bodyPr>
+          <a:lstStyle/>
+          <a:p>
+            <a:pPr algn="l"/>
+            <a:r>
+              <a:rPr sz="3400" b="1" i="0">
+                <a:solidFill>
+                  <a:srgbClr val="0072CE"/>
+                </a:solidFill>
+                <a:latin typeface="Arial"/>
+              </a:rPr>
+              <a:t>01</a:t>
+            </a:r>
+          </a:p>
+        </p:txBody>
+      </p:sp>
+      <p:sp>
+        <p:nvSpPr>
+          <p:cNvPr id="8" name="TextBox 7"/>
+          <p:cNvSpPr/>
+          <p:nvPr>
+            <p:ph type="body" idx="3"/>
+          </p:nvPr>
+        </p:nvSpPr>
+        <p:spPr>
+          <a:xfrm>
+            <a:off x="1371600" y="1618488"/>
+            <a:ext cx="10363200" cy="518159"/>
+          </a:xfrm>
+          <a:prstGeom prst="rect">
+            <a:avLst/>
+          </a:prstGeom>
+          <a:noFill/>
+        </p:spPr>
+        <p:txBody>
+          <a:bodyPr wrap="none" lIns="0" rIns="0">
+            <a:noAutofit/>
+          </a:bodyPr>
+          <a:lstStyle/>
+          <a:p>
+            <a:pPr algn="l"/>
+            <a:r>
+              <a:rPr sz="3400" b="0" i="0">
+                <a:solidFill>
+                  <a:srgbClr val="0A2240"/>
+                </a:solidFill>
+                <a:latin typeface="Arial"/>
+              </a:rPr>
+              <a:t>Performance against targets</a:t>
+            </a:r>
+          </a:p>
+        </p:txBody>
+      </p:sp>
+      <p:sp>
+        <p:nvSpPr>
+          <p:cNvPr id="9" name="TextBox 8"/>
+          <p:cNvSpPr/>
+          <p:nvPr>
+            <p:ph type="body" idx="4"/>
+          </p:nvPr>
+        </p:nvSpPr>
+        <p:spPr>
+          <a:xfrm>
+            <a:off x="457200" y="2501798"/>
+            <a:ext cx="951348" cy="518159"/>
+          </a:xfrm>
+          <a:prstGeom prst="rect">
+            <a:avLst/>
+          </a:prstGeom>
+          <a:noFill/>
+        </p:spPr>
+        <p:txBody>
+          <a:bodyPr wrap="none" lIns="0" rIns="0">
+            <a:noAutofit/>
+          </a:bodyPr>
+          <a:lstStyle/>
+          <a:p>
+            <a:pPr algn="l"/>
+            <a:r>
+              <a:rPr sz="3400" b="1" i="0">
+                <a:solidFill>
+                  <a:srgbClr val="0072CE"/>
+                </a:solidFill>
+                <a:latin typeface="Arial"/>
+              </a:rPr>
+              <a:t>02</a:t>
+            </a:r>
+          </a:p>
+        </p:txBody>
+      </p:sp>
+      <p:sp>
+        <p:nvSpPr>
+          <p:cNvPr id="10" name="TextBox 9"/>
+          <p:cNvSpPr/>
+          <p:nvPr>
+            <p:ph type="body" idx="5"/>
+          </p:nvPr>
+        </p:nvSpPr>
+        <p:spPr>
+          <a:xfrm>
+            <a:off x="1371600" y="2501798"/>
+            <a:ext cx="10363200" cy="518159"/>
+          </a:xfrm>
+          <a:prstGeom prst="rect">
+            <a:avLst/>
+          </a:prstGeom>
+          <a:noFill/>
+        </p:spPr>
+        <p:txBody>
+          <a:bodyPr wrap="none" lIns="0" rIns="0">
+            <a:noAutofit/>
+          </a:bodyPr>
+          <a:lstStyle/>
+          <a:p>
+            <a:pPr algn="l"/>
+            <a:r>
+              <a:rPr sz="3400" b="0" i="0">
+                <a:solidFill>
+                  <a:srgbClr val="0A2240"/>
+                </a:solidFill>
+                <a:latin typeface="Arial"/>
+              </a:rPr>
+              <a:t>Customer and market signals</a:t>
+            </a:r>
+          </a:p>
+        </p:txBody>
+      </p:sp>
+      <p:sp>
+        <p:nvSpPr>
+          <p:cNvPr id="11" name="TextBox 10"/>
+          <p:cNvSpPr/>
+          <p:nvPr>
+            <p:ph type="body" idx="6"/>
+          </p:nvPr>
+        </p:nvSpPr>
+        <p:spPr>
+          <a:xfrm>
+            <a:off x="457200" y="3385108"/>
+            <a:ext cx="951348" cy="518159"/>
+          </a:xfrm>
+          <a:prstGeom prst="rect">
+            <a:avLst/>
+          </a:prstGeom>
+          <a:noFill/>
+        </p:spPr>
+        <p:txBody>
+          <a:bodyPr wrap="none" lIns="0" rIns="0">
+            <a:noAutofit/>
+          </a:bodyPr>
+          <a:lstStyle/>
+          <a:p>
+            <a:pPr algn="l"/>
+            <a:r>
+              <a:rPr sz="3400" b="1" i="0">
+                <a:solidFill>
+                  <a:srgbClr val="0072CE"/>
+                </a:solidFill>
+                <a:latin typeface="Arial"/>
+              </a:rPr>
+              <a:t>03</a:t>
+            </a:r>
+          </a:p>
+        </p:txBody>
+      </p:sp>
+      <p:sp>
+        <p:nvSpPr>
+          <p:cNvPr id="12" name="TextBox 11"/>
+          <p:cNvSpPr/>
+          <p:nvPr>
+            <p:ph type="body" idx="7"/>
+          </p:nvPr>
+        </p:nvSpPr>
+        <p:spPr>
+          <a:xfrm>
+            <a:off x="1371600" y="3385108"/>
+            <a:ext cx="10363200" cy="518159"/>
+          </a:xfrm>
+          <a:prstGeom prst="rect">
+            <a:avLst/>
+          </a:prstGeom>
+          <a:noFill/>
+        </p:spPr>
+        <p:txBody>
+          <a:bodyPr wrap="none" lIns="0" rIns="0">
+            <a:noAutofit/>
+          </a:bodyPr>
+          <a:lstStyle/>
+          <a:p>
+            <a:pPr algn="l"/>
+            <a:r>
+              <a:rPr sz="3400" b="0" i="0">
+                <a:solidFill>
+                  <a:srgbClr val="0A2240"/>
+                </a:solidFill>
+                <a:latin typeface="Arial"/>
+              </a:rPr>
+              <a:t>Operational health and risks</a:t>
+            </a:r>
+          </a:p>
+        </p:txBody>
+      </p:sp>
+      <p:sp>
+        <p:nvSpPr>
+          <p:cNvPr id="13" name="TextBox 12"/>
+          <p:cNvSpPr/>
+          <p:nvPr>
+            <p:ph type="body" idx="8"/>
+          </p:nvPr>
+        </p:nvSpPr>
+        <p:spPr>
+          <a:xfrm>
+            <a:off x="457200" y="4268418"/>
+            <a:ext cx="951348" cy="518159"/>
+          </a:xfrm>
+          <a:prstGeom prst="rect">
+            <a:avLst/>
+          </a:prstGeom>
+          <a:noFill/>
+        </p:spPr>
+        <p:txBody>
+          <a:bodyPr wrap="none" lIns="0" rIns="0">
+            <a:noAutofit/>
+          </a:bodyPr>
+          <a:lstStyle/>
+          <a:p>
+            <a:pPr algn="l"/>
+            <a:r>
+              <a:rPr sz="3400" b="1" i="0">
+                <a:solidFill>
+                  <a:srgbClr val="0072CE"/>
+                </a:solidFill>
+                <a:latin typeface="Arial"/>
+              </a:rPr>
+              <a:t>04</a:t>
+            </a:r>
+          </a:p>
+        </p:txBody>
+      </p:sp>
+      <p:sp>
+        <p:nvSpPr>
+          <p:cNvPr id="14" name="TextBox 13"/>
+          <p:cNvSpPr/>
+          <p:nvPr>
+            <p:ph type="body" idx="9"/>
+          </p:nvPr>
+        </p:nvSpPr>
+        <p:spPr>
+          <a:xfrm>
+            <a:off x="1371600" y="4268418"/>
+            <a:ext cx="10363200" cy="518159"/>
+          </a:xfrm>
+          <a:prstGeom prst="rect">
+            <a:avLst/>
+          </a:prstGeom>
+          <a:noFill/>
+        </p:spPr>
+        <p:txBody>
+          <a:bodyPr wrap="none" lIns="0" rIns="0">
+            <a:noAutofit/>
+          </a:bodyPr>
+          <a:lstStyle/>
+          <a:p>
+            <a:pPr algn="l"/>
+            <a:r>
+              <a:rPr sz="3400" b="0" i="0">
+                <a:solidFill>
+                  <a:srgbClr val="0A2240"/>
+                </a:solidFill>
+                <a:latin typeface="Arial"/>
+              </a:rPr>
+              <a:t>Roadmap for next quarter</a:t>
+            </a:r>
+          </a:p>
+        </p:txBody>
+      </p:sp>
+      <p:sp>
+        <p:nvSpPr>
+          <p:cNvPr id="15" name="TextBox 14"/>
+          <p:cNvSpPr/>
+          <p:nvPr>
+            <p:ph type="body" idx="13"/>
+          </p:nvPr>
+        </p:nvSpPr>
+        <p:spPr>
+          <a:xfrm>
+            <a:off x="457200" y="5151728"/>
+            <a:ext cx="951348" cy="518159"/>
+          </a:xfrm>
+          <a:prstGeom prst="rect">
+            <a:avLst/>
+          </a:prstGeom>
+          <a:noFill/>
+        </p:spPr>
+        <p:txBody>
+          <a:bodyPr wrap="none" lIns="0" rIns="0">
+            <a:noAutofit/>
+          </a:bodyPr>
+          <a:lstStyle/>
+          <a:p>
+            <a:pPr algn="l"/>
+            <a:r>
+              <a:rPr sz="3400" b="1" i="0">
+                <a:solidFill>
+                  <a:srgbClr val="0072CE"/>
+                </a:solidFill>
+                <a:latin typeface="Arial"/>
+              </a:rPr>
+              <a:t>05</a:t>
+            </a:r>
+          </a:p>
+        </p:txBody>
+      </p:sp>
+      <p:sp>
+        <p:nvSpPr>
+          <p:cNvPr id="16" name="TextBox 15"/>
+          <p:cNvSpPr/>
+          <p:nvPr>
+            <p:ph type="body" idx="14"/>
+          </p:nvPr>
+        </p:nvSpPr>
+        <p:spPr>
+          <a:xfrm>
+            <a:off x="1371600" y="5151728"/>
+            <a:ext cx="10363200" cy="518159"/>
+          </a:xfrm>
+          <a:prstGeom prst="rect">
+            <a:avLst/>
+          </a:prstGeom>
+          <a:noFill/>
+        </p:spPr>
+        <p:txBody>
+          <a:bodyPr wrap="none" lIns="0" rIns="0">
+            <a:noAutofit/>
+          </a:bodyPr>
+          <a:lstStyle/>
+          <a:p>
+            <a:pPr algn="l"/>
+            <a:r>
+              <a:rPr sz="3400" b="0" i="0">
+                <a:solidFill>
+                  <a:srgbClr val="0A2240"/>
+                </a:solidFill>
+                <a:latin typeface="Arial"/>
+              </a:rPr>
+              <a:t>Decisions we need today</a:t>
             </a:r>
           </a:p>
         </p:txBody>
@@ -7430,511 +7465,6 @@
 
 <file path=ppt/slideLayouts/slideLayout20.xml><?xml version="1.0" encoding="utf-8"?>
 <p:sldLayout xmlns:a="http://schemas.openxmlformats.org/drawingml/2006/main" xmlns:r="http://schemas.openxmlformats.org/officeDocument/2006/relationships" xmlns:p="http://schemas.openxmlformats.org/presentationml/2006/main" type="blank" preserve="1">
-  <p:cSld name="slidekit · Agenda">
-    <p:bg>
-      <p:bgPr>
-        <a:solidFill>
-          <a:srgbClr val="FFFFFF"/>
-        </a:solidFill>
-        <a:effectLst/>
-      </p:bgPr>
-    </p:bg>
-    <p:spTree>
-      <p:nvGrpSpPr>
-        <p:cNvPr id="1" name=""/>
-        <p:cNvGrpSpPr/>
-        <p:nvPr/>
-      </p:nvGrpSpPr>
-      <p:grpSpPr>
-        <a:xfrm>
-          <a:off x="0" y="0"/>
-          <a:ext cx="0" cy="0"/>
-          <a:chOff x="0" y="0"/>
-          <a:chExt cx="0" cy="0"/>
-        </a:xfrm>
-      </p:grpSpPr>
-      <p:sp>
-        <p:nvSpPr>
-          <p:cNvPr id="4" name="Slide Number Placeholder 3"/>
-          <p:cNvSpPr>
-            <a:spLocks noGrp="1"/>
-          </p:cNvSpPr>
-          <p:nvPr>
-            <p:ph type="sldNum" sz="quarter" idx="12"/>
-          </p:nvPr>
-        </p:nvSpPr>
-        <p:spPr>
-          <a:xfrm>
-            <a:off x="11186160" y="6035040"/>
-            <a:ext cx="548640" cy="365760"/>
-          </a:xfrm>
-        </p:spPr>
-        <p:txBody>
-          <a:bodyPr/>
-          <a:lstStyle/>
-          <a:p>
-            <a:fld id="{C1FF6DA9-008F-8B48-92A6-B652298478BF}" type="slidenum">
-              <a:rPr lang="en-US" smtClean="0"/>
-              <a:t>‹#›</a:t>
-            </a:fld>
-            <a:endParaRPr lang="en-US"/>
-          </a:p>
-        </p:txBody>
-      </p:sp>
-      <p:sp>
-        <p:nvSpPr>
-          <p:cNvPr id="5" name="TextBox 4"/>
-          <p:cNvSpPr/>
-          <p:nvPr>
-            <p:ph type="title"/>
-          </p:nvPr>
-        </p:nvSpPr>
-        <p:spPr>
-          <a:xfrm>
-            <a:off x="457200" y="457200"/>
-            <a:ext cx="11277600" cy="768096"/>
-          </a:xfrm>
-          <a:prstGeom prst="rect">
-            <a:avLst/>
-          </a:prstGeom>
-          <a:noFill/>
-        </p:spPr>
-        <p:txBody>
-          <a:bodyPr wrap="none" lIns="0" rIns="0">
-            <a:noAutofit/>
-          </a:bodyPr>
-          <a:lstStyle/>
-          <a:p>
-            <a:pPr algn="l"/>
-            <a:r>
-              <a:rPr sz="4200" b="1" i="0">
-                <a:solidFill>
-                  <a:srgbClr val="0072CE"/>
-                </a:solidFill>
-                <a:latin typeface="Arial"/>
-              </a:rPr>
-              <a:t>What We Will Cover</a:t>
-            </a:r>
-          </a:p>
-        </p:txBody>
-      </p:sp>
-      <p:sp>
-        <p:nvSpPr>
-          <p:cNvPr id="6" name="Rectangle 5"/>
-          <p:cNvSpPr/>
-          <p:nvPr>
-            <p:ph type="body" idx="1"/>
-          </p:nvPr>
-        </p:nvSpPr>
-        <p:spPr>
-          <a:xfrm>
-            <a:off x="457200" y="1280160"/>
-            <a:ext cx="11277600" cy="64008"/>
-          </a:xfrm>
-          <a:prstGeom prst="rect">
-            <a:avLst/>
-          </a:prstGeom>
-          <a:solidFill>
-            <a:srgbClr val="0072CE"/>
-          </a:solidFill>
-          <a:ln>
-            <a:noFill/>
-          </a:ln>
-          <a:effectLst/>
-        </p:spPr>
-        <p:txBody>
-          <a:bodyPr rtlCol="0" anchor="ctr"/>
-          <a:lstStyle/>
-          <a:p>
-            <a:pPr algn="ctr"/>
-          </a:p>
-        </p:txBody>
-      </p:sp>
-      <p:sp>
-        <p:nvSpPr>
-          <p:cNvPr id="7" name="TextBox 6"/>
-          <p:cNvSpPr/>
-          <p:nvPr>
-            <p:ph type="body" idx="2"/>
-          </p:nvPr>
-        </p:nvSpPr>
-        <p:spPr>
-          <a:xfrm>
-            <a:off x="457200" y="1618488"/>
-            <a:ext cx="951348" cy="518159"/>
-          </a:xfrm>
-          <a:prstGeom prst="rect">
-            <a:avLst/>
-          </a:prstGeom>
-          <a:noFill/>
-        </p:spPr>
-        <p:txBody>
-          <a:bodyPr wrap="none" lIns="0" rIns="0">
-            <a:noAutofit/>
-          </a:bodyPr>
-          <a:lstStyle/>
-          <a:p>
-            <a:pPr algn="l"/>
-            <a:r>
-              <a:rPr sz="3400" b="1" i="0">
-                <a:solidFill>
-                  <a:srgbClr val="0072CE"/>
-                </a:solidFill>
-                <a:latin typeface="Arial"/>
-              </a:rPr>
-              <a:t>01</a:t>
-            </a:r>
-          </a:p>
-        </p:txBody>
-      </p:sp>
-      <p:sp>
-        <p:nvSpPr>
-          <p:cNvPr id="8" name="TextBox 7"/>
-          <p:cNvSpPr/>
-          <p:nvPr>
-            <p:ph type="body" idx="3"/>
-          </p:nvPr>
-        </p:nvSpPr>
-        <p:spPr>
-          <a:xfrm>
-            <a:off x="1371600" y="1618488"/>
-            <a:ext cx="10363200" cy="518159"/>
-          </a:xfrm>
-          <a:prstGeom prst="rect">
-            <a:avLst/>
-          </a:prstGeom>
-          <a:noFill/>
-        </p:spPr>
-        <p:txBody>
-          <a:bodyPr wrap="none" lIns="0" rIns="0">
-            <a:noAutofit/>
-          </a:bodyPr>
-          <a:lstStyle/>
-          <a:p>
-            <a:pPr algn="l"/>
-            <a:r>
-              <a:rPr sz="3400" b="0" i="0">
-                <a:solidFill>
-                  <a:srgbClr val="0A2240"/>
-                </a:solidFill>
-                <a:latin typeface="Arial"/>
-              </a:rPr>
-              <a:t>Performance against targets</a:t>
-            </a:r>
-          </a:p>
-        </p:txBody>
-      </p:sp>
-      <p:sp>
-        <p:nvSpPr>
-          <p:cNvPr id="9" name="TextBox 8"/>
-          <p:cNvSpPr/>
-          <p:nvPr>
-            <p:ph type="body" idx="4"/>
-          </p:nvPr>
-        </p:nvSpPr>
-        <p:spPr>
-          <a:xfrm>
-            <a:off x="457200" y="2501798"/>
-            <a:ext cx="951348" cy="518159"/>
-          </a:xfrm>
-          <a:prstGeom prst="rect">
-            <a:avLst/>
-          </a:prstGeom>
-          <a:noFill/>
-        </p:spPr>
-        <p:txBody>
-          <a:bodyPr wrap="none" lIns="0" rIns="0">
-            <a:noAutofit/>
-          </a:bodyPr>
-          <a:lstStyle/>
-          <a:p>
-            <a:pPr algn="l"/>
-            <a:r>
-              <a:rPr sz="3400" b="1" i="0">
-                <a:solidFill>
-                  <a:srgbClr val="0072CE"/>
-                </a:solidFill>
-                <a:latin typeface="Arial"/>
-              </a:rPr>
-              <a:t>02</a:t>
-            </a:r>
-          </a:p>
-        </p:txBody>
-      </p:sp>
-      <p:sp>
-        <p:nvSpPr>
-          <p:cNvPr id="10" name="TextBox 9"/>
-          <p:cNvSpPr/>
-          <p:nvPr>
-            <p:ph type="body" idx="5"/>
-          </p:nvPr>
-        </p:nvSpPr>
-        <p:spPr>
-          <a:xfrm>
-            <a:off x="1371600" y="2501798"/>
-            <a:ext cx="10363200" cy="518159"/>
-          </a:xfrm>
-          <a:prstGeom prst="rect">
-            <a:avLst/>
-          </a:prstGeom>
-          <a:noFill/>
-        </p:spPr>
-        <p:txBody>
-          <a:bodyPr wrap="none" lIns="0" rIns="0">
-            <a:noAutofit/>
-          </a:bodyPr>
-          <a:lstStyle/>
-          <a:p>
-            <a:pPr algn="l"/>
-            <a:r>
-              <a:rPr sz="3400" b="0" i="0">
-                <a:solidFill>
-                  <a:srgbClr val="0A2240"/>
-                </a:solidFill>
-                <a:latin typeface="Arial"/>
-              </a:rPr>
-              <a:t>Customer and market signals</a:t>
-            </a:r>
-          </a:p>
-        </p:txBody>
-      </p:sp>
-      <p:sp>
-        <p:nvSpPr>
-          <p:cNvPr id="11" name="TextBox 10"/>
-          <p:cNvSpPr/>
-          <p:nvPr>
-            <p:ph type="body" idx="6"/>
-          </p:nvPr>
-        </p:nvSpPr>
-        <p:spPr>
-          <a:xfrm>
-            <a:off x="457200" y="3385108"/>
-            <a:ext cx="951348" cy="518159"/>
-          </a:xfrm>
-          <a:prstGeom prst="rect">
-            <a:avLst/>
-          </a:prstGeom>
-          <a:noFill/>
-        </p:spPr>
-        <p:txBody>
-          <a:bodyPr wrap="none" lIns="0" rIns="0">
-            <a:noAutofit/>
-          </a:bodyPr>
-          <a:lstStyle/>
-          <a:p>
-            <a:pPr algn="l"/>
-            <a:r>
-              <a:rPr sz="3400" b="1" i="0">
-                <a:solidFill>
-                  <a:srgbClr val="0072CE"/>
-                </a:solidFill>
-                <a:latin typeface="Arial"/>
-              </a:rPr>
-              <a:t>03</a:t>
-            </a:r>
-          </a:p>
-        </p:txBody>
-      </p:sp>
-      <p:sp>
-        <p:nvSpPr>
-          <p:cNvPr id="12" name="TextBox 11"/>
-          <p:cNvSpPr/>
-          <p:nvPr>
-            <p:ph type="body" idx="7"/>
-          </p:nvPr>
-        </p:nvSpPr>
-        <p:spPr>
-          <a:xfrm>
-            <a:off x="1371600" y="3385108"/>
-            <a:ext cx="10363200" cy="518159"/>
-          </a:xfrm>
-          <a:prstGeom prst="rect">
-            <a:avLst/>
-          </a:prstGeom>
-          <a:noFill/>
-        </p:spPr>
-        <p:txBody>
-          <a:bodyPr wrap="none" lIns="0" rIns="0">
-            <a:noAutofit/>
-          </a:bodyPr>
-          <a:lstStyle/>
-          <a:p>
-            <a:pPr algn="l"/>
-            <a:r>
-              <a:rPr sz="3400" b="0" i="0">
-                <a:solidFill>
-                  <a:srgbClr val="0A2240"/>
-                </a:solidFill>
-                <a:latin typeface="Arial"/>
-              </a:rPr>
-              <a:t>Operational health and risks</a:t>
-            </a:r>
-          </a:p>
-        </p:txBody>
-      </p:sp>
-      <p:sp>
-        <p:nvSpPr>
-          <p:cNvPr id="13" name="TextBox 12"/>
-          <p:cNvSpPr/>
-          <p:nvPr>
-            <p:ph type="body" idx="8"/>
-          </p:nvPr>
-        </p:nvSpPr>
-        <p:spPr>
-          <a:xfrm>
-            <a:off x="457200" y="4268418"/>
-            <a:ext cx="951348" cy="518159"/>
-          </a:xfrm>
-          <a:prstGeom prst="rect">
-            <a:avLst/>
-          </a:prstGeom>
-          <a:noFill/>
-        </p:spPr>
-        <p:txBody>
-          <a:bodyPr wrap="none" lIns="0" rIns="0">
-            <a:noAutofit/>
-          </a:bodyPr>
-          <a:lstStyle/>
-          <a:p>
-            <a:pPr algn="l"/>
-            <a:r>
-              <a:rPr sz="3400" b="1" i="0">
-                <a:solidFill>
-                  <a:srgbClr val="0072CE"/>
-                </a:solidFill>
-                <a:latin typeface="Arial"/>
-              </a:rPr>
-              <a:t>04</a:t>
-            </a:r>
-          </a:p>
-        </p:txBody>
-      </p:sp>
-      <p:sp>
-        <p:nvSpPr>
-          <p:cNvPr id="14" name="TextBox 13"/>
-          <p:cNvSpPr/>
-          <p:nvPr>
-            <p:ph type="body" idx="9"/>
-          </p:nvPr>
-        </p:nvSpPr>
-        <p:spPr>
-          <a:xfrm>
-            <a:off x="1371600" y="4268418"/>
-            <a:ext cx="10363200" cy="518159"/>
-          </a:xfrm>
-          <a:prstGeom prst="rect">
-            <a:avLst/>
-          </a:prstGeom>
-          <a:noFill/>
-        </p:spPr>
-        <p:txBody>
-          <a:bodyPr wrap="none" lIns="0" rIns="0">
-            <a:noAutofit/>
-          </a:bodyPr>
-          <a:lstStyle/>
-          <a:p>
-            <a:pPr algn="l"/>
-            <a:r>
-              <a:rPr sz="3400" b="0" i="0">
-                <a:solidFill>
-                  <a:srgbClr val="0A2240"/>
-                </a:solidFill>
-                <a:latin typeface="Arial"/>
-              </a:rPr>
-              <a:t>Roadmap for next quarter</a:t>
-            </a:r>
-          </a:p>
-        </p:txBody>
-      </p:sp>
-      <p:sp>
-        <p:nvSpPr>
-          <p:cNvPr id="15" name="TextBox 14"/>
-          <p:cNvSpPr/>
-          <p:nvPr>
-            <p:ph type="body" idx="13"/>
-          </p:nvPr>
-        </p:nvSpPr>
-        <p:spPr>
-          <a:xfrm>
-            <a:off x="457200" y="5151728"/>
-            <a:ext cx="951348" cy="518159"/>
-          </a:xfrm>
-          <a:prstGeom prst="rect">
-            <a:avLst/>
-          </a:prstGeom>
-          <a:noFill/>
-        </p:spPr>
-        <p:txBody>
-          <a:bodyPr wrap="none" lIns="0" rIns="0">
-            <a:noAutofit/>
-          </a:bodyPr>
-          <a:lstStyle/>
-          <a:p>
-            <a:pPr algn="l"/>
-            <a:r>
-              <a:rPr sz="3400" b="1" i="0">
-                <a:solidFill>
-                  <a:srgbClr val="0072CE"/>
-                </a:solidFill>
-                <a:latin typeface="Arial"/>
-              </a:rPr>
-              <a:t>05</a:t>
-            </a:r>
-          </a:p>
-        </p:txBody>
-      </p:sp>
-      <p:sp>
-        <p:nvSpPr>
-          <p:cNvPr id="16" name="TextBox 15"/>
-          <p:cNvSpPr/>
-          <p:nvPr>
-            <p:ph type="body" idx="14"/>
-          </p:nvPr>
-        </p:nvSpPr>
-        <p:spPr>
-          <a:xfrm>
-            <a:off x="1371600" y="5151728"/>
-            <a:ext cx="10363200" cy="518159"/>
-          </a:xfrm>
-          <a:prstGeom prst="rect">
-            <a:avLst/>
-          </a:prstGeom>
-          <a:noFill/>
-        </p:spPr>
-        <p:txBody>
-          <a:bodyPr wrap="none" lIns="0" rIns="0">
-            <a:noAutofit/>
-          </a:bodyPr>
-          <a:lstStyle/>
-          <a:p>
-            <a:pPr algn="l"/>
-            <a:r>
-              <a:rPr sz="3400" b="0" i="0">
-                <a:solidFill>
-                  <a:srgbClr val="0A2240"/>
-                </a:solidFill>
-                <a:latin typeface="Arial"/>
-              </a:rPr>
-              <a:t>Decisions we need today</a:t>
-            </a:r>
-          </a:p>
-        </p:txBody>
-      </p:sp>
-    </p:spTree>
-    <p:extLst>
-      <p:ext uri="{BB962C8B-B14F-4D97-AF65-F5344CB8AC3E}">
-        <p14:creationId xmlns:p14="http://schemas.microsoft.com/office/powerpoint/2010/main" val="1212999818"/>
-      </p:ext>
-    </p:extLst>
-  </p:cSld>
-  <p:clrMapOvr>
-    <a:masterClrMapping/>
-  </p:clrMapOvr>
-</p:sldLayout>
-</file>
-
-<file path=ppt/slideLayouts/slideLayout21.xml><?xml version="1.0" encoding="utf-8"?>
-<p:sldLayout xmlns:a="http://schemas.openxmlformats.org/drawingml/2006/main" xmlns:r="http://schemas.openxmlformats.org/officeDocument/2006/relationships" xmlns:p="http://schemas.openxmlformats.org/presentationml/2006/main" type="blank" preserve="1">
   <p:cSld name="slidekit · Big Number">
     <p:bg>
       <p:bgPr>
@@ -8105,7 +7635,7 @@
 </p:sldLayout>
 </file>
 
-<file path=ppt/slideLayouts/slideLayout22.xml><?xml version="1.0" encoding="utf-8"?>
+<file path=ppt/slideLayouts/slideLayout21.xml><?xml version="1.0" encoding="utf-8"?>
 <p:sldLayout xmlns:a="http://schemas.openxmlformats.org/drawingml/2006/main" xmlns:r="http://schemas.openxmlformats.org/officeDocument/2006/relationships" xmlns:p="http://schemas.openxmlformats.org/presentationml/2006/main" type="blank" preserve="1">
   <p:cSld name="slidekit · Pull Quote">
     <p:bg>
@@ -8168,8 +7698,8 @@
         </p:nvSpPr>
         <p:spPr>
           <a:xfrm>
-            <a:off x="457200" y="2301240"/>
-            <a:ext cx="128016" cy="2255520"/>
+            <a:off x="457200" y="2621280"/>
+            <a:ext cx="128016" cy="1615440"/>
           </a:xfrm>
           <a:prstGeom prst="rect">
             <a:avLst/>
@@ -8200,16 +7730,16 @@
         </p:nvSpPr>
         <p:spPr>
           <a:xfrm>
-            <a:off x="996696" y="2301240"/>
-            <a:ext cx="10738104" cy="1371600"/>
-          </a:xfrm>
-          <a:prstGeom prst="rect">
-            <a:avLst/>
-          </a:prstGeom>
-          <a:noFill/>
-        </p:spPr>
-        <p:txBody>
-          <a:bodyPr wrap="square" lIns="0" rIns="0">
+            <a:off x="996696" y="2621280"/>
+            <a:ext cx="11195304" cy="731520"/>
+          </a:xfrm>
+          <a:prstGeom prst="rect">
+            <a:avLst/>
+          </a:prstGeom>
+          <a:noFill/>
+        </p:spPr>
+        <p:txBody>
+          <a:bodyPr wrap="none" lIns="0" rIns="0">
             <a:noAutofit/>
           </a:bodyPr>
           <a:lstStyle/>
@@ -8222,7 +7752,7 @@
                 </a:solidFill>
                 <a:latin typeface="Arial"/>
               </a:rPr>
-              <a:t>"We stopped buying tools and started buying outcomes."</a:t>
+              <a:t>"We buy outcomes, not tools."</a:t>
             </a:r>
           </a:p>
         </p:txBody>
@@ -8237,7 +7767,7 @@
         </p:nvSpPr>
         <p:spPr>
           <a:xfrm>
-            <a:off x="996696" y="3947160"/>
+            <a:off x="996696" y="3627120"/>
             <a:ext cx="11195304" cy="609600"/>
           </a:xfrm>
           <a:prstGeom prst="rect">
@@ -8255,7 +7785,7 @@
             <a:r>
               <a:rPr sz="3400" b="0" i="0">
                 <a:solidFill>
-                  <a:srgbClr val="5B6B82"/>
+                  <a:srgbClr val="0A2240"/>
                 </a:solidFill>
                 <a:latin typeface="Arial"/>
               </a:rPr>
@@ -8277,7 +7807,7 @@
 </p:sldLayout>
 </file>
 
-<file path=ppt/slideLayouts/slideLayout23.xml><?xml version="1.0" encoding="utf-8"?>
+<file path=ppt/slideLayouts/slideLayout22.xml><?xml version="1.0" encoding="utf-8"?>
 <p:sldLayout xmlns:a="http://schemas.openxmlformats.org/drawingml/2006/main" xmlns:r="http://schemas.openxmlformats.org/officeDocument/2006/relationships" xmlns:p="http://schemas.openxmlformats.org/presentationml/2006/main" type="blank" preserve="1">
   <p:cSld name="slidekit · Definition">
     <p:bg>
@@ -8340,8 +7870,8 @@
         </p:nvSpPr>
         <p:spPr>
           <a:xfrm>
-            <a:off x="457200" y="1965960"/>
-            <a:ext cx="128016" cy="2926080"/>
+            <a:off x="457200" y="2484120"/>
+            <a:ext cx="128016" cy="1889760"/>
           </a:xfrm>
           <a:prstGeom prst="rect">
             <a:avLst/>
@@ -8372,7 +7902,7 @@
         </p:nvSpPr>
         <p:spPr>
           <a:xfrm>
-            <a:off x="996696" y="1965960"/>
+            <a:off x="996696" y="2484120"/>
             <a:ext cx="11195304" cy="1005840"/>
           </a:xfrm>
           <a:prstGeom prst="rect">
@@ -8409,16 +7939,16 @@
         </p:nvSpPr>
         <p:spPr>
           <a:xfrm>
-            <a:off x="996696" y="3246120"/>
-            <a:ext cx="10738104" cy="1645920"/>
-          </a:xfrm>
-          <a:prstGeom prst="rect">
-            <a:avLst/>
-          </a:prstGeom>
-          <a:noFill/>
-        </p:spPr>
-        <p:txBody>
-          <a:bodyPr wrap="square" lIns="0" rIns="0">
+            <a:off x="996696" y="3764280"/>
+            <a:ext cx="11195304" cy="609600"/>
+          </a:xfrm>
+          <a:prstGeom prst="rect">
+            <a:avLst/>
+          </a:prstGeom>
+          <a:noFill/>
+        </p:spPr>
+        <p:txBody>
+          <a:bodyPr wrap="none" lIns="0" rIns="0">
             <a:noAutofit/>
           </a:bodyPr>
           <a:lstStyle/>
@@ -8431,7 +7961,7 @@
                 </a:solidFill>
                 <a:latin typeface="Arial"/>
               </a:rPr>
-              <a:t>The percentage of recurring revenue retained from existing customers over a period, including expansion and after churn.</a:t>
+              <a:t>Revenue kept from existing customers.</a:t>
             </a:r>
           </a:p>
         </p:txBody>
@@ -8449,7 +7979,7 @@
 </p:sldLayout>
 </file>
 
-<file path=ppt/slideLayouts/slideLayout24.xml><?xml version="1.0" encoding="utf-8"?>
+<file path=ppt/slideLayouts/slideLayout23.xml><?xml version="1.0" encoding="utf-8"?>
 <p:sldLayout xmlns:a="http://schemas.openxmlformats.org/drawingml/2006/main" xmlns:r="http://schemas.openxmlformats.org/officeDocument/2006/relationships" xmlns:p="http://schemas.openxmlformats.org/presentationml/2006/main" type="blank" preserve="1">
   <p:cSld name="slidekit · Question">
     <p:bg>
@@ -8512,8 +8042,8 @@
         </p:nvSpPr>
         <p:spPr>
           <a:xfrm>
-            <a:off x="457200" y="2011680"/>
-            <a:ext cx="128016" cy="2834640"/>
+            <a:off x="457200" y="2926080"/>
+            <a:ext cx="128016" cy="1005840"/>
           </a:xfrm>
           <a:prstGeom prst="rect">
             <a:avLst/>
@@ -8544,16 +8074,16 @@
         </p:nvSpPr>
         <p:spPr>
           <a:xfrm>
-            <a:off x="996696" y="2011680"/>
-            <a:ext cx="10738104" cy="2834640"/>
-          </a:xfrm>
-          <a:prstGeom prst="rect">
-            <a:avLst/>
-          </a:prstGeom>
-          <a:noFill/>
-        </p:spPr>
-        <p:txBody>
-          <a:bodyPr wrap="square" lIns="0" rIns="0">
+            <a:off x="996696" y="2926080"/>
+            <a:ext cx="11195304" cy="1005840"/>
+          </a:xfrm>
+          <a:prstGeom prst="rect">
+            <a:avLst/>
+          </a:prstGeom>
+          <a:noFill/>
+        </p:spPr>
+        <p:txBody>
+          <a:bodyPr wrap="none" lIns="0" rIns="0">
             <a:noAutofit/>
           </a:bodyPr>
           <a:lstStyle/>
@@ -8566,7 +8096,7 @@
                 </a:solidFill>
                 <a:latin typeface="Arial"/>
               </a:rPr>
-              <a:t>What would we build if we trusted our customers completely?</a:t>
+              <a:t>What if we trusted users?</a:t>
             </a:r>
           </a:p>
         </p:txBody>
@@ -8584,7 +8114,7 @@
 </p:sldLayout>
 </file>
 
-<file path=ppt/slideLayouts/slideLayout25.xml><?xml version="1.0" encoding="utf-8"?>
+<file path=ppt/slideLayouts/slideLayout24.xml><?xml version="1.0" encoding="utf-8"?>
 <p:sldLayout xmlns:a="http://schemas.openxmlformats.org/drawingml/2006/main" xmlns:r="http://schemas.openxmlformats.org/officeDocument/2006/relationships" xmlns:p="http://schemas.openxmlformats.org/presentationml/2006/main" type="blank" preserve="1">
   <p:cSld name="slidekit · Bullet List">
     <p:bg>
@@ -8798,7 +8328,7 @@
 </p:sldLayout>
 </file>
 
-<file path=ppt/slideLayouts/slideLayout26.xml><?xml version="1.0" encoding="utf-8"?>
+<file path=ppt/slideLayouts/slideLayout25.xml><?xml version="1.0" encoding="utf-8"?>
 <p:sldLayout xmlns:a="http://schemas.openxmlformats.org/drawingml/2006/main" xmlns:r="http://schemas.openxmlformats.org/officeDocument/2006/relationships" xmlns:p="http://schemas.openxmlformats.org/presentationml/2006/main" type="blank" preserve="1">
   <p:cSld name="slidekit · Code Block">
     <p:bg>
@@ -8868,7 +8398,7 @@
             <a:avLst/>
           </a:prstGeom>
           <a:solidFill>
-            <a:srgbClr val="FF5F56"/>
+            <a:srgbClr val="FFFFFF"/>
           </a:solidFill>
           <a:ln>
             <a:noFill/>
@@ -8900,7 +8430,7 @@
             <a:avLst/>
           </a:prstGeom>
           <a:solidFill>
-            <a:srgbClr val="FFBD2E"/>
+            <a:srgbClr val="FFFFFF"/>
           </a:solidFill>
           <a:ln>
             <a:noFill/>
@@ -8932,7 +8462,7 @@
             <a:avLst/>
           </a:prstGeom>
           <a:solidFill>
-            <a:srgbClr val="27C93F"/>
+            <a:srgbClr val="FFFFFF"/>
           </a:solidFill>
           <a:ln>
             <a:noFill/>
@@ -8975,7 +8505,7 @@
             <a:r>
               <a:rPr sz="4200" b="0" i="0">
                 <a:solidFill>
-                  <a:srgbClr val="D4D4D4"/>
+                  <a:srgbClr val="FFFFFF"/>
                 </a:solidFill>
                 <a:latin typeface="Arial"/>
               </a:rPr>
@@ -9012,7 +8542,7 @@
             <a:r>
               <a:rPr sz="3400" b="0" i="0">
                 <a:solidFill>
-                  <a:srgbClr val="6A9955"/>
+                  <a:srgbClr val="FFFFFF"/>
                 </a:solidFill>
                 <a:latin typeface="Arial"/>
               </a:rPr>
@@ -9069,7 +8599,7 @@
         <p:spPr>
           <a:xfrm>
             <a:off x="1057461" y="2356103"/>
-            <a:ext cx="302848" cy="518159"/>
+            <a:ext cx="2524382" cy="518159"/>
           </a:xfrm>
           <a:prstGeom prst="rect">
             <a:avLst/>
@@ -9086,11 +8616,11 @@
             <a:r>
               <a:rPr sz="3400" b="0" i="0">
                 <a:solidFill>
-                  <a:srgbClr val="D4D4D4"/>
-                </a:solidFill>
-                <a:latin typeface="Arial"/>
-              </a:rPr>
-              <a:t> </a:t>
+                  <a:srgbClr val="FFFFFF"/>
+                </a:solidFill>
+                <a:latin typeface="Arial"/>
+              </a:rPr>
+              <a:t> main():</a:t>
             </a:r>
           </a:p>
         </p:txBody>
@@ -9105,8 +8635,8 @@
         </p:nvSpPr>
         <p:spPr>
           <a:xfrm>
-            <a:off x="1177429" y="2356103"/>
-            <a:ext cx="1680348" cy="518159"/>
+            <a:off x="457200" y="2874262"/>
+            <a:ext cx="7046475" cy="518159"/>
           </a:xfrm>
           <a:prstGeom prst="rect">
             <a:avLst/>
@@ -9123,11 +8653,11 @@
             <a:r>
               <a:rPr sz="3400" b="0" i="0">
                 <a:solidFill>
-                  <a:srgbClr val="DCDCAA"/>
-                </a:solidFill>
-                <a:latin typeface="Arial"/>
-              </a:rPr>
-              <a:t>main</a:t>
+                  <a:srgbClr val="FFFFFF"/>
+                </a:solidFill>
+                <a:latin typeface="Arial"/>
+              </a:rPr>
+              <a:t>    print("Hello, world!")</a:t>
             </a:r>
           </a:p>
         </p:txBody>
@@ -9142,8 +8672,8 @@
         </p:nvSpPr>
         <p:spPr>
           <a:xfrm>
-            <a:off x="2113347" y="2356103"/>
-            <a:ext cx="834964" cy="518159"/>
+            <a:off x="457200" y="3910580"/>
+            <a:ext cx="2140486" cy="518159"/>
           </a:xfrm>
           <a:prstGeom prst="rect">
             <a:avLst/>
@@ -9160,11 +8690,11 @@
             <a:r>
               <a:rPr sz="3400" b="0" i="0">
                 <a:solidFill>
-                  <a:srgbClr val="D4D4D4"/>
-                </a:solidFill>
-                <a:latin typeface="Arial"/>
-              </a:rPr>
-              <a:t>():</a:t>
+                  <a:srgbClr val="FFFFFF"/>
+                </a:solidFill>
+                <a:latin typeface="Arial"/>
+              </a:rPr>
+              <a:t>main()</a:t>
             </a:r>
           </a:p>
         </p:txBody>
@@ -9175,265 +8705,6 @@
           <p:cNvSpPr/>
           <p:nvPr>
             <p:ph type="body" idx="13"/>
-          </p:nvPr>
-        </p:nvSpPr>
-        <p:spPr>
-          <a:xfrm>
-            <a:off x="457200" y="2874262"/>
-            <a:ext cx="662751" cy="518159"/>
-          </a:xfrm>
-          <a:prstGeom prst="rect">
-            <a:avLst/>
-          </a:prstGeom>
-          <a:noFill/>
-        </p:spPr>
-        <p:txBody>
-          <a:bodyPr wrap="none" lIns="0" rIns="0">
-            <a:noAutofit/>
-          </a:bodyPr>
-          <a:lstStyle/>
-          <a:p>
-            <a:pPr algn="l"/>
-            <a:r>
-              <a:rPr sz="3400" b="0" i="0">
-                <a:solidFill>
-                  <a:srgbClr val="D4D4D4"/>
-                </a:solidFill>
-                <a:latin typeface="Arial"/>
-              </a:rPr>
-              <a:t>    </a:t>
-            </a:r>
-          </a:p>
-        </p:txBody>
-      </p:sp>
-      <p:sp>
-        <p:nvSpPr>
-          <p:cNvPr id="15" name="TextBox 14"/>
-          <p:cNvSpPr/>
-          <p:nvPr>
-            <p:ph type="body" idx="14"/>
-          </p:nvPr>
-        </p:nvSpPr>
-        <p:spPr>
-          <a:xfrm>
-            <a:off x="937071" y="2874262"/>
-            <a:ext cx="1526857" cy="518159"/>
-          </a:xfrm>
-          <a:prstGeom prst="rect">
-            <a:avLst/>
-          </a:prstGeom>
-          <a:noFill/>
-        </p:spPr>
-        <p:txBody>
-          <a:bodyPr wrap="none" lIns="0" rIns="0">
-            <a:noAutofit/>
-          </a:bodyPr>
-          <a:lstStyle/>
-          <a:p>
-            <a:pPr algn="l"/>
-            <a:r>
-              <a:rPr sz="3400" b="0" i="0">
-                <a:solidFill>
-                  <a:srgbClr val="DCDCAA"/>
-                </a:solidFill>
-                <a:latin typeface="Arial"/>
-              </a:rPr>
-              <a:t>print</a:t>
-            </a:r>
-          </a:p>
-        </p:txBody>
-      </p:sp>
-      <p:sp>
-        <p:nvSpPr>
-          <p:cNvPr id="16" name="TextBox 15"/>
-          <p:cNvSpPr/>
-          <p:nvPr>
-            <p:ph type="body" idx="15"/>
-          </p:nvPr>
-        </p:nvSpPr>
-        <p:spPr>
-          <a:xfrm>
-            <a:off x="1777057" y="2874262"/>
-            <a:ext cx="412948" cy="518159"/>
-          </a:xfrm>
-          <a:prstGeom prst="rect">
-            <a:avLst/>
-          </a:prstGeom>
-          <a:noFill/>
-        </p:spPr>
-        <p:txBody>
-          <a:bodyPr wrap="none" lIns="0" rIns="0">
-            <a:noAutofit/>
-          </a:bodyPr>
-          <a:lstStyle/>
-          <a:p>
-            <a:pPr algn="l"/>
-            <a:r>
-              <a:rPr sz="3400" b="0" i="0">
-                <a:solidFill>
-                  <a:srgbClr val="D4D4D4"/>
-                </a:solidFill>
-                <a:latin typeface="Arial"/>
-              </a:rPr>
-              <a:t>(</a:t>
-            </a:r>
-          </a:p>
-        </p:txBody>
-      </p:sp>
-      <p:sp>
-        <p:nvSpPr>
-          <p:cNvPr id="17" name="TextBox 16"/>
-          <p:cNvSpPr/>
-          <p:nvPr>
-            <p:ph type="body" idx="16"/>
-          </p:nvPr>
-        </p:nvSpPr>
-        <p:spPr>
-          <a:xfrm>
-            <a:off x="1920850" y="2874262"/>
-            <a:ext cx="4474566" cy="518159"/>
-          </a:xfrm>
-          <a:prstGeom prst="rect">
-            <a:avLst/>
-          </a:prstGeom>
-          <a:noFill/>
-        </p:spPr>
-        <p:txBody>
-          <a:bodyPr wrap="none" lIns="0" rIns="0">
-            <a:noAutofit/>
-          </a:bodyPr>
-          <a:lstStyle/>
-          <a:p>
-            <a:pPr algn="l"/>
-            <a:r>
-              <a:rPr sz="3400" b="0" i="0">
-                <a:solidFill>
-                  <a:srgbClr val="CE9178"/>
-                </a:solidFill>
-                <a:latin typeface="Arial"/>
-              </a:rPr>
-              <a:t>"Hello, world!"</a:t>
-            </a:r>
-          </a:p>
-        </p:txBody>
-      </p:sp>
-      <p:sp>
-        <p:nvSpPr>
-          <p:cNvPr id="18" name="TextBox 17"/>
-          <p:cNvSpPr/>
-          <p:nvPr>
-            <p:ph type="body" idx="17"/>
-          </p:nvPr>
-        </p:nvSpPr>
-        <p:spPr>
-          <a:xfrm>
-            <a:off x="4603155" y="2874262"/>
-            <a:ext cx="412948" cy="518159"/>
-          </a:xfrm>
-          <a:prstGeom prst="rect">
-            <a:avLst/>
-          </a:prstGeom>
-          <a:noFill/>
-        </p:spPr>
-        <p:txBody>
-          <a:bodyPr wrap="none" lIns="0" rIns="0">
-            <a:noAutofit/>
-          </a:bodyPr>
-          <a:lstStyle/>
-          <a:p>
-            <a:pPr algn="l"/>
-            <a:r>
-              <a:rPr sz="3400" b="0" i="0">
-                <a:solidFill>
-                  <a:srgbClr val="D4D4D4"/>
-                </a:solidFill>
-                <a:latin typeface="Arial"/>
-              </a:rPr>
-              <a:t>)</a:t>
-            </a:r>
-          </a:p>
-        </p:txBody>
-      </p:sp>
-      <p:sp>
-        <p:nvSpPr>
-          <p:cNvPr id="19" name="TextBox 18"/>
-          <p:cNvSpPr/>
-          <p:nvPr>
-            <p:ph type="body" idx="18"/>
-          </p:nvPr>
-        </p:nvSpPr>
-        <p:spPr>
-          <a:xfrm>
-            <a:off x="457200" y="3910580"/>
-            <a:ext cx="1680348" cy="518159"/>
-          </a:xfrm>
-          <a:prstGeom prst="rect">
-            <a:avLst/>
-          </a:prstGeom>
-          <a:noFill/>
-        </p:spPr>
-        <p:txBody>
-          <a:bodyPr wrap="none" lIns="0" rIns="0">
-            <a:noAutofit/>
-          </a:bodyPr>
-          <a:lstStyle/>
-          <a:p>
-            <a:pPr algn="l"/>
-            <a:r>
-              <a:rPr sz="3400" b="0" i="0">
-                <a:solidFill>
-                  <a:srgbClr val="DCDCAA"/>
-                </a:solidFill>
-                <a:latin typeface="Arial"/>
-              </a:rPr>
-              <a:t>main</a:t>
-            </a:r>
-          </a:p>
-        </p:txBody>
-      </p:sp>
-      <p:sp>
-        <p:nvSpPr>
-          <p:cNvPr id="20" name="TextBox 19"/>
-          <p:cNvSpPr/>
-          <p:nvPr>
-            <p:ph type="body" idx="19"/>
-          </p:nvPr>
-        </p:nvSpPr>
-        <p:spPr>
-          <a:xfrm>
-            <a:off x="1393118" y="3910580"/>
-            <a:ext cx="643017" cy="518159"/>
-          </a:xfrm>
-          <a:prstGeom prst="rect">
-            <a:avLst/>
-          </a:prstGeom>
-          <a:noFill/>
-        </p:spPr>
-        <p:txBody>
-          <a:bodyPr wrap="none" lIns="0" rIns="0">
-            <a:noAutofit/>
-          </a:bodyPr>
-          <a:lstStyle/>
-          <a:p>
-            <a:pPr algn="l"/>
-            <a:r>
-              <a:rPr sz="3400" b="0" i="0">
-                <a:solidFill>
-                  <a:srgbClr val="D4D4D4"/>
-                </a:solidFill>
-                <a:latin typeface="Arial"/>
-              </a:rPr>
-              <a:t>()</a:t>
-            </a:r>
-          </a:p>
-        </p:txBody>
-      </p:sp>
-      <p:sp>
-        <p:nvSpPr>
-          <p:cNvPr id="21" name="TextBox 20"/>
-          <p:cNvSpPr/>
-          <p:nvPr>
-            <p:ph type="body" idx="20"/>
           </p:nvPr>
         </p:nvSpPr>
         <p:spPr>
@@ -9456,7 +8727,7 @@
             <a:r>
               <a:rPr sz="3400" b="0" i="0">
                 <a:solidFill>
-                  <a:srgbClr val="4EC9B0"/>
+                  <a:srgbClr val="569CD6"/>
                 </a:solidFill>
                 <a:latin typeface="Arial"/>
               </a:rPr>
@@ -9467,10 +8738,10 @@
       </p:sp>
       <p:sp>
         <p:nvSpPr>
-          <p:cNvPr id="22" name="TextBox 21"/>
-          <p:cNvSpPr/>
-          <p:nvPr>
-            <p:ph type="body" idx="21"/>
+          <p:cNvPr id="15" name="TextBox 14"/>
+          <p:cNvSpPr/>
+          <p:nvPr>
+            <p:ph type="body" idx="14"/>
           </p:nvPr>
         </p:nvSpPr>
         <p:spPr>
@@ -9493,7 +8764,7 @@
             <a:r>
               <a:rPr sz="3400" b="0" i="0">
                 <a:solidFill>
-                  <a:srgbClr val="D4D4D4"/>
+                  <a:srgbClr val="FFFFFF"/>
                 </a:solidFill>
                 <a:latin typeface="Arial"/>
               </a:rPr>
@@ -9504,10 +8775,10 @@
       </p:sp>
       <p:sp>
         <p:nvSpPr>
-          <p:cNvPr id="23" name="TextBox 22"/>
-          <p:cNvSpPr/>
-          <p:nvPr>
-            <p:ph type="body" idx="22"/>
+          <p:cNvPr id="16" name="TextBox 15"/>
+          <p:cNvSpPr/>
+          <p:nvPr>
+            <p:ph type="body" idx="15"/>
           </p:nvPr>
         </p:nvSpPr>
         <p:spPr>
@@ -9530,7 +8801,7 @@
             <a:r>
               <a:rPr sz="3400" b="0" i="0">
                 <a:solidFill>
-                  <a:srgbClr val="D4D4D4"/>
+                  <a:srgbClr val="FFFFFF"/>
                 </a:solidFill>
                 <a:latin typeface="Arial"/>
               </a:rPr>
@@ -9552,7 +8823,7 @@
 </p:sldLayout>
 </file>
 
-<file path=ppt/slideLayouts/slideLayout27.xml><?xml version="1.0" encoding="utf-8"?>
+<file path=ppt/slideLayouts/slideLayout26.xml><?xml version="1.0" encoding="utf-8"?>
 <p:sldLayout xmlns:a="http://schemas.openxmlformats.org/drawingml/2006/main" xmlns:r="http://schemas.openxmlformats.org/officeDocument/2006/relationships" xmlns:p="http://schemas.openxmlformats.org/presentationml/2006/main" type="blank" preserve="1">
   <p:cSld name="slidekit · File Tree">
     <p:bg>
@@ -9661,7 +8932,7 @@
             </a:avLst>
           </a:prstGeom>
           <a:solidFill>
-            <a:srgbClr val="0C1A1C"/>
+            <a:srgbClr val="0A2240"/>
           </a:solidFill>
           <a:ln>
             <a:noFill/>
@@ -9704,7 +8975,7 @@
             <a:r>
               <a:rPr sz="2600" b="1" i="0">
                 <a:solidFill>
-                  <a:srgbClr val="569CD6"/>
+                  <a:srgbClr val="0072CE"/>
                 </a:solidFill>
                 <a:latin typeface="Courier New"/>
               </a:rPr>
@@ -9741,7 +9012,7 @@
             <a:r>
               <a:rPr sz="2600" b="0" i="0">
                 <a:solidFill>
-                  <a:srgbClr val="55707A"/>
+                  <a:srgbClr val="0072CE"/>
                 </a:solidFill>
                 <a:latin typeface="Courier New"/>
               </a:rPr>
@@ -9778,7 +9049,7 @@
             <a:r>
               <a:rPr sz="2600" b="1" i="0">
                 <a:solidFill>
-                  <a:srgbClr val="569CD6"/>
+                  <a:srgbClr val="0072CE"/>
                 </a:solidFill>
                 <a:latin typeface="Courier New"/>
               </a:rPr>
@@ -9815,7 +9086,7 @@
             <a:r>
               <a:rPr sz="2600" b="0" i="0">
                 <a:solidFill>
-                  <a:srgbClr val="55707A"/>
+                  <a:srgbClr val="0072CE"/>
                 </a:solidFill>
                 <a:latin typeface="Courier New"/>
               </a:rPr>
@@ -9852,7 +9123,7 @@
             <a:r>
               <a:rPr sz="2600" b="1" i="0">
                 <a:solidFill>
-                  <a:srgbClr val="569CD6"/>
+                  <a:srgbClr val="0072CE"/>
                 </a:solidFill>
                 <a:latin typeface="Courier New"/>
               </a:rPr>
@@ -9889,7 +9160,7 @@
             <a:r>
               <a:rPr sz="2600" b="0" i="0">
                 <a:solidFill>
-                  <a:srgbClr val="55707A"/>
+                  <a:srgbClr val="0072CE"/>
                 </a:solidFill>
                 <a:latin typeface="Courier New"/>
               </a:rPr>
@@ -9926,7 +9197,7 @@
             <a:r>
               <a:rPr sz="2600" b="0" i="0">
                 <a:solidFill>
-                  <a:srgbClr val="D4D4D4"/>
+                  <a:srgbClr val="FFFFFF"/>
                 </a:solidFill>
                 <a:latin typeface="Courier New"/>
               </a:rPr>
@@ -9963,7 +9234,7 @@
             <a:r>
               <a:rPr sz="2600" b="0" i="0">
                 <a:solidFill>
-                  <a:srgbClr val="55707A"/>
+                  <a:srgbClr val="0072CE"/>
                 </a:solidFill>
                 <a:latin typeface="Courier New"/>
               </a:rPr>
@@ -10000,7 +9271,7 @@
             <a:r>
               <a:rPr sz="2600" b="0" i="0">
                 <a:solidFill>
-                  <a:srgbClr val="D4D4D4"/>
+                  <a:srgbClr val="FFFFFF"/>
                 </a:solidFill>
                 <a:latin typeface="Courier New"/>
               </a:rPr>
@@ -10037,7 +9308,7 @@
             <a:r>
               <a:rPr sz="2600" b="0" i="0">
                 <a:solidFill>
-                  <a:srgbClr val="55707A"/>
+                  <a:srgbClr val="0072CE"/>
                 </a:solidFill>
                 <a:latin typeface="Courier New"/>
               </a:rPr>
@@ -10074,7 +9345,7 @@
             <a:r>
               <a:rPr sz="2600" b="0" i="0">
                 <a:solidFill>
-                  <a:srgbClr val="D4D4D4"/>
+                  <a:srgbClr val="FFFFFF"/>
                 </a:solidFill>
                 <a:latin typeface="Courier New"/>
               </a:rPr>
@@ -10111,7 +9382,7 @@
             <a:r>
               <a:rPr sz="2600" b="0" i="0">
                 <a:solidFill>
-                  <a:srgbClr val="55707A"/>
+                  <a:srgbClr val="0072CE"/>
                 </a:solidFill>
                 <a:latin typeface="Courier New"/>
               </a:rPr>
@@ -10148,7 +9419,7 @@
             <a:r>
               <a:rPr sz="2600" b="0" i="0">
                 <a:solidFill>
-                  <a:srgbClr val="D4D4D4"/>
+                  <a:srgbClr val="FFFFFF"/>
                 </a:solidFill>
                 <a:latin typeface="Courier New"/>
               </a:rPr>
@@ -10185,7 +9456,7 @@
             <a:r>
               <a:rPr sz="2600" b="0" i="0">
                 <a:solidFill>
-                  <a:srgbClr val="55707A"/>
+                  <a:srgbClr val="0072CE"/>
                 </a:solidFill>
                 <a:latin typeface="Courier New"/>
               </a:rPr>
@@ -10222,7 +9493,7 @@
             <a:r>
               <a:rPr sz="2600" b="0" i="0">
                 <a:solidFill>
-                  <a:srgbClr val="D4D4D4"/>
+                  <a:srgbClr val="FFFFFF"/>
                 </a:solidFill>
                 <a:latin typeface="Courier New"/>
               </a:rPr>
@@ -10244,7 +9515,7 @@
 </p:sldLayout>
 </file>
 
-<file path=ppt/slideLayouts/slideLayout28.xml><?xml version="1.0" encoding="utf-8"?>
+<file path=ppt/slideLayouts/slideLayout27.xml><?xml version="1.0" encoding="utf-8"?>
 <p:sldLayout xmlns:a="http://schemas.openxmlformats.org/drawingml/2006/main" xmlns:r="http://schemas.openxmlformats.org/officeDocument/2006/relationships" xmlns:p="http://schemas.openxmlformats.org/presentationml/2006/main" type="blank" preserve="1">
   <p:cSld name="slidekit · Numbered Steps">
     <p:bg>
@@ -10362,7 +9633,7 @@
             <a:r>
               <a:rPr sz="4200" b="1" i="0">
                 <a:solidFill>
-                  <a:srgbClr val="123A6B"/>
+                  <a:srgbClr val="0072CE"/>
                 </a:solidFill>
                 <a:latin typeface="Arial"/>
               </a:rPr>
@@ -10399,7 +9670,7 @@
             <a:r>
               <a:rPr sz="4200" b="1" i="0">
                 <a:solidFill>
-                  <a:srgbClr val="123A6B"/>
+                  <a:srgbClr val="0072CE"/>
                 </a:solidFill>
                 <a:latin typeface="Arial"/>
               </a:rPr>
@@ -10473,7 +9744,7 @@
             <a:r>
               <a:rPr sz="4200" b="1" i="0">
                 <a:solidFill>
-                  <a:srgbClr val="123A6B"/>
+                  <a:srgbClr val="0072CE"/>
                 </a:solidFill>
                 <a:latin typeface="Arial"/>
               </a:rPr>
@@ -10510,7 +9781,7 @@
             <a:r>
               <a:rPr sz="4200" b="1" i="0">
                 <a:solidFill>
-                  <a:srgbClr val="123A6B"/>
+                  <a:srgbClr val="0072CE"/>
                 </a:solidFill>
                 <a:latin typeface="Arial"/>
               </a:rPr>
@@ -10584,7 +9855,7 @@
             <a:r>
               <a:rPr sz="4200" b="1" i="0">
                 <a:solidFill>
-                  <a:srgbClr val="123A6B"/>
+                  <a:srgbClr val="0072CE"/>
                 </a:solidFill>
                 <a:latin typeface="Arial"/>
               </a:rPr>
@@ -10621,7 +9892,7 @@
             <a:r>
               <a:rPr sz="4200" b="1" i="0">
                 <a:solidFill>
-                  <a:srgbClr val="123A6B"/>
+                  <a:srgbClr val="0072CE"/>
                 </a:solidFill>
                 <a:latin typeface="Arial"/>
               </a:rPr>
@@ -10680,7 +9951,7 @@
 </p:sldLayout>
 </file>
 
-<file path=ppt/slideLayouts/slideLayout29.xml><?xml version="1.0" encoding="utf-8"?>
+<file path=ppt/slideLayouts/slideLayout28.xml><?xml version="1.0" encoding="utf-8"?>
 <p:sldLayout xmlns:a="http://schemas.openxmlformats.org/drawingml/2006/main" xmlns:r="http://schemas.openxmlformats.org/officeDocument/2006/relationships" xmlns:p="http://schemas.openxmlformats.org/presentationml/2006/main" type="blank" preserve="1">
   <p:cSld name="slidekit · Two Panel List">
     <p:bg>
@@ -10798,7 +10069,7 @@
             <a:r>
               <a:rPr sz="3400" b="1" i="0">
                 <a:solidFill>
-                  <a:srgbClr val="123A6B"/>
+                  <a:srgbClr val="0072CE"/>
                 </a:solidFill>
                 <a:latin typeface="Arial"/>
               </a:rPr>
@@ -10817,14 +10088,14 @@
         </p:nvSpPr>
         <p:spPr>
           <a:xfrm>
-            <a:off x="548640" y="2176271"/>
-            <a:ext cx="1650492" cy="54864"/>
+            <a:off x="457200" y="2176271"/>
+            <a:ext cx="1367718" cy="54864"/>
           </a:xfrm>
           <a:prstGeom prst="rect">
             <a:avLst/>
           </a:prstGeom>
           <a:solidFill>
-            <a:srgbClr val="123A6B"/>
+            <a:srgbClr val="0072CE"/>
           </a:solidFill>
           <a:ln>
             <a:noFill/>
@@ -10867,7 +10138,7 @@
             <a:r>
               <a:rPr sz="3400" b="1" i="0">
                 <a:solidFill>
-                  <a:srgbClr val="5B6B82"/>
+                  <a:srgbClr val="0A2240"/>
                 </a:solidFill>
                 <a:latin typeface="Arial"/>
               </a:rPr>
@@ -10886,14 +10157,14 @@
         </p:nvSpPr>
         <p:spPr>
           <a:xfrm>
-            <a:off x="6324600" y="2176271"/>
-            <a:ext cx="1650492" cy="54864"/>
+            <a:off x="6233160" y="2176271"/>
+            <a:ext cx="1007604" cy="54864"/>
           </a:xfrm>
           <a:prstGeom prst="rect">
             <a:avLst/>
           </a:prstGeom>
           <a:solidFill>
-            <a:srgbClr val="5B6B82"/>
+            <a:srgbClr val="0A2240"/>
           </a:solidFill>
           <a:ln>
             <a:noFill/>
@@ -11126,6 +10397,294 @@
                 <a:latin typeface="Arial"/>
               </a:rPr>
               <a:t>In-product live chat</a:t>
+            </a:r>
+          </a:p>
+        </p:txBody>
+      </p:sp>
+    </p:spTree>
+    <p:extLst>
+      <p:ext uri="{BB962C8B-B14F-4D97-AF65-F5344CB8AC3E}">
+        <p14:creationId xmlns:p14="http://schemas.microsoft.com/office/powerpoint/2010/main" val="1212999818"/>
+      </p:ext>
+    </p:extLst>
+  </p:cSld>
+  <p:clrMapOvr>
+    <a:masterClrMapping/>
+  </p:clrMapOvr>
+</p:sldLayout>
+</file>
+
+<file path=ppt/slideLayouts/slideLayout29.xml><?xml version="1.0" encoding="utf-8"?>
+<p:sldLayout xmlns:a="http://schemas.openxmlformats.org/drawingml/2006/main" xmlns:r="http://schemas.openxmlformats.org/officeDocument/2006/relationships" xmlns:p="http://schemas.openxmlformats.org/presentationml/2006/main" type="blank" preserve="1">
+  <p:cSld name="slidekit · This vs That">
+    <p:bg>
+      <p:bgPr>
+        <a:solidFill>
+          <a:srgbClr val="FFFFFF"/>
+        </a:solidFill>
+        <a:effectLst/>
+      </p:bgPr>
+    </p:bg>
+    <p:spTree>
+      <p:nvGrpSpPr>
+        <p:cNvPr id="1" name=""/>
+        <p:cNvGrpSpPr/>
+        <p:nvPr/>
+      </p:nvGrpSpPr>
+      <p:grpSpPr>
+        <a:xfrm>
+          <a:off x="0" y="0"/>
+          <a:ext cx="0" cy="0"/>
+          <a:chOff x="0" y="0"/>
+          <a:chExt cx="0" cy="0"/>
+        </a:xfrm>
+      </p:grpSpPr>
+      <p:sp>
+        <p:nvSpPr>
+          <p:cNvPr id="4" name="Slide Number Placeholder 3"/>
+          <p:cNvSpPr>
+            <a:spLocks noGrp="1"/>
+          </p:cNvSpPr>
+          <p:nvPr>
+            <p:ph type="sldNum" sz="quarter" idx="12"/>
+          </p:nvPr>
+        </p:nvSpPr>
+        <p:spPr>
+          <a:xfrm>
+            <a:off x="11186160" y="6035040"/>
+            <a:ext cx="548640" cy="365760"/>
+          </a:xfrm>
+        </p:spPr>
+        <p:txBody>
+          <a:bodyPr/>
+          <a:lstStyle/>
+          <a:p>
+            <a:fld id="{C1FF6DA9-008F-8B48-92A6-B652298478BF}" type="slidenum">
+              <a:rPr lang="en-US" smtClean="0"/>
+              <a:t>‹#›</a:t>
+            </a:fld>
+            <a:endParaRPr lang="en-US"/>
+          </a:p>
+        </p:txBody>
+      </p:sp>
+      <p:sp>
+        <p:nvSpPr>
+          <p:cNvPr id="5" name="TextBox 4"/>
+          <p:cNvSpPr/>
+          <p:nvPr>
+            <p:ph type="title"/>
+          </p:nvPr>
+        </p:nvSpPr>
+        <p:spPr>
+          <a:xfrm>
+            <a:off x="457200" y="457200"/>
+            <a:ext cx="11277600" cy="768096"/>
+          </a:xfrm>
+          <a:prstGeom prst="rect">
+            <a:avLst/>
+          </a:prstGeom>
+          <a:noFill/>
+        </p:spPr>
+        <p:txBody>
+          <a:bodyPr wrap="none" lIns="0" rIns="0">
+            <a:noAutofit/>
+          </a:bodyPr>
+          <a:lstStyle/>
+          <a:p>
+            <a:pPr algn="l"/>
+            <a:r>
+              <a:rPr sz="4200" b="1" i="0">
+                <a:solidFill>
+                  <a:srgbClr val="0072CE"/>
+                </a:solidFill>
+                <a:latin typeface="Arial"/>
+              </a:rPr>
+              <a:t>Cloud or On-Prem</a:t>
+            </a:r>
+          </a:p>
+        </p:txBody>
+      </p:sp>
+      <p:sp>
+        <p:nvSpPr>
+          <p:cNvPr id="6" name="TextBox 5"/>
+          <p:cNvSpPr/>
+          <p:nvPr>
+            <p:ph type="body" idx="1"/>
+          </p:nvPr>
+        </p:nvSpPr>
+        <p:spPr>
+          <a:xfrm>
+            <a:off x="457200" y="2776728"/>
+            <a:ext cx="4792980" cy="914400"/>
+          </a:xfrm>
+          <a:prstGeom prst="rect">
+            <a:avLst/>
+          </a:prstGeom>
+          <a:noFill/>
+        </p:spPr>
+        <p:txBody>
+          <a:bodyPr wrap="none" lIns="0" rIns="0">
+            <a:noAutofit/>
+          </a:bodyPr>
+          <a:lstStyle/>
+          <a:p>
+            <a:pPr algn="ctr"/>
+            <a:r>
+              <a:rPr sz="6000" b="1" i="0">
+                <a:solidFill>
+                  <a:srgbClr val="0A2240"/>
+                </a:solidFill>
+                <a:latin typeface="Arial"/>
+              </a:rPr>
+              <a:t>3 wks</a:t>
+            </a:r>
+          </a:p>
+        </p:txBody>
+      </p:sp>
+      <p:sp>
+        <p:nvSpPr>
+          <p:cNvPr id="7" name="TextBox 6"/>
+          <p:cNvSpPr/>
+          <p:nvPr>
+            <p:ph type="body" idx="2"/>
+          </p:nvPr>
+        </p:nvSpPr>
+        <p:spPr>
+          <a:xfrm>
+            <a:off x="0" y="3965448"/>
+            <a:ext cx="5707380" cy="518159"/>
+          </a:xfrm>
+          <a:prstGeom prst="rect">
+            <a:avLst/>
+          </a:prstGeom>
+          <a:noFill/>
+        </p:spPr>
+        <p:txBody>
+          <a:bodyPr wrap="none" lIns="0" rIns="0">
+            <a:noAutofit/>
+          </a:bodyPr>
+          <a:lstStyle/>
+          <a:p>
+            <a:pPr algn="ctr"/>
+            <a:r>
+              <a:rPr sz="3400" b="0" i="0">
+                <a:solidFill>
+                  <a:srgbClr val="0A2240"/>
+                </a:solidFill>
+                <a:latin typeface="Arial"/>
+              </a:rPr>
+              <a:t>Cloud time-to-launch</a:t>
+            </a:r>
+          </a:p>
+        </p:txBody>
+      </p:sp>
+      <p:sp>
+        <p:nvSpPr>
+          <p:cNvPr id="8" name="TextBox 7"/>
+          <p:cNvSpPr/>
+          <p:nvPr>
+            <p:ph type="body" idx="3"/>
+          </p:nvPr>
+        </p:nvSpPr>
+        <p:spPr>
+          <a:xfrm>
+            <a:off x="6941820" y="2776728"/>
+            <a:ext cx="4792980" cy="914400"/>
+          </a:xfrm>
+          <a:prstGeom prst="rect">
+            <a:avLst/>
+          </a:prstGeom>
+          <a:noFill/>
+        </p:spPr>
+        <p:txBody>
+          <a:bodyPr wrap="none" lIns="0" rIns="0">
+            <a:noAutofit/>
+          </a:bodyPr>
+          <a:lstStyle/>
+          <a:p>
+            <a:pPr algn="ctr"/>
+            <a:r>
+              <a:rPr sz="6000" b="1" i="0">
+                <a:solidFill>
+                  <a:srgbClr val="0A2240"/>
+                </a:solidFill>
+                <a:latin typeface="Arial"/>
+              </a:rPr>
+              <a:t>6 mo</a:t>
+            </a:r>
+          </a:p>
+        </p:txBody>
+      </p:sp>
+      <p:sp>
+        <p:nvSpPr>
+          <p:cNvPr id="9" name="TextBox 8"/>
+          <p:cNvSpPr/>
+          <p:nvPr>
+            <p:ph type="body" idx="4"/>
+          </p:nvPr>
+        </p:nvSpPr>
+        <p:spPr>
+          <a:xfrm>
+            <a:off x="6484620" y="3965448"/>
+            <a:ext cx="5707380" cy="518159"/>
+          </a:xfrm>
+          <a:prstGeom prst="rect">
+            <a:avLst/>
+          </a:prstGeom>
+          <a:noFill/>
+        </p:spPr>
+        <p:txBody>
+          <a:bodyPr wrap="none" lIns="0" rIns="0">
+            <a:noAutofit/>
+          </a:bodyPr>
+          <a:lstStyle/>
+          <a:p>
+            <a:pPr algn="ctr"/>
+            <a:r>
+              <a:rPr sz="3400" b="0" i="0">
+                <a:solidFill>
+                  <a:srgbClr val="0A2240"/>
+                </a:solidFill>
+                <a:latin typeface="Arial"/>
+              </a:rPr>
+              <a:t>On-prem time-to-launch</a:t>
+            </a:r>
+          </a:p>
+        </p:txBody>
+      </p:sp>
+      <p:sp>
+        <p:nvSpPr>
+          <p:cNvPr id="10" name="TextBox 9"/>
+          <p:cNvSpPr/>
+          <p:nvPr>
+            <p:ph type="body" idx="5"/>
+          </p:nvPr>
+        </p:nvSpPr>
+        <p:spPr>
+          <a:xfrm>
+            <a:off x="5435323" y="3310127"/>
+            <a:ext cx="1321354" cy="640080"/>
+          </a:xfrm>
+          <a:prstGeom prst="rect">
+            <a:avLst/>
+          </a:prstGeom>
+          <a:noFill/>
+        </p:spPr>
+        <p:txBody>
+          <a:bodyPr wrap="none" lIns="0" rIns="0">
+            <a:noAutofit/>
+          </a:bodyPr>
+          <a:lstStyle/>
+          <a:p>
+            <a:pPr algn="ctr"/>
+            <a:r>
+              <a:rPr sz="4200" b="1" i="0">
+                <a:solidFill>
+                  <a:srgbClr val="0A2240"/>
+                </a:solidFill>
+                <a:latin typeface="Arial"/>
+              </a:rPr>
+              <a:t>VS</a:t>
             </a:r>
           </a:p>
         </p:txBody>
@@ -11391,294 +10950,6 @@
 
 <file path=ppt/slideLayouts/slideLayout30.xml><?xml version="1.0" encoding="utf-8"?>
 <p:sldLayout xmlns:a="http://schemas.openxmlformats.org/drawingml/2006/main" xmlns:r="http://schemas.openxmlformats.org/officeDocument/2006/relationships" xmlns:p="http://schemas.openxmlformats.org/presentationml/2006/main" type="blank" preserve="1">
-  <p:cSld name="slidekit · This vs That">
-    <p:bg>
-      <p:bgPr>
-        <a:solidFill>
-          <a:srgbClr val="FFFFFF"/>
-        </a:solidFill>
-        <a:effectLst/>
-      </p:bgPr>
-    </p:bg>
-    <p:spTree>
-      <p:nvGrpSpPr>
-        <p:cNvPr id="1" name=""/>
-        <p:cNvGrpSpPr/>
-        <p:nvPr/>
-      </p:nvGrpSpPr>
-      <p:grpSpPr>
-        <a:xfrm>
-          <a:off x="0" y="0"/>
-          <a:ext cx="0" cy="0"/>
-          <a:chOff x="0" y="0"/>
-          <a:chExt cx="0" cy="0"/>
-        </a:xfrm>
-      </p:grpSpPr>
-      <p:sp>
-        <p:nvSpPr>
-          <p:cNvPr id="4" name="Slide Number Placeholder 3"/>
-          <p:cNvSpPr>
-            <a:spLocks noGrp="1"/>
-          </p:cNvSpPr>
-          <p:nvPr>
-            <p:ph type="sldNum" sz="quarter" idx="12"/>
-          </p:nvPr>
-        </p:nvSpPr>
-        <p:spPr>
-          <a:xfrm>
-            <a:off x="11186160" y="6035040"/>
-            <a:ext cx="548640" cy="365760"/>
-          </a:xfrm>
-        </p:spPr>
-        <p:txBody>
-          <a:bodyPr/>
-          <a:lstStyle/>
-          <a:p>
-            <a:fld id="{C1FF6DA9-008F-8B48-92A6-B652298478BF}" type="slidenum">
-              <a:rPr lang="en-US" smtClean="0"/>
-              <a:t>‹#›</a:t>
-            </a:fld>
-            <a:endParaRPr lang="en-US"/>
-          </a:p>
-        </p:txBody>
-      </p:sp>
-      <p:sp>
-        <p:nvSpPr>
-          <p:cNvPr id="5" name="TextBox 4"/>
-          <p:cNvSpPr/>
-          <p:nvPr>
-            <p:ph type="title"/>
-          </p:nvPr>
-        </p:nvSpPr>
-        <p:spPr>
-          <a:xfrm>
-            <a:off x="457200" y="457200"/>
-            <a:ext cx="11277600" cy="768096"/>
-          </a:xfrm>
-          <a:prstGeom prst="rect">
-            <a:avLst/>
-          </a:prstGeom>
-          <a:noFill/>
-        </p:spPr>
-        <p:txBody>
-          <a:bodyPr wrap="none" lIns="0" rIns="0">
-            <a:noAutofit/>
-          </a:bodyPr>
-          <a:lstStyle/>
-          <a:p>
-            <a:pPr algn="l"/>
-            <a:r>
-              <a:rPr sz="4200" b="1" i="0">
-                <a:solidFill>
-                  <a:srgbClr val="0072CE"/>
-                </a:solidFill>
-                <a:latin typeface="Arial"/>
-              </a:rPr>
-              <a:t>Cloud or On-Prem</a:t>
-            </a:r>
-          </a:p>
-        </p:txBody>
-      </p:sp>
-      <p:sp>
-        <p:nvSpPr>
-          <p:cNvPr id="6" name="TextBox 5"/>
-          <p:cNvSpPr/>
-          <p:nvPr>
-            <p:ph type="body" idx="1"/>
-          </p:nvPr>
-        </p:nvSpPr>
-        <p:spPr>
-          <a:xfrm>
-            <a:off x="457200" y="2776728"/>
-            <a:ext cx="4792980" cy="914400"/>
-          </a:xfrm>
-          <a:prstGeom prst="rect">
-            <a:avLst/>
-          </a:prstGeom>
-          <a:noFill/>
-        </p:spPr>
-        <p:txBody>
-          <a:bodyPr wrap="none" lIns="0" rIns="0">
-            <a:noAutofit/>
-          </a:bodyPr>
-          <a:lstStyle/>
-          <a:p>
-            <a:pPr algn="ctr"/>
-            <a:r>
-              <a:rPr sz="6000" b="1" i="0">
-                <a:solidFill>
-                  <a:srgbClr val="0A2240"/>
-                </a:solidFill>
-                <a:latin typeface="Arial"/>
-              </a:rPr>
-              <a:t>3 wks</a:t>
-            </a:r>
-          </a:p>
-        </p:txBody>
-      </p:sp>
-      <p:sp>
-        <p:nvSpPr>
-          <p:cNvPr id="7" name="TextBox 6"/>
-          <p:cNvSpPr/>
-          <p:nvPr>
-            <p:ph type="body" idx="2"/>
-          </p:nvPr>
-        </p:nvSpPr>
-        <p:spPr>
-          <a:xfrm>
-            <a:off x="0" y="3965448"/>
-            <a:ext cx="5707380" cy="518159"/>
-          </a:xfrm>
-          <a:prstGeom prst="rect">
-            <a:avLst/>
-          </a:prstGeom>
-          <a:noFill/>
-        </p:spPr>
-        <p:txBody>
-          <a:bodyPr wrap="none" lIns="0" rIns="0">
-            <a:noAutofit/>
-          </a:bodyPr>
-          <a:lstStyle/>
-          <a:p>
-            <a:pPr algn="ctr"/>
-            <a:r>
-              <a:rPr sz="3400" b="0" i="0">
-                <a:solidFill>
-                  <a:srgbClr val="0A2240"/>
-                </a:solidFill>
-                <a:latin typeface="Arial"/>
-              </a:rPr>
-              <a:t>Cloud time-to-launch</a:t>
-            </a:r>
-          </a:p>
-        </p:txBody>
-      </p:sp>
-      <p:sp>
-        <p:nvSpPr>
-          <p:cNvPr id="8" name="TextBox 7"/>
-          <p:cNvSpPr/>
-          <p:nvPr>
-            <p:ph type="body" idx="3"/>
-          </p:nvPr>
-        </p:nvSpPr>
-        <p:spPr>
-          <a:xfrm>
-            <a:off x="6941820" y="2776728"/>
-            <a:ext cx="4792980" cy="914400"/>
-          </a:xfrm>
-          <a:prstGeom prst="rect">
-            <a:avLst/>
-          </a:prstGeom>
-          <a:noFill/>
-        </p:spPr>
-        <p:txBody>
-          <a:bodyPr wrap="none" lIns="0" rIns="0">
-            <a:noAutofit/>
-          </a:bodyPr>
-          <a:lstStyle/>
-          <a:p>
-            <a:pPr algn="ctr"/>
-            <a:r>
-              <a:rPr sz="6000" b="1" i="0">
-                <a:solidFill>
-                  <a:srgbClr val="0A2240"/>
-                </a:solidFill>
-                <a:latin typeface="Arial"/>
-              </a:rPr>
-              <a:t>6 mo</a:t>
-            </a:r>
-          </a:p>
-        </p:txBody>
-      </p:sp>
-      <p:sp>
-        <p:nvSpPr>
-          <p:cNvPr id="9" name="TextBox 8"/>
-          <p:cNvSpPr/>
-          <p:nvPr>
-            <p:ph type="body" idx="4"/>
-          </p:nvPr>
-        </p:nvSpPr>
-        <p:spPr>
-          <a:xfrm>
-            <a:off x="6484620" y="3965448"/>
-            <a:ext cx="5707380" cy="518159"/>
-          </a:xfrm>
-          <a:prstGeom prst="rect">
-            <a:avLst/>
-          </a:prstGeom>
-          <a:noFill/>
-        </p:spPr>
-        <p:txBody>
-          <a:bodyPr wrap="none" lIns="0" rIns="0">
-            <a:noAutofit/>
-          </a:bodyPr>
-          <a:lstStyle/>
-          <a:p>
-            <a:pPr algn="ctr"/>
-            <a:r>
-              <a:rPr sz="3400" b="0" i="0">
-                <a:solidFill>
-                  <a:srgbClr val="0A2240"/>
-                </a:solidFill>
-                <a:latin typeface="Arial"/>
-              </a:rPr>
-              <a:t>On-prem time-to-launch</a:t>
-            </a:r>
-          </a:p>
-        </p:txBody>
-      </p:sp>
-      <p:sp>
-        <p:nvSpPr>
-          <p:cNvPr id="10" name="TextBox 9"/>
-          <p:cNvSpPr/>
-          <p:nvPr>
-            <p:ph type="body" idx="5"/>
-          </p:nvPr>
-        </p:nvSpPr>
-        <p:spPr>
-          <a:xfrm>
-            <a:off x="5435323" y="3310127"/>
-            <a:ext cx="1321354" cy="640080"/>
-          </a:xfrm>
-          <a:prstGeom prst="rect">
-            <a:avLst/>
-          </a:prstGeom>
-          <a:noFill/>
-        </p:spPr>
-        <p:txBody>
-          <a:bodyPr wrap="none" lIns="0" rIns="0">
-            <a:noAutofit/>
-          </a:bodyPr>
-          <a:lstStyle/>
-          <a:p>
-            <a:pPr algn="ctr"/>
-            <a:r>
-              <a:rPr sz="4200" b="1" i="0">
-                <a:solidFill>
-                  <a:srgbClr val="5B6B82"/>
-                </a:solidFill>
-                <a:latin typeface="Arial"/>
-              </a:rPr>
-              <a:t>VS</a:t>
-            </a:r>
-          </a:p>
-        </p:txBody>
-      </p:sp>
-    </p:spTree>
-    <p:extLst>
-      <p:ext uri="{BB962C8B-B14F-4D97-AF65-F5344CB8AC3E}">
-        <p14:creationId xmlns:p14="http://schemas.microsoft.com/office/powerpoint/2010/main" val="1212999818"/>
-      </p:ext>
-    </p:extLst>
-  </p:cSld>
-  <p:clrMapOvr>
-    <a:masterClrMapping/>
-  </p:clrMapOvr>
-</p:sldLayout>
-</file>
-
-<file path=ppt/slideLayouts/slideLayout31.xml><?xml version="1.0" encoding="utf-8"?>
-<p:sldLayout xmlns:a="http://schemas.openxmlformats.org/drawingml/2006/main" xmlns:r="http://schemas.openxmlformats.org/officeDocument/2006/relationships" xmlns:p="http://schemas.openxmlformats.org/presentationml/2006/main" type="blank" preserve="1">
   <p:cSld name="slidekit · KPI Grid">
     <p:bg>
       <p:bgPr>
@@ -12201,7 +11472,7 @@
         </p:nvSpPr>
         <p:spPr>
           <a:xfrm>
-            <a:off x="4307840" y="3797808"/>
+            <a:off x="4307840" y="4056888"/>
             <a:ext cx="3576320" cy="640080"/>
           </a:xfrm>
           <a:prstGeom prst="rect">
@@ -12238,7 +11509,7 @@
         </p:nvSpPr>
         <p:spPr>
           <a:xfrm>
-            <a:off x="5559552" y="4492752"/>
+            <a:off x="5559552" y="4751832"/>
             <a:ext cx="1072896" cy="54864"/>
           </a:xfrm>
           <a:prstGeom prst="rect">
@@ -12270,16 +11541,16 @@
         </p:nvSpPr>
         <p:spPr>
           <a:xfrm>
-            <a:off x="4307840" y="4602480"/>
-            <a:ext cx="3576320" cy="1127760"/>
-          </a:xfrm>
-          <a:prstGeom prst="rect">
-            <a:avLst/>
-          </a:prstGeom>
-          <a:noFill/>
-        </p:spPr>
-        <p:txBody>
-          <a:bodyPr wrap="square" lIns="0" rIns="0">
+            <a:off x="3943896" y="4861560"/>
+            <a:ext cx="4304208" cy="609600"/>
+          </a:xfrm>
+          <a:prstGeom prst="rect">
+            <a:avLst/>
+          </a:prstGeom>
+          <a:noFill/>
+        </p:spPr>
+        <p:txBody>
+          <a:bodyPr wrap="none" lIns="0" rIns="0">
             <a:noAutofit/>
           </a:bodyPr>
           <a:lstStyle/>
@@ -12292,7 +11563,7 @@
                 </a:solidFill>
                 <a:latin typeface="Arial"/>
               </a:rPr>
-              <a:t>Avg. time to value</a:t>
+              <a:t>Time to value</a:t>
             </a:r>
           </a:p>
         </p:txBody>
@@ -12416,7 +11687,7 @@
 </p:sldLayout>
 </file>
 
-<file path=ppt/slideLayouts/slideLayout32.xml><?xml version="1.0" encoding="utf-8"?>
+<file path=ppt/slideLayouts/slideLayout31.xml><?xml version="1.0" encoding="utf-8"?>
 <p:sldLayout xmlns:a="http://schemas.openxmlformats.org/drawingml/2006/main" xmlns:r="http://schemas.openxmlformats.org/officeDocument/2006/relationships" xmlns:p="http://schemas.openxmlformats.org/presentationml/2006/main" type="blank" preserve="1">
   <p:cSld name="slidekit · Chart With Insight">
     <p:bg>
@@ -12603,7 +11874,7 @@
             <a:r>
               <a:rPr sz="2500" b="0" i="0">
                 <a:solidFill>
-                  <a:srgbClr val="5B6B82"/>
+                  <a:srgbClr val="0A2240"/>
                 </a:solidFill>
                 <a:latin typeface="Arial"/>
               </a:rPr>
@@ -12709,7 +11980,7 @@
             <a:r>
               <a:rPr sz="2500" b="0" i="0">
                 <a:solidFill>
-                  <a:srgbClr val="5B6B82"/>
+                  <a:srgbClr val="0A2240"/>
                 </a:solidFill>
                 <a:latin typeface="Arial"/>
               </a:rPr>
@@ -12815,7 +12086,7 @@
             <a:r>
               <a:rPr sz="2500" b="0" i="0">
                 <a:solidFill>
-                  <a:srgbClr val="5B6B82"/>
+                  <a:srgbClr val="0A2240"/>
                 </a:solidFill>
                 <a:latin typeface="Arial"/>
               </a:rPr>
@@ -12921,7 +12192,7 @@
             <a:r>
               <a:rPr sz="2500" b="0" i="0">
                 <a:solidFill>
-                  <a:srgbClr val="5B6B82"/>
+                  <a:srgbClr val="0A2240"/>
                 </a:solidFill>
                 <a:latin typeface="Arial"/>
               </a:rPr>
@@ -12940,8 +12211,8 @@
         </p:nvSpPr>
         <p:spPr>
           <a:xfrm>
-            <a:off x="7498080" y="1770888"/>
-            <a:ext cx="128016" cy="3718560"/>
+            <a:off x="7498080" y="3325368"/>
+            <a:ext cx="128016" cy="609600"/>
           </a:xfrm>
           <a:prstGeom prst="rect">
             <a:avLst/>
@@ -12972,16 +12243,16 @@
         </p:nvSpPr>
         <p:spPr>
           <a:xfrm>
-            <a:off x="8037576" y="1770888"/>
-            <a:ext cx="3697224" cy="3718560"/>
-          </a:xfrm>
-          <a:prstGeom prst="rect">
-            <a:avLst/>
-          </a:prstGeom>
-          <a:noFill/>
-        </p:spPr>
-        <p:txBody>
-          <a:bodyPr wrap="square" lIns="0" rIns="0">
+            <a:off x="8037576" y="3325368"/>
+            <a:ext cx="4154424" cy="609600"/>
+          </a:xfrm>
+          <a:prstGeom prst="rect">
+            <a:avLst/>
+          </a:prstGeom>
+          <a:noFill/>
+        </p:spPr>
+        <p:txBody>
+          <a:bodyPr wrap="none" lIns="0" rIns="0">
             <a:noAutofit/>
           </a:bodyPr>
           <a:lstStyle/>
@@ -12994,7 +12265,7 @@
                 </a:solidFill>
                 <a:latin typeface="Arial"/>
               </a:rPr>
-              <a:t>Activations nearly quadrupled once self-serve onboarding shipped in February.</a:t>
+              <a:t>Activations 4x.</a:t>
             </a:r>
           </a:p>
         </p:txBody>
@@ -13012,7 +12283,7 @@
 </p:sldLayout>
 </file>
 
-<file path=ppt/slideLayouts/slideLayout33.xml><?xml version="1.0" encoding="utf-8"?>
+<file path=ppt/slideLayouts/slideLayout32.xml><?xml version="1.0" encoding="utf-8"?>
 <p:sldLayout xmlns:a="http://schemas.openxmlformats.org/drawingml/2006/main" xmlns:r="http://schemas.openxmlformats.org/officeDocument/2006/relationships" xmlns:p="http://schemas.openxmlformats.org/presentationml/2006/main" type="blank" preserve="1">
   <p:cSld name="slidekit · Table">
     <p:bg>
@@ -13130,7 +12401,7 @@
             <a:r>
               <a:rPr sz="3400" b="1" i="0">
                 <a:solidFill>
-                  <a:srgbClr val="123A6B"/>
+                  <a:srgbClr val="0072CE"/>
                 </a:solidFill>
                 <a:latin typeface="Arial"/>
               </a:rPr>
@@ -13167,7 +12438,7 @@
             <a:r>
               <a:rPr sz="3400" b="1" i="0">
                 <a:solidFill>
-                  <a:srgbClr val="123A6B"/>
+                  <a:srgbClr val="0072CE"/>
                 </a:solidFill>
                 <a:latin typeface="Arial"/>
               </a:rPr>
@@ -13204,7 +12475,7 @@
             <a:r>
               <a:rPr sz="3400" b="1" i="0">
                 <a:solidFill>
-                  <a:srgbClr val="123A6B"/>
+                  <a:srgbClr val="0072CE"/>
                 </a:solidFill>
                 <a:latin typeface="Arial"/>
               </a:rPr>
@@ -13702,7 +12973,7 @@
 </p:sldLayout>
 </file>
 
-<file path=ppt/slideLayouts/slideLayout34.xml><?xml version="1.0" encoding="utf-8"?>
+<file path=ppt/slideLayouts/slideLayout33.xml><?xml version="1.0" encoding="utf-8"?>
 <p:sldLayout xmlns:a="http://schemas.openxmlformats.org/drawingml/2006/main" xmlns:r="http://schemas.openxmlformats.org/officeDocument/2006/relationships" xmlns:p="http://schemas.openxmlformats.org/presentationml/2006/main" type="blank" preserve="1">
   <p:cSld name="slidekit · Metric Comparison">
     <p:bg>
@@ -13802,7 +13073,7 @@
         </p:nvSpPr>
         <p:spPr>
           <a:xfrm>
-            <a:off x="457200" y="2075688"/>
+            <a:off x="457200" y="2334768"/>
             <a:ext cx="3576320" cy="914400"/>
           </a:xfrm>
           <a:prstGeom prst="rect">
@@ -13839,16 +13110,16 @@
         </p:nvSpPr>
         <p:spPr>
           <a:xfrm>
-            <a:off x="457200" y="3264408"/>
-            <a:ext cx="3576320" cy="1127760"/>
-          </a:xfrm>
-          <a:prstGeom prst="rect">
-            <a:avLst/>
-          </a:prstGeom>
-          <a:noFill/>
-        </p:spPr>
-        <p:txBody>
-          <a:bodyPr wrap="square" lIns="0" rIns="0">
+            <a:off x="457200" y="3523488"/>
+            <a:ext cx="3576320" cy="609600"/>
+          </a:xfrm>
+          <a:prstGeom prst="rect">
+            <a:avLst/>
+          </a:prstGeom>
+          <a:noFill/>
+        </p:spPr>
+        <p:txBody>
+          <a:bodyPr wrap="none" lIns="0" rIns="0">
             <a:noAutofit/>
           </a:bodyPr>
           <a:lstStyle/>
@@ -13861,7 +13132,7 @@
                 </a:solidFill>
                 <a:latin typeface="Arial"/>
               </a:rPr>
-              <a:t>Annual recurring revenue</a:t>
+              <a:t>Revenue</a:t>
             </a:r>
           </a:p>
         </p:txBody>
@@ -13876,7 +13147,7 @@
         </p:nvSpPr>
         <p:spPr>
           <a:xfrm>
-            <a:off x="1522569" y="4666488"/>
+            <a:off x="1522569" y="4407408"/>
             <a:ext cx="1445581" cy="518159"/>
           </a:xfrm>
           <a:prstGeom prst="rect">
@@ -13908,7 +13179,7 @@
         </p:nvSpPr>
         <p:spPr>
           <a:xfrm>
-            <a:off x="1260802" y="4666488"/>
+            <a:off x="1260802" y="4407408"/>
             <a:ext cx="1969115" cy="518159"/>
           </a:xfrm>
           <a:prstGeom prst="rect">
@@ -13945,7 +13216,7 @@
         </p:nvSpPr>
         <p:spPr>
           <a:xfrm>
-            <a:off x="4307840" y="2075688"/>
+            <a:off x="4307840" y="2334768"/>
             <a:ext cx="3576320" cy="914400"/>
           </a:xfrm>
           <a:prstGeom prst="rect">
@@ -13982,8 +13253,8 @@
         </p:nvSpPr>
         <p:spPr>
           <a:xfrm>
-            <a:off x="3834934" y="3264408"/>
-            <a:ext cx="4522132" cy="1127760"/>
+            <a:off x="3834934" y="3523488"/>
+            <a:ext cx="4522132" cy="609600"/>
           </a:xfrm>
           <a:prstGeom prst="rect">
             <a:avLst/>
@@ -14019,7 +13290,7 @@
         </p:nvSpPr>
         <p:spPr>
           <a:xfrm>
-            <a:off x="5175547" y="4666488"/>
+            <a:off x="5175547" y="4407408"/>
             <a:ext cx="1840906" cy="518159"/>
           </a:xfrm>
           <a:prstGeom prst="rect">
@@ -14051,7 +13322,7 @@
         </p:nvSpPr>
         <p:spPr>
           <a:xfrm>
-            <a:off x="4795183" y="4666488"/>
+            <a:off x="4795183" y="4407408"/>
             <a:ext cx="2601634" cy="518159"/>
           </a:xfrm>
           <a:prstGeom prst="rect">
@@ -14088,7 +13359,7 @@
         </p:nvSpPr>
         <p:spPr>
           <a:xfrm>
-            <a:off x="8158480" y="2075688"/>
+            <a:off x="8158480" y="2334768"/>
             <a:ext cx="3576320" cy="914400"/>
           </a:xfrm>
           <a:prstGeom prst="rect">
@@ -14125,16 +13396,16 @@
         </p:nvSpPr>
         <p:spPr>
           <a:xfrm>
-            <a:off x="8158480" y="3264408"/>
-            <a:ext cx="3576320" cy="1127760"/>
-          </a:xfrm>
-          <a:prstGeom prst="rect">
-            <a:avLst/>
-          </a:prstGeom>
-          <a:noFill/>
-        </p:spPr>
-        <p:txBody>
-          <a:bodyPr wrap="square" lIns="0" rIns="0">
+            <a:off x="7701280" y="3523488"/>
+            <a:ext cx="4490720" cy="609600"/>
+          </a:xfrm>
+          <a:prstGeom prst="rect">
+            <a:avLst/>
+          </a:prstGeom>
+          <a:noFill/>
+        </p:spPr>
+        <p:txBody>
+          <a:bodyPr wrap="none" lIns="0" rIns="0">
             <a:noAutofit/>
           </a:bodyPr>
           <a:lstStyle/>
@@ -14147,7 +13418,7 @@
                 </a:solidFill>
                 <a:latin typeface="Arial"/>
               </a:rPr>
-              <a:t>Net promoter score</a:t>
+              <a:t>Promoter score</a:t>
             </a:r>
           </a:p>
         </p:txBody>
@@ -14162,7 +13433,7 @@
         </p:nvSpPr>
         <p:spPr>
           <a:xfrm>
-            <a:off x="9427731" y="4666488"/>
+            <a:off x="9427731" y="4407408"/>
             <a:ext cx="1037817" cy="518159"/>
           </a:xfrm>
           <a:prstGeom prst="rect">
@@ -14194,7 +13465,7 @@
         </p:nvSpPr>
         <p:spPr>
           <a:xfrm>
-            <a:off x="9288294" y="4666488"/>
+            <a:off x="9288294" y="4407408"/>
             <a:ext cx="1316691" cy="518159"/>
           </a:xfrm>
           <a:prstGeom prst="rect">
@@ -14234,7 +13505,7 @@
 </p:sldLayout>
 </file>
 
-<file path=ppt/slideLayouts/slideLayout35.xml><?xml version="1.0" encoding="utf-8"?>
+<file path=ppt/slideLayouts/slideLayout34.xml><?xml version="1.0" encoding="utf-8"?>
 <p:sldLayout xmlns:a="http://schemas.openxmlformats.org/drawingml/2006/main" xmlns:r="http://schemas.openxmlformats.org/officeDocument/2006/relationships" xmlns:p="http://schemas.openxmlformats.org/presentationml/2006/main" type="blank" preserve="1">
   <p:cSld name="slidekit · Process Steps">
     <p:bg>
@@ -14352,7 +13623,7 @@
             <a:r>
               <a:rPr sz="4200" b="1" i="0">
                 <a:solidFill>
-                  <a:srgbClr val="123A6B"/>
+                  <a:srgbClr val="0072CE"/>
                 </a:solidFill>
                 <a:latin typeface="Arial"/>
               </a:rPr>
@@ -14372,13 +13643,13 @@
         <p:spPr>
           <a:xfrm>
             <a:off x="457200" y="2194560"/>
-            <a:ext cx="784098" cy="54864"/>
+            <a:ext cx="593303" cy="54864"/>
           </a:xfrm>
           <a:prstGeom prst="rect">
             <a:avLst/>
           </a:prstGeom>
           <a:solidFill>
-            <a:srgbClr val="123A6B"/>
+            <a:srgbClr val="0072CE"/>
           </a:solidFill>
           <a:ln>
             <a:noFill/>
@@ -14421,7 +13692,7 @@
             <a:r>
               <a:rPr sz="3400" b="1" i="0">
                 <a:solidFill>
-                  <a:srgbClr val="123A6B"/>
+                  <a:srgbClr val="0072CE"/>
                 </a:solidFill>
                 <a:latin typeface="Arial"/>
               </a:rPr>
@@ -14495,7 +13766,7 @@
             <a:r>
               <a:rPr sz="4200" b="1" i="0">
                 <a:solidFill>
-                  <a:srgbClr val="123A6B"/>
+                  <a:srgbClr val="0072CE"/>
                 </a:solidFill>
                 <a:latin typeface="Arial"/>
               </a:rPr>
@@ -14515,13 +13786,13 @@
         <p:spPr>
           <a:xfrm>
             <a:off x="3345180" y="2194560"/>
-            <a:ext cx="784098" cy="54864"/>
+            <a:ext cx="593303" cy="54864"/>
           </a:xfrm>
           <a:prstGeom prst="rect">
             <a:avLst/>
           </a:prstGeom>
           <a:solidFill>
-            <a:srgbClr val="123A6B"/>
+            <a:srgbClr val="0072CE"/>
           </a:solidFill>
           <a:ln>
             <a:noFill/>
@@ -14564,7 +13835,7 @@
             <a:r>
               <a:rPr sz="3400" b="1" i="0">
                 <a:solidFill>
-                  <a:srgbClr val="123A6B"/>
+                  <a:srgbClr val="0072CE"/>
                 </a:solidFill>
                 <a:latin typeface="Arial"/>
               </a:rPr>
@@ -14638,7 +13909,7 @@
             <a:r>
               <a:rPr sz="4200" b="1" i="0">
                 <a:solidFill>
-                  <a:srgbClr val="123A6B"/>
+                  <a:srgbClr val="0072CE"/>
                 </a:solidFill>
                 <a:latin typeface="Arial"/>
               </a:rPr>
@@ -14658,13 +13929,13 @@
         <p:spPr>
           <a:xfrm>
             <a:off x="6233160" y="2194560"/>
-            <a:ext cx="784098" cy="54864"/>
+            <a:ext cx="593303" cy="54864"/>
           </a:xfrm>
           <a:prstGeom prst="rect">
             <a:avLst/>
           </a:prstGeom>
           <a:solidFill>
-            <a:srgbClr val="123A6B"/>
+            <a:srgbClr val="0072CE"/>
           </a:solidFill>
           <a:ln>
             <a:noFill/>
@@ -14707,7 +13978,7 @@
             <a:r>
               <a:rPr sz="3400" b="1" i="0">
                 <a:solidFill>
-                  <a:srgbClr val="123A6B"/>
+                  <a:srgbClr val="0072CE"/>
                 </a:solidFill>
                 <a:latin typeface="Arial"/>
               </a:rPr>
@@ -14781,7 +14052,7 @@
             <a:r>
               <a:rPr sz="4200" b="1" i="0">
                 <a:solidFill>
-                  <a:srgbClr val="123A6B"/>
+                  <a:srgbClr val="0072CE"/>
                 </a:solidFill>
                 <a:latin typeface="Arial"/>
               </a:rPr>
@@ -14801,13 +14072,13 @@
         <p:spPr>
           <a:xfrm>
             <a:off x="9121140" y="2194560"/>
-            <a:ext cx="784098" cy="54864"/>
+            <a:ext cx="593303" cy="54864"/>
           </a:xfrm>
           <a:prstGeom prst="rect">
             <a:avLst/>
           </a:prstGeom>
           <a:solidFill>
-            <a:srgbClr val="123A6B"/>
+            <a:srgbClr val="0072CE"/>
           </a:solidFill>
           <a:ln>
             <a:noFill/>
@@ -14850,7 +14121,7 @@
             <a:r>
               <a:rPr sz="3400" b="1" i="0">
                 <a:solidFill>
-                  <a:srgbClr val="123A6B"/>
+                  <a:srgbClr val="0072CE"/>
                 </a:solidFill>
                 <a:latin typeface="Arial"/>
               </a:rPr>
@@ -14909,7 +14180,7 @@
 </p:sldLayout>
 </file>
 
-<file path=ppt/slideLayouts/slideLayout36.xml><?xml version="1.0" encoding="utf-8"?>
+<file path=ppt/slideLayouts/slideLayout35.xml><?xml version="1.0" encoding="utf-8"?>
 <p:sldLayout xmlns:a="http://schemas.openxmlformats.org/drawingml/2006/main" xmlns:r="http://schemas.openxmlformats.org/officeDocument/2006/relationships" xmlns:p="http://schemas.openxmlformats.org/presentationml/2006/main" type="blank" preserve="1">
   <p:cSld name="slidekit · Roadmap">
     <p:bg>
@@ -15441,7 +14712,7 @@
 </p:sldLayout>
 </file>
 
-<file path=ppt/slideLayouts/slideLayout37.xml><?xml version="1.0" encoding="utf-8"?>
+<file path=ppt/slideLayouts/slideLayout36.xml><?xml version="1.0" encoding="utf-8"?>
 <p:sldLayout xmlns:a="http://schemas.openxmlformats.org/drawingml/2006/main" xmlns:r="http://schemas.openxmlformats.org/officeDocument/2006/relationships" xmlns:p="http://schemas.openxmlformats.org/presentationml/2006/main" type="blank" preserve="1">
   <p:cSld name="slidekit · Funnel">
     <p:bg>
@@ -15820,7 +15091,7 @@
 </p:sldLayout>
 </file>
 
-<file path=ppt/slideLayouts/slideLayout38.xml><?xml version="1.0" encoding="utf-8"?>
+<file path=ppt/slideLayouts/slideLayout37.xml><?xml version="1.0" encoding="utf-8"?>
 <p:sldLayout xmlns:a="http://schemas.openxmlformats.org/drawingml/2006/main" xmlns:r="http://schemas.openxmlformats.org/officeDocument/2006/relationships" xmlns:p="http://schemas.openxmlformats.org/presentationml/2006/main" type="blank" preserve="1">
   <p:cSld name="slidekit · Nested Circles">
     <p:bg>
@@ -15927,7 +15198,7 @@
             <a:avLst/>
           </a:prstGeom>
           <a:solidFill>
-            <a:srgbClr val="5B6B82"/>
+            <a:srgbClr val="0A2240"/>
           </a:solidFill>
           <a:ln>
             <a:noFill/>
@@ -15991,7 +15262,7 @@
             <a:avLst/>
           </a:prstGeom>
           <a:solidFill>
-            <a:srgbClr val="123A6B"/>
+            <a:srgbClr val="0A2240"/>
           </a:solidFill>
           <a:ln>
             <a:noFill/>
@@ -16241,7 +15512,7 @@
 </p:sldLayout>
 </file>
 
-<file path=ppt/slideLayouts/slideLayout39.xml><?xml version="1.0" encoding="utf-8"?>
+<file path=ppt/slideLayouts/slideLayout38.xml><?xml version="1.0" encoding="utf-8"?>
 <p:sldLayout xmlns:a="http://schemas.openxmlformats.org/drawingml/2006/main" xmlns:r="http://schemas.openxmlformats.org/officeDocument/2006/relationships" xmlns:p="http://schemas.openxmlformats.org/presentationml/2006/main" type="blank" preserve="1">
   <p:cSld name="slidekit · Pyramid">
     <p:bg>
@@ -16348,7 +15619,7 @@
             <a:avLst/>
           </a:prstGeom>
           <a:solidFill>
-            <a:srgbClr val="123A6B"/>
+            <a:srgbClr val="0072CE"/>
           </a:solidFill>
           <a:ln>
             <a:noFill/>
@@ -16486,7 +15757,7 @@
             <a:avLst/>
           </a:prstGeom>
           <a:solidFill>
-            <a:srgbClr val="123A6B"/>
+            <a:srgbClr val="0072CE"/>
           </a:solidFill>
           <a:ln>
             <a:noFill/>
@@ -16603,6 +15874,533 @@
                 <a:latin typeface="Arial"/>
               </a:rPr>
               <a:t>Tactics</a:t>
+            </a:r>
+          </a:p>
+        </p:txBody>
+      </p:sp>
+    </p:spTree>
+    <p:extLst>
+      <p:ext uri="{BB962C8B-B14F-4D97-AF65-F5344CB8AC3E}">
+        <p14:creationId xmlns:p14="http://schemas.microsoft.com/office/powerpoint/2010/main" val="1212999818"/>
+      </p:ext>
+    </p:extLst>
+  </p:cSld>
+  <p:clrMapOvr>
+    <a:masterClrMapping/>
+  </p:clrMapOvr>
+</p:sldLayout>
+</file>
+
+<file path=ppt/slideLayouts/slideLayout39.xml><?xml version="1.0" encoding="utf-8"?>
+<p:sldLayout xmlns:a="http://schemas.openxmlformats.org/drawingml/2006/main" xmlns:r="http://schemas.openxmlformats.org/officeDocument/2006/relationships" xmlns:p="http://schemas.openxmlformats.org/presentationml/2006/main" type="blank" preserve="1">
+  <p:cSld name="slidekit · SWOT">
+    <p:bg>
+      <p:bgPr>
+        <a:solidFill>
+          <a:srgbClr val="FFFFFF"/>
+        </a:solidFill>
+        <a:effectLst/>
+      </p:bgPr>
+    </p:bg>
+    <p:spTree>
+      <p:nvGrpSpPr>
+        <p:cNvPr id="1" name=""/>
+        <p:cNvGrpSpPr/>
+        <p:nvPr/>
+      </p:nvGrpSpPr>
+      <p:grpSpPr>
+        <a:xfrm>
+          <a:off x="0" y="0"/>
+          <a:ext cx="0" cy="0"/>
+          <a:chOff x="0" y="0"/>
+          <a:chExt cx="0" cy="0"/>
+        </a:xfrm>
+      </p:grpSpPr>
+      <p:sp>
+        <p:nvSpPr>
+          <p:cNvPr id="4" name="Slide Number Placeholder 3"/>
+          <p:cNvSpPr>
+            <a:spLocks noGrp="1"/>
+          </p:cNvSpPr>
+          <p:nvPr>
+            <p:ph type="sldNum" sz="quarter" idx="12"/>
+          </p:nvPr>
+        </p:nvSpPr>
+        <p:spPr>
+          <a:xfrm>
+            <a:off x="11186160" y="6035040"/>
+            <a:ext cx="548640" cy="365760"/>
+          </a:xfrm>
+        </p:spPr>
+        <p:txBody>
+          <a:bodyPr/>
+          <a:lstStyle/>
+          <a:p>
+            <a:fld id="{C1FF6DA9-008F-8B48-92A6-B652298478BF}" type="slidenum">
+              <a:rPr lang="en-US" smtClean="0"/>
+              <a:t>‹#›</a:t>
+            </a:fld>
+            <a:endParaRPr lang="en-US"/>
+          </a:p>
+        </p:txBody>
+      </p:sp>
+      <p:sp>
+        <p:nvSpPr>
+          <p:cNvPr id="5" name="TextBox 4"/>
+          <p:cNvSpPr/>
+          <p:nvPr>
+            <p:ph type="title"/>
+          </p:nvPr>
+        </p:nvSpPr>
+        <p:spPr>
+          <a:xfrm>
+            <a:off x="457200" y="457200"/>
+            <a:ext cx="11277600" cy="768096"/>
+          </a:xfrm>
+          <a:prstGeom prst="rect">
+            <a:avLst/>
+          </a:prstGeom>
+          <a:noFill/>
+        </p:spPr>
+        <p:txBody>
+          <a:bodyPr wrap="none" lIns="0" rIns="0">
+            <a:noAutofit/>
+          </a:bodyPr>
+          <a:lstStyle/>
+          <a:p>
+            <a:pPr algn="l"/>
+            <a:r>
+              <a:rPr sz="4200" b="1" i="0">
+                <a:solidFill>
+                  <a:srgbClr val="0072CE"/>
+                </a:solidFill>
+                <a:latin typeface="Arial"/>
+              </a:rPr>
+              <a:t>SWOT Analysis</a:t>
+            </a:r>
+          </a:p>
+        </p:txBody>
+      </p:sp>
+      <p:sp>
+        <p:nvSpPr>
+          <p:cNvPr id="6" name="TextBox 5"/>
+          <p:cNvSpPr/>
+          <p:nvPr>
+            <p:ph type="body" idx="1"/>
+          </p:nvPr>
+        </p:nvSpPr>
+        <p:spPr>
+          <a:xfrm>
+            <a:off x="457200" y="1499616"/>
+            <a:ext cx="5501640" cy="621791"/>
+          </a:xfrm>
+          <a:prstGeom prst="rect">
+            <a:avLst/>
+          </a:prstGeom>
+          <a:noFill/>
+        </p:spPr>
+        <p:txBody>
+          <a:bodyPr wrap="none" lIns="0" rIns="0">
+            <a:noAutofit/>
+          </a:bodyPr>
+          <a:lstStyle/>
+          <a:p>
+            <a:pPr algn="l"/>
+            <a:r>
+              <a:rPr sz="3400" b="1" i="0">
+                <a:solidFill>
+                  <a:srgbClr val="0072CE"/>
+                </a:solidFill>
+                <a:latin typeface="Arial"/>
+              </a:rPr>
+              <a:t>Strengths</a:t>
+            </a:r>
+          </a:p>
+        </p:txBody>
+      </p:sp>
+      <p:sp>
+        <p:nvSpPr>
+          <p:cNvPr id="7" name="Rectangle 6"/>
+          <p:cNvSpPr/>
+          <p:nvPr>
+            <p:ph type="body" idx="2"/>
+          </p:nvPr>
+        </p:nvSpPr>
+        <p:spPr>
+          <a:xfrm>
+            <a:off x="457200" y="2176271"/>
+            <a:ext cx="2015207" cy="54864"/>
+          </a:xfrm>
+          <a:prstGeom prst="rect">
+            <a:avLst/>
+          </a:prstGeom>
+          <a:solidFill>
+            <a:srgbClr val="0072CE"/>
+          </a:solidFill>
+          <a:ln>
+            <a:noFill/>
+          </a:ln>
+          <a:effectLst/>
+        </p:spPr>
+        <p:txBody>
+          <a:bodyPr rtlCol="0" anchor="ctr"/>
+          <a:lstStyle/>
+          <a:p>
+            <a:pPr algn="ctr"/>
+          </a:p>
+        </p:txBody>
+      </p:sp>
+      <p:sp>
+        <p:nvSpPr>
+          <p:cNvPr id="8" name="TextBox 7"/>
+          <p:cNvSpPr/>
+          <p:nvPr>
+            <p:ph type="body" idx="3"/>
+          </p:nvPr>
+        </p:nvSpPr>
+        <p:spPr>
+          <a:xfrm>
+            <a:off x="457200" y="2395727"/>
+            <a:ext cx="7863523" cy="609600"/>
+          </a:xfrm>
+          <a:prstGeom prst="rect">
+            <a:avLst/>
+          </a:prstGeom>
+          <a:noFill/>
+        </p:spPr>
+        <p:txBody>
+          <a:bodyPr wrap="none" lIns="0" rIns="0">
+            <a:noAutofit/>
+          </a:bodyPr>
+          <a:lstStyle/>
+          <a:p>
+            <a:pPr algn="l"/>
+            <a:r>
+              <a:rPr sz="3400" b="0" i="0">
+                <a:solidFill>
+                  <a:srgbClr val="0A2240"/>
+                </a:solidFill>
+                <a:latin typeface="Arial"/>
+              </a:rPr>
+              <a:t>Strong brand, loyal users</a:t>
+            </a:r>
+          </a:p>
+        </p:txBody>
+      </p:sp>
+      <p:sp>
+        <p:nvSpPr>
+          <p:cNvPr id="9" name="TextBox 8"/>
+          <p:cNvSpPr/>
+          <p:nvPr>
+            <p:ph type="body" idx="4"/>
+          </p:nvPr>
+        </p:nvSpPr>
+        <p:spPr>
+          <a:xfrm>
+            <a:off x="6233160" y="1499616"/>
+            <a:ext cx="5501640" cy="621791"/>
+          </a:xfrm>
+          <a:prstGeom prst="rect">
+            <a:avLst/>
+          </a:prstGeom>
+          <a:noFill/>
+        </p:spPr>
+        <p:txBody>
+          <a:bodyPr wrap="none" lIns="0" rIns="0">
+            <a:noAutofit/>
+          </a:bodyPr>
+          <a:lstStyle/>
+          <a:p>
+            <a:pPr algn="l"/>
+            <a:r>
+              <a:rPr sz="3400" b="1" i="0">
+                <a:solidFill>
+                  <a:srgbClr val="0A2240"/>
+                </a:solidFill>
+                <a:latin typeface="Arial"/>
+              </a:rPr>
+              <a:t>Weaknesses</a:t>
+            </a:r>
+          </a:p>
+        </p:txBody>
+      </p:sp>
+      <p:sp>
+        <p:nvSpPr>
+          <p:cNvPr id="10" name="Rectangle 9"/>
+          <p:cNvSpPr/>
+          <p:nvPr>
+            <p:ph type="body" idx="5"/>
+          </p:nvPr>
+        </p:nvSpPr>
+        <p:spPr>
+          <a:xfrm>
+            <a:off x="6233160" y="2176271"/>
+            <a:ext cx="2584686" cy="54864"/>
+          </a:xfrm>
+          <a:prstGeom prst="rect">
+            <a:avLst/>
+          </a:prstGeom>
+          <a:solidFill>
+            <a:srgbClr val="0A2240"/>
+          </a:solidFill>
+          <a:ln>
+            <a:noFill/>
+          </a:ln>
+          <a:effectLst/>
+        </p:spPr>
+        <p:txBody>
+          <a:bodyPr rtlCol="0" anchor="ctr"/>
+          <a:lstStyle/>
+          <a:p>
+            <a:pPr algn="ctr"/>
+          </a:p>
+        </p:txBody>
+      </p:sp>
+      <p:sp>
+        <p:nvSpPr>
+          <p:cNvPr id="11" name="TextBox 10"/>
+          <p:cNvSpPr/>
+          <p:nvPr>
+            <p:ph type="body" idx="6"/>
+          </p:nvPr>
+        </p:nvSpPr>
+        <p:spPr>
+          <a:xfrm>
+            <a:off x="6233160" y="2395727"/>
+            <a:ext cx="5958840" cy="609600"/>
+          </a:xfrm>
+          <a:prstGeom prst="rect">
+            <a:avLst/>
+          </a:prstGeom>
+          <a:noFill/>
+        </p:spPr>
+        <p:txBody>
+          <a:bodyPr wrap="none" lIns="0" rIns="0">
+            <a:noAutofit/>
+          </a:bodyPr>
+          <a:lstStyle/>
+          <a:p>
+            <a:pPr algn="l"/>
+            <a:r>
+              <a:rPr sz="3400" b="0" i="0">
+                <a:solidFill>
+                  <a:srgbClr val="0A2240"/>
+                </a:solidFill>
+                <a:latin typeface="Arial"/>
+              </a:rPr>
+              <a:t>Thin margins, small team</a:t>
+            </a:r>
+          </a:p>
+        </p:txBody>
+      </p:sp>
+      <p:sp>
+        <p:nvSpPr>
+          <p:cNvPr id="12" name="TextBox 11"/>
+          <p:cNvSpPr/>
+          <p:nvPr>
+            <p:ph type="body" idx="7"/>
+          </p:nvPr>
+        </p:nvSpPr>
+        <p:spPr>
+          <a:xfrm>
+            <a:off x="457200" y="3767328"/>
+            <a:ext cx="5501640" cy="621791"/>
+          </a:xfrm>
+          <a:prstGeom prst="rect">
+            <a:avLst/>
+          </a:prstGeom>
+          <a:noFill/>
+        </p:spPr>
+        <p:txBody>
+          <a:bodyPr wrap="none" lIns="0" rIns="0">
+            <a:noAutofit/>
+          </a:bodyPr>
+          <a:lstStyle/>
+          <a:p>
+            <a:pPr algn="l"/>
+            <a:r>
+              <a:rPr sz="3400" b="1" i="0">
+                <a:solidFill>
+                  <a:srgbClr val="0072CE"/>
+                </a:solidFill>
+                <a:latin typeface="Arial"/>
+              </a:rPr>
+              <a:t>Opportunities</a:t>
+            </a:r>
+          </a:p>
+        </p:txBody>
+      </p:sp>
+      <p:sp>
+        <p:nvSpPr>
+          <p:cNvPr id="13" name="Rectangle 12"/>
+          <p:cNvSpPr/>
+          <p:nvPr>
+            <p:ph type="body" idx="8"/>
+          </p:nvPr>
+        </p:nvSpPr>
+        <p:spPr>
+          <a:xfrm>
+            <a:off x="457200" y="4443983"/>
+            <a:ext cx="2830525" cy="54864"/>
+          </a:xfrm>
+          <a:prstGeom prst="rect">
+            <a:avLst/>
+          </a:prstGeom>
+          <a:solidFill>
+            <a:srgbClr val="0072CE"/>
+          </a:solidFill>
+          <a:ln>
+            <a:noFill/>
+          </a:ln>
+          <a:effectLst/>
+        </p:spPr>
+        <p:txBody>
+          <a:bodyPr rtlCol="0" anchor="ctr"/>
+          <a:lstStyle/>
+          <a:p>
+            <a:pPr algn="ctr"/>
+          </a:p>
+        </p:txBody>
+      </p:sp>
+      <p:sp>
+        <p:nvSpPr>
+          <p:cNvPr id="14" name="TextBox 13"/>
+          <p:cNvSpPr/>
+          <p:nvPr>
+            <p:ph type="body" idx="9"/>
+          </p:nvPr>
+        </p:nvSpPr>
+        <p:spPr>
+          <a:xfrm>
+            <a:off x="457200" y="4663439"/>
+            <a:ext cx="8015326" cy="609600"/>
+          </a:xfrm>
+          <a:prstGeom prst="rect">
+            <a:avLst/>
+          </a:prstGeom>
+          <a:noFill/>
+        </p:spPr>
+        <p:txBody>
+          <a:bodyPr wrap="none" lIns="0" rIns="0">
+            <a:noAutofit/>
+          </a:bodyPr>
+          <a:lstStyle/>
+          <a:p>
+            <a:pPr algn="l"/>
+            <a:r>
+              <a:rPr sz="3400" b="0" i="0">
+                <a:solidFill>
+                  <a:srgbClr val="0A2240"/>
+                </a:solidFill>
+                <a:latin typeface="Arial"/>
+              </a:rPr>
+              <a:t>New markets via partners</a:t>
+            </a:r>
+          </a:p>
+        </p:txBody>
+      </p:sp>
+      <p:sp>
+        <p:nvSpPr>
+          <p:cNvPr id="15" name="TextBox 14"/>
+          <p:cNvSpPr/>
+          <p:nvPr>
+            <p:ph type="body" idx="13"/>
+          </p:nvPr>
+        </p:nvSpPr>
+        <p:spPr>
+          <a:xfrm>
+            <a:off x="6233160" y="3767328"/>
+            <a:ext cx="5501640" cy="621791"/>
+          </a:xfrm>
+          <a:prstGeom prst="rect">
+            <a:avLst/>
+          </a:prstGeom>
+          <a:noFill/>
+        </p:spPr>
+        <p:txBody>
+          <a:bodyPr wrap="none" lIns="0" rIns="0">
+            <a:noAutofit/>
+          </a:bodyPr>
+          <a:lstStyle/>
+          <a:p>
+            <a:pPr algn="l"/>
+            <a:r>
+              <a:rPr sz="3400" b="1" i="0">
+                <a:solidFill>
+                  <a:srgbClr val="0A2240"/>
+                </a:solidFill>
+                <a:latin typeface="Arial"/>
+              </a:rPr>
+              <a:t>Threats</a:t>
+            </a:r>
+          </a:p>
+        </p:txBody>
+      </p:sp>
+      <p:sp>
+        <p:nvSpPr>
+          <p:cNvPr id="16" name="Rectangle 15"/>
+          <p:cNvSpPr/>
+          <p:nvPr>
+            <p:ph type="body" idx="14"/>
+          </p:nvPr>
+        </p:nvSpPr>
+        <p:spPr>
+          <a:xfrm>
+            <a:off x="6233160" y="4443983"/>
+            <a:ext cx="1559793" cy="54864"/>
+          </a:xfrm>
+          <a:prstGeom prst="rect">
+            <a:avLst/>
+          </a:prstGeom>
+          <a:solidFill>
+            <a:srgbClr val="0A2240"/>
+          </a:solidFill>
+          <a:ln>
+            <a:noFill/>
+          </a:ln>
+          <a:effectLst/>
+        </p:spPr>
+        <p:txBody>
+          <a:bodyPr rtlCol="0" anchor="ctr"/>
+          <a:lstStyle/>
+          <a:p>
+            <a:pPr algn="ctr"/>
+          </a:p>
+        </p:txBody>
+      </p:sp>
+      <p:sp>
+        <p:nvSpPr>
+          <p:cNvPr id="17" name="TextBox 16"/>
+          <p:cNvSpPr/>
+          <p:nvPr>
+            <p:ph type="body" idx="15"/>
+          </p:nvPr>
+        </p:nvSpPr>
+        <p:spPr>
+          <a:xfrm>
+            <a:off x="6233160" y="4663439"/>
+            <a:ext cx="5958840" cy="609600"/>
+          </a:xfrm>
+          <a:prstGeom prst="rect">
+            <a:avLst/>
+          </a:prstGeom>
+          <a:noFill/>
+        </p:spPr>
+        <p:txBody>
+          <a:bodyPr wrap="none" lIns="0" rIns="0">
+            <a:noAutofit/>
+          </a:bodyPr>
+          <a:lstStyle/>
+          <a:p>
+            <a:pPr algn="l"/>
+            <a:r>
+              <a:rPr sz="3400" b="0" i="0">
+                <a:solidFill>
+                  <a:srgbClr val="0A2240"/>
+                </a:solidFill>
+                <a:latin typeface="Arial"/>
+              </a:rPr>
+              <a:t>New entrants cut prices</a:t>
             </a:r>
           </a:p>
         </p:txBody>
@@ -16909,533 +16707,6 @@
 </file>
 
 <file path=ppt/slideLayouts/slideLayout40.xml><?xml version="1.0" encoding="utf-8"?>
-<p:sldLayout xmlns:a="http://schemas.openxmlformats.org/drawingml/2006/main" xmlns:r="http://schemas.openxmlformats.org/officeDocument/2006/relationships" xmlns:p="http://schemas.openxmlformats.org/presentationml/2006/main" type="blank" preserve="1">
-  <p:cSld name="slidekit · SWOT">
-    <p:bg>
-      <p:bgPr>
-        <a:solidFill>
-          <a:srgbClr val="FFFFFF"/>
-        </a:solidFill>
-        <a:effectLst/>
-      </p:bgPr>
-    </p:bg>
-    <p:spTree>
-      <p:nvGrpSpPr>
-        <p:cNvPr id="1" name=""/>
-        <p:cNvGrpSpPr/>
-        <p:nvPr/>
-      </p:nvGrpSpPr>
-      <p:grpSpPr>
-        <a:xfrm>
-          <a:off x="0" y="0"/>
-          <a:ext cx="0" cy="0"/>
-          <a:chOff x="0" y="0"/>
-          <a:chExt cx="0" cy="0"/>
-        </a:xfrm>
-      </p:grpSpPr>
-      <p:sp>
-        <p:nvSpPr>
-          <p:cNvPr id="4" name="Slide Number Placeholder 3"/>
-          <p:cNvSpPr>
-            <a:spLocks noGrp="1"/>
-          </p:cNvSpPr>
-          <p:nvPr>
-            <p:ph type="sldNum" sz="quarter" idx="12"/>
-          </p:nvPr>
-        </p:nvSpPr>
-        <p:spPr>
-          <a:xfrm>
-            <a:off x="11186160" y="6035040"/>
-            <a:ext cx="548640" cy="365760"/>
-          </a:xfrm>
-        </p:spPr>
-        <p:txBody>
-          <a:bodyPr/>
-          <a:lstStyle/>
-          <a:p>
-            <a:fld id="{C1FF6DA9-008F-8B48-92A6-B652298478BF}" type="slidenum">
-              <a:rPr lang="en-US" smtClean="0"/>
-              <a:t>‹#›</a:t>
-            </a:fld>
-            <a:endParaRPr lang="en-US"/>
-          </a:p>
-        </p:txBody>
-      </p:sp>
-      <p:sp>
-        <p:nvSpPr>
-          <p:cNvPr id="5" name="TextBox 4"/>
-          <p:cNvSpPr/>
-          <p:nvPr>
-            <p:ph type="title"/>
-          </p:nvPr>
-        </p:nvSpPr>
-        <p:spPr>
-          <a:xfrm>
-            <a:off x="457200" y="457200"/>
-            <a:ext cx="11277600" cy="768096"/>
-          </a:xfrm>
-          <a:prstGeom prst="rect">
-            <a:avLst/>
-          </a:prstGeom>
-          <a:noFill/>
-        </p:spPr>
-        <p:txBody>
-          <a:bodyPr wrap="none" lIns="0" rIns="0">
-            <a:noAutofit/>
-          </a:bodyPr>
-          <a:lstStyle/>
-          <a:p>
-            <a:pPr algn="l"/>
-            <a:r>
-              <a:rPr sz="4200" b="1" i="0">
-                <a:solidFill>
-                  <a:srgbClr val="0072CE"/>
-                </a:solidFill>
-                <a:latin typeface="Arial"/>
-              </a:rPr>
-              <a:t>SWOT Analysis</a:t>
-            </a:r>
-          </a:p>
-        </p:txBody>
-      </p:sp>
-      <p:sp>
-        <p:nvSpPr>
-          <p:cNvPr id="6" name="TextBox 5"/>
-          <p:cNvSpPr/>
-          <p:nvPr>
-            <p:ph type="body" idx="1"/>
-          </p:nvPr>
-        </p:nvSpPr>
-        <p:spPr>
-          <a:xfrm>
-            <a:off x="457200" y="1499616"/>
-            <a:ext cx="5501640" cy="621791"/>
-          </a:xfrm>
-          <a:prstGeom prst="rect">
-            <a:avLst/>
-          </a:prstGeom>
-          <a:noFill/>
-        </p:spPr>
-        <p:txBody>
-          <a:bodyPr wrap="none" lIns="0" rIns="0">
-            <a:noAutofit/>
-          </a:bodyPr>
-          <a:lstStyle/>
-          <a:p>
-            <a:pPr algn="l"/>
-            <a:r>
-              <a:rPr sz="3400" b="1" i="0">
-                <a:solidFill>
-                  <a:srgbClr val="0072CE"/>
-                </a:solidFill>
-                <a:latin typeface="Arial"/>
-              </a:rPr>
-              <a:t>Strengths</a:t>
-            </a:r>
-          </a:p>
-        </p:txBody>
-      </p:sp>
-      <p:sp>
-        <p:nvSpPr>
-          <p:cNvPr id="7" name="Rectangle 6"/>
-          <p:cNvSpPr/>
-          <p:nvPr>
-            <p:ph type="body" idx="2"/>
-          </p:nvPr>
-        </p:nvSpPr>
-        <p:spPr>
-          <a:xfrm>
-            <a:off x="457200" y="2176271"/>
-            <a:ext cx="1650492" cy="54864"/>
-          </a:xfrm>
-          <a:prstGeom prst="rect">
-            <a:avLst/>
-          </a:prstGeom>
-          <a:solidFill>
-            <a:srgbClr val="0072CE"/>
-          </a:solidFill>
-          <a:ln>
-            <a:noFill/>
-          </a:ln>
-          <a:effectLst/>
-        </p:spPr>
-        <p:txBody>
-          <a:bodyPr rtlCol="0" anchor="ctr"/>
-          <a:lstStyle/>
-          <a:p>
-            <a:pPr algn="ctr"/>
-          </a:p>
-        </p:txBody>
-      </p:sp>
-      <p:sp>
-        <p:nvSpPr>
-          <p:cNvPr id="8" name="TextBox 7"/>
-          <p:cNvSpPr/>
-          <p:nvPr>
-            <p:ph type="body" idx="3"/>
-          </p:nvPr>
-        </p:nvSpPr>
-        <p:spPr>
-          <a:xfrm>
-            <a:off x="457200" y="2395727"/>
-            <a:ext cx="5501640" cy="1097281"/>
-          </a:xfrm>
-          <a:prstGeom prst="rect">
-            <a:avLst/>
-          </a:prstGeom>
-          <a:noFill/>
-        </p:spPr>
-        <p:txBody>
-          <a:bodyPr wrap="square" lIns="0" rIns="0">
-            <a:noAutofit/>
-          </a:bodyPr>
-          <a:lstStyle/>
-          <a:p>
-            <a:pPr algn="l"/>
-            <a:r>
-              <a:rPr sz="3400" b="0" i="0">
-                <a:solidFill>
-                  <a:srgbClr val="0A2240"/>
-                </a:solidFill>
-                <a:latin typeface="Arial"/>
-              </a:rPr>
-              <a:t>A strong brand with loyal users</a:t>
-            </a:r>
-          </a:p>
-        </p:txBody>
-      </p:sp>
-      <p:sp>
-        <p:nvSpPr>
-          <p:cNvPr id="9" name="TextBox 8"/>
-          <p:cNvSpPr/>
-          <p:nvPr>
-            <p:ph type="body" idx="4"/>
-          </p:nvPr>
-        </p:nvSpPr>
-        <p:spPr>
-          <a:xfrm>
-            <a:off x="6233160" y="1499616"/>
-            <a:ext cx="5501640" cy="621791"/>
-          </a:xfrm>
-          <a:prstGeom prst="rect">
-            <a:avLst/>
-          </a:prstGeom>
-          <a:noFill/>
-        </p:spPr>
-        <p:txBody>
-          <a:bodyPr wrap="none" lIns="0" rIns="0">
-            <a:noAutofit/>
-          </a:bodyPr>
-          <a:lstStyle/>
-          <a:p>
-            <a:pPr algn="l"/>
-            <a:r>
-              <a:rPr sz="3400" b="1" i="0">
-                <a:solidFill>
-                  <a:srgbClr val="5B6B82"/>
-                </a:solidFill>
-                <a:latin typeface="Arial"/>
-              </a:rPr>
-              <a:t>Weaknesses</a:t>
-            </a:r>
-          </a:p>
-        </p:txBody>
-      </p:sp>
-      <p:sp>
-        <p:nvSpPr>
-          <p:cNvPr id="10" name="Rectangle 9"/>
-          <p:cNvSpPr/>
-          <p:nvPr>
-            <p:ph type="body" idx="5"/>
-          </p:nvPr>
-        </p:nvSpPr>
-        <p:spPr>
-          <a:xfrm>
-            <a:off x="6233160" y="2176271"/>
-            <a:ext cx="1650492" cy="54864"/>
-          </a:xfrm>
-          <a:prstGeom prst="rect">
-            <a:avLst/>
-          </a:prstGeom>
-          <a:solidFill>
-            <a:srgbClr val="5B6B82"/>
-          </a:solidFill>
-          <a:ln>
-            <a:noFill/>
-          </a:ln>
-          <a:effectLst/>
-        </p:spPr>
-        <p:txBody>
-          <a:bodyPr rtlCol="0" anchor="ctr"/>
-          <a:lstStyle/>
-          <a:p>
-            <a:pPr algn="ctr"/>
-          </a:p>
-        </p:txBody>
-      </p:sp>
-      <p:sp>
-        <p:nvSpPr>
-          <p:cNvPr id="11" name="TextBox 10"/>
-          <p:cNvSpPr/>
-          <p:nvPr>
-            <p:ph type="body" idx="6"/>
-          </p:nvPr>
-        </p:nvSpPr>
-        <p:spPr>
-          <a:xfrm>
-            <a:off x="6233160" y="2395727"/>
-            <a:ext cx="5501640" cy="1097281"/>
-          </a:xfrm>
-          <a:prstGeom prst="rect">
-            <a:avLst/>
-          </a:prstGeom>
-          <a:noFill/>
-        </p:spPr>
-        <p:txBody>
-          <a:bodyPr wrap="square" lIns="0" rIns="0">
-            <a:noAutofit/>
-          </a:bodyPr>
-          <a:lstStyle/>
-          <a:p>
-            <a:pPr algn="l"/>
-            <a:r>
-              <a:rPr sz="3400" b="0" i="0">
-                <a:solidFill>
-                  <a:srgbClr val="0A2240"/>
-                </a:solidFill>
-                <a:latin typeface="Arial"/>
-              </a:rPr>
-              <a:t>Thin margins and a small team</a:t>
-            </a:r>
-          </a:p>
-        </p:txBody>
-      </p:sp>
-      <p:sp>
-        <p:nvSpPr>
-          <p:cNvPr id="12" name="TextBox 11"/>
-          <p:cNvSpPr/>
-          <p:nvPr>
-            <p:ph type="body" idx="7"/>
-          </p:nvPr>
-        </p:nvSpPr>
-        <p:spPr>
-          <a:xfrm>
-            <a:off x="457200" y="3767328"/>
-            <a:ext cx="5501640" cy="621791"/>
-          </a:xfrm>
-          <a:prstGeom prst="rect">
-            <a:avLst/>
-          </a:prstGeom>
-          <a:noFill/>
-        </p:spPr>
-        <p:txBody>
-          <a:bodyPr wrap="none" lIns="0" rIns="0">
-            <a:noAutofit/>
-          </a:bodyPr>
-          <a:lstStyle/>
-          <a:p>
-            <a:pPr algn="l"/>
-            <a:r>
-              <a:rPr sz="3400" b="1" i="0">
-                <a:solidFill>
-                  <a:srgbClr val="0072CE"/>
-                </a:solidFill>
-                <a:latin typeface="Arial"/>
-              </a:rPr>
-              <a:t>Opportunities</a:t>
-            </a:r>
-          </a:p>
-        </p:txBody>
-      </p:sp>
-      <p:sp>
-        <p:nvSpPr>
-          <p:cNvPr id="13" name="Rectangle 12"/>
-          <p:cNvSpPr/>
-          <p:nvPr>
-            <p:ph type="body" idx="8"/>
-          </p:nvPr>
-        </p:nvSpPr>
-        <p:spPr>
-          <a:xfrm>
-            <a:off x="457200" y="4443983"/>
-            <a:ext cx="1650492" cy="54864"/>
-          </a:xfrm>
-          <a:prstGeom prst="rect">
-            <a:avLst/>
-          </a:prstGeom>
-          <a:solidFill>
-            <a:srgbClr val="0072CE"/>
-          </a:solidFill>
-          <a:ln>
-            <a:noFill/>
-          </a:ln>
-          <a:effectLst/>
-        </p:spPr>
-        <p:txBody>
-          <a:bodyPr rtlCol="0" anchor="ctr"/>
-          <a:lstStyle/>
-          <a:p>
-            <a:pPr algn="ctr"/>
-          </a:p>
-        </p:txBody>
-      </p:sp>
-      <p:sp>
-        <p:nvSpPr>
-          <p:cNvPr id="14" name="TextBox 13"/>
-          <p:cNvSpPr/>
-          <p:nvPr>
-            <p:ph type="body" idx="9"/>
-          </p:nvPr>
-        </p:nvSpPr>
-        <p:spPr>
-          <a:xfrm>
-            <a:off x="457200" y="4663439"/>
-            <a:ext cx="5501640" cy="1097281"/>
-          </a:xfrm>
-          <a:prstGeom prst="rect">
-            <a:avLst/>
-          </a:prstGeom>
-          <a:noFill/>
-        </p:spPr>
-        <p:txBody>
-          <a:bodyPr wrap="square" lIns="0" rIns="0">
-            <a:noAutofit/>
-          </a:bodyPr>
-          <a:lstStyle/>
-          <a:p>
-            <a:pPr algn="l"/>
-            <a:r>
-              <a:rPr sz="3400" b="0" i="0">
-                <a:solidFill>
-                  <a:srgbClr val="0A2240"/>
-                </a:solidFill>
-                <a:latin typeface="Arial"/>
-              </a:rPr>
-              <a:t>New markets through partnerships</a:t>
-            </a:r>
-          </a:p>
-        </p:txBody>
-      </p:sp>
-      <p:sp>
-        <p:nvSpPr>
-          <p:cNvPr id="15" name="TextBox 14"/>
-          <p:cNvSpPr/>
-          <p:nvPr>
-            <p:ph type="body" idx="13"/>
-          </p:nvPr>
-        </p:nvSpPr>
-        <p:spPr>
-          <a:xfrm>
-            <a:off x="6233160" y="3767328"/>
-            <a:ext cx="5501640" cy="621791"/>
-          </a:xfrm>
-          <a:prstGeom prst="rect">
-            <a:avLst/>
-          </a:prstGeom>
-          <a:noFill/>
-        </p:spPr>
-        <p:txBody>
-          <a:bodyPr wrap="none" lIns="0" rIns="0">
-            <a:noAutofit/>
-          </a:bodyPr>
-          <a:lstStyle/>
-          <a:p>
-            <a:pPr algn="l"/>
-            <a:r>
-              <a:rPr sz="3400" b="1" i="0">
-                <a:solidFill>
-                  <a:srgbClr val="5B6B82"/>
-                </a:solidFill>
-                <a:latin typeface="Arial"/>
-              </a:rPr>
-              <a:t>Threats</a:t>
-            </a:r>
-          </a:p>
-        </p:txBody>
-      </p:sp>
-      <p:sp>
-        <p:nvSpPr>
-          <p:cNvPr id="16" name="Rectangle 15"/>
-          <p:cNvSpPr/>
-          <p:nvPr>
-            <p:ph type="body" idx="14"/>
-          </p:nvPr>
-        </p:nvSpPr>
-        <p:spPr>
-          <a:xfrm>
-            <a:off x="6233160" y="4443983"/>
-            <a:ext cx="1650492" cy="54864"/>
-          </a:xfrm>
-          <a:prstGeom prst="rect">
-            <a:avLst/>
-          </a:prstGeom>
-          <a:solidFill>
-            <a:srgbClr val="5B6B82"/>
-          </a:solidFill>
-          <a:ln>
-            <a:noFill/>
-          </a:ln>
-          <a:effectLst/>
-        </p:spPr>
-        <p:txBody>
-          <a:bodyPr rtlCol="0" anchor="ctr"/>
-          <a:lstStyle/>
-          <a:p>
-            <a:pPr algn="ctr"/>
-          </a:p>
-        </p:txBody>
-      </p:sp>
-      <p:sp>
-        <p:nvSpPr>
-          <p:cNvPr id="17" name="TextBox 16"/>
-          <p:cNvSpPr/>
-          <p:nvPr>
-            <p:ph type="body" idx="15"/>
-          </p:nvPr>
-        </p:nvSpPr>
-        <p:spPr>
-          <a:xfrm>
-            <a:off x="6233160" y="4663439"/>
-            <a:ext cx="5501640" cy="1097281"/>
-          </a:xfrm>
-          <a:prstGeom prst="rect">
-            <a:avLst/>
-          </a:prstGeom>
-          <a:noFill/>
-        </p:spPr>
-        <p:txBody>
-          <a:bodyPr wrap="square" lIns="0" rIns="0">
-            <a:noAutofit/>
-          </a:bodyPr>
-          <a:lstStyle/>
-          <a:p>
-            <a:pPr algn="l"/>
-            <a:r>
-              <a:rPr sz="3400" b="0" i="0">
-                <a:solidFill>
-                  <a:srgbClr val="0A2240"/>
-                </a:solidFill>
-                <a:latin typeface="Arial"/>
-              </a:rPr>
-              <a:t>New entrants driving price pressure</a:t>
-            </a:r>
-          </a:p>
-        </p:txBody>
-      </p:sp>
-    </p:spTree>
-    <p:extLst>
-      <p:ext uri="{BB962C8B-B14F-4D97-AF65-F5344CB8AC3E}">
-        <p14:creationId xmlns:p14="http://schemas.microsoft.com/office/powerpoint/2010/main" val="1212999818"/>
-      </p:ext>
-    </p:extLst>
-  </p:cSld>
-  <p:clrMapOvr>
-    <a:masterClrMapping/>
-  </p:clrMapOvr>
-</p:sldLayout>
-</file>
-
-<file path=ppt/slideLayouts/slideLayout41.xml><?xml version="1.0" encoding="utf-8"?>
 <p:sldLayout xmlns:a="http://schemas.openxmlformats.org/drawingml/2006/main" xmlns:r="http://schemas.openxmlformats.org/officeDocument/2006/relationships" xmlns:p="http://schemas.openxmlformats.org/presentationml/2006/main" type="blank" preserve="1">
   <p:cSld name="slidekit · Comparison Matrix">
     <p:bg>
@@ -19639,7 +18910,6 @@
     <p:sldLayoutId id="2147483738" r:id="rId39"/>
     <p:sldLayoutId id="2147483739" r:id="rId40"/>
     <p:sldLayoutId id="2147483740" r:id="rId41"/>
-    <p:sldLayoutId id="2147483741" r:id="rId42"/>
   </p:sldLayoutIdLst>
   <p:txStyles>
     <p:titleStyle>
@@ -20281,7 +19551,7 @@
             <a:fld id="{4B0E1F8A-6C1D-4E2A-9F3B-7A5C8D2E1F60}" type="slidenum">
               <a:rPr sz="1600" b="0" i="0">
                 <a:solidFill>
-                  <a:srgbClr val="5B6B82"/>
+                  <a:srgbClr val="0A2240"/>
                 </a:solidFill>
                 <a:latin typeface="Arial"/>
               </a:rPr>
@@ -20377,7 +19647,7 @@
             <a:r>
               <a:rPr sz="4200" b="1" i="0">
                 <a:solidFill>
-                  <a:srgbClr val="123A6B"/>
+                  <a:srgbClr val="0072CE"/>
                 </a:solidFill>
                 <a:latin typeface="Arial"/>
               </a:rPr>
@@ -20412,7 +19682,7 @@
             <a:r>
               <a:rPr sz="4200" b="1" i="0">
                 <a:solidFill>
-                  <a:srgbClr val="123A6B"/>
+                  <a:srgbClr val="0072CE"/>
                 </a:solidFill>
                 <a:latin typeface="Arial"/>
               </a:rPr>
@@ -20482,7 +19752,7 @@
             <a:r>
               <a:rPr sz="4200" b="1" i="0">
                 <a:solidFill>
-                  <a:srgbClr val="123A6B"/>
+                  <a:srgbClr val="0072CE"/>
                 </a:solidFill>
                 <a:latin typeface="Arial"/>
               </a:rPr>
@@ -20517,7 +19787,7 @@
             <a:r>
               <a:rPr sz="4200" b="1" i="0">
                 <a:solidFill>
-                  <a:srgbClr val="123A6B"/>
+                  <a:srgbClr val="0072CE"/>
                 </a:solidFill>
                 <a:latin typeface="Arial"/>
               </a:rPr>
@@ -20587,7 +19857,7 @@
             <a:r>
               <a:rPr sz="4200" b="1" i="0">
                 <a:solidFill>
-                  <a:srgbClr val="123A6B"/>
+                  <a:srgbClr val="0072CE"/>
                 </a:solidFill>
                 <a:latin typeface="Arial"/>
               </a:rPr>
@@ -20622,7 +19892,7 @@
             <a:r>
               <a:rPr sz="4200" b="1" i="0">
                 <a:solidFill>
-                  <a:srgbClr val="123A6B"/>
+                  <a:srgbClr val="0072CE"/>
                 </a:solidFill>
                 <a:latin typeface="Arial"/>
               </a:rPr>
@@ -20694,7 +19964,7 @@
             <a:fld id="{4B0E1F8A-6C1D-4E2A-9F3B-7A5C8D2E1F60}" type="slidenum">
               <a:rPr sz="1600" b="0" i="0">
                 <a:solidFill>
-                  <a:srgbClr val="5B6B82"/>
+                  <a:srgbClr val="0A2240"/>
                 </a:solidFill>
                 <a:latin typeface="Arial"/>
               </a:rPr>
@@ -20897,7 +20167,7 @@
             <a:fld id="{4B0E1F8A-6C1D-4E2A-9F3B-7A5C8D2E1F60}" type="slidenum">
               <a:rPr sz="1600" b="0" i="0">
                 <a:solidFill>
-                  <a:srgbClr val="5B6B82"/>
+                  <a:srgbClr val="0A2240"/>
                 </a:solidFill>
                 <a:latin typeface="Arial"/>
               </a:rPr>
@@ -20993,7 +20263,7 @@
             <a:r>
               <a:rPr sz="3400" b="1" i="0">
                 <a:solidFill>
-                  <a:srgbClr val="123A6B"/>
+                  <a:srgbClr val="0072CE"/>
                 </a:solidFill>
                 <a:latin typeface="Arial"/>
               </a:rPr>
@@ -21028,7 +20298,7 @@
             <a:r>
               <a:rPr sz="3400" b="1" i="0">
                 <a:solidFill>
-                  <a:srgbClr val="123A6B"/>
+                  <a:srgbClr val="0072CE"/>
                 </a:solidFill>
                 <a:latin typeface="Arial"/>
               </a:rPr>
@@ -21389,7 +20659,7 @@
             <a:fld id="{4B0E1F8A-6C1D-4E2A-9F3B-7A5C8D2E1F60}" type="slidenum">
               <a:rPr sz="1600" b="0" i="0">
                 <a:solidFill>
-                  <a:srgbClr val="5B6B82"/>
+                  <a:srgbClr val="0A2240"/>
                 </a:solidFill>
                 <a:latin typeface="Arial"/>
               </a:rPr>
@@ -21592,7 +20862,7 @@
             <a:fld id="{4B0E1F8A-6C1D-4E2A-9F3B-7A5C8D2E1F60}" type="slidenum">
               <a:rPr sz="1600" b="0" i="0">
                 <a:solidFill>
-                  <a:srgbClr val="5B6B82"/>
+                  <a:srgbClr val="0A2240"/>
                 </a:solidFill>
                 <a:latin typeface="Arial"/>
               </a:rPr>
@@ -21688,7 +20958,7 @@
             <a:r>
               <a:rPr sz="3400" b="1" i="0">
                 <a:solidFill>
-                  <a:srgbClr val="123A6B"/>
+                  <a:srgbClr val="0072CE"/>
                 </a:solidFill>
                 <a:latin typeface="Arial"/>
               </a:rPr>
@@ -21723,7 +20993,7 @@
             <a:r>
               <a:rPr sz="3400" b="1" i="0">
                 <a:solidFill>
-                  <a:srgbClr val="123A6B"/>
+                  <a:srgbClr val="0072CE"/>
                 </a:solidFill>
                 <a:latin typeface="Arial"/>
               </a:rPr>
@@ -21970,7 +21240,7 @@
             <a:fld id="{4B0E1F8A-6C1D-4E2A-9F3B-7A5C8D2E1F60}" type="slidenum">
               <a:rPr sz="1600" b="0" i="0">
                 <a:solidFill>
-                  <a:srgbClr val="5B6B82"/>
+                  <a:srgbClr val="0A2240"/>
                 </a:solidFill>
                 <a:latin typeface="Arial"/>
               </a:rPr>
@@ -22020,7 +21290,7 @@
             <a:avLst/>
           </a:prstGeom>
           <a:solidFill>
-            <a:srgbClr val="FF5F56"/>
+            <a:srgbClr val="FFFFFF"/>
           </a:solidFill>
           <a:ln>
             <a:noFill/>
@@ -22064,7 +21334,7 @@
             <a:avLst/>
           </a:prstGeom>
           <a:solidFill>
-            <a:srgbClr val="FFBD2E"/>
+            <a:srgbClr val="FFFFFF"/>
           </a:solidFill>
           <a:ln>
             <a:noFill/>
@@ -22108,7 +21378,7 @@
             <a:avLst/>
           </a:prstGeom>
           <a:solidFill>
-            <a:srgbClr val="27C93F"/>
+            <a:srgbClr val="FFFFFF"/>
           </a:solidFill>
           <a:ln>
             <a:noFill/>
@@ -22163,7 +21433,7 @@
             <a:r>
               <a:rPr sz="4200" b="0" i="0">
                 <a:solidFill>
-                  <a:srgbClr val="D4D4D4"/>
+                  <a:srgbClr val="FFFFFF"/>
                 </a:solidFill>
                 <a:latin typeface="Arial"/>
               </a:rPr>
@@ -22198,7 +21468,7 @@
             <a:r>
               <a:rPr sz="3400" b="0" i="0">
                 <a:solidFill>
-                  <a:srgbClr val="D4D4D4"/>
+                  <a:srgbClr val="FFFFFF"/>
                 </a:solidFill>
                 <a:latin typeface="Arial"/>
               </a:rPr>
@@ -22233,7 +21503,7 @@
             <a:r>
               <a:rPr sz="3400" b="0" i="0">
                 <a:solidFill>
-                  <a:srgbClr val="CE9178"/>
+                  <a:srgbClr val="FFFFFF"/>
                 </a:solidFill>
                 <a:latin typeface="Arial"/>
               </a:rPr>
@@ -22268,7 +21538,7 @@
             <a:r>
               <a:rPr sz="3400" b="0" i="0">
                 <a:solidFill>
-                  <a:srgbClr val="D4D4D4"/>
+                  <a:srgbClr val="FFFFFF"/>
                 </a:solidFill>
                 <a:latin typeface="Arial"/>
               </a:rPr>
@@ -22338,7 +21608,7 @@
             <a:r>
               <a:rPr sz="3400" b="0" i="0">
                 <a:solidFill>
-                  <a:srgbClr val="D4D4D4"/>
+                  <a:srgbClr val="FFFFFF"/>
                 </a:solidFill>
                 <a:latin typeface="Arial"/>
               </a:rPr>
@@ -22373,7 +21643,7 @@
             <a:r>
               <a:rPr sz="3400" b="0" i="0">
                 <a:solidFill>
-                  <a:srgbClr val="D4D4D4"/>
+                  <a:srgbClr val="FFFFFF"/>
                 </a:solidFill>
                 <a:latin typeface="Arial"/>
               </a:rPr>
@@ -22408,7 +21678,7 @@
             <a:r>
               <a:rPr sz="3400" b="0" i="0">
                 <a:solidFill>
-                  <a:srgbClr val="C586C0"/>
+                  <a:srgbClr val="569CD6"/>
                 </a:solidFill>
                 <a:latin typeface="Arial"/>
               </a:rPr>
@@ -22443,7 +21713,7 @@
             <a:r>
               <a:rPr sz="3400" b="0" i="0">
                 <a:solidFill>
-                  <a:srgbClr val="D4D4D4"/>
+                  <a:srgbClr val="FFFFFF"/>
                 </a:solidFill>
                 <a:latin typeface="Arial"/>
               </a:rPr>
@@ -22478,7 +21748,7 @@
             <a:r>
               <a:rPr sz="3400" b="0" i="0">
                 <a:solidFill>
-                  <a:srgbClr val="D4D4D4"/>
+                  <a:srgbClr val="FFFFFF"/>
                 </a:solidFill>
                 <a:latin typeface="Arial"/>
               </a:rPr>
@@ -22548,7 +21818,7 @@
             <a:r>
               <a:rPr sz="3400" b="0" i="0">
                 <a:solidFill>
-                  <a:srgbClr val="D4D4D4"/>
+                  <a:srgbClr val="FFFFFF"/>
                 </a:solidFill>
                 <a:latin typeface="Arial"/>
               </a:rPr>
@@ -22583,7 +21853,7 @@
             <a:r>
               <a:rPr sz="3400" b="0" i="0">
                 <a:solidFill>
-                  <a:srgbClr val="D4D4D4"/>
+                  <a:srgbClr val="FFFFFF"/>
                 </a:solidFill>
                 <a:latin typeface="Arial"/>
               </a:rPr>
@@ -22601,7 +21871,7 @@
         <p:spPr>
           <a:xfrm>
             <a:off x="457200" y="5465057"/>
-            <a:ext cx="567115" cy="518159"/>
+            <a:ext cx="7248545" cy="518159"/>
           </a:xfrm>
           <a:prstGeom prst="rect">
             <a:avLst/>
@@ -22618,11 +21888,11 @@
             <a:r>
               <a:rPr sz="3400" b="0" i="0">
                 <a:solidFill>
-                  <a:srgbClr val="B5CEA8"/>
-                </a:solidFill>
-                <a:latin typeface="Arial"/>
-              </a:rPr>
-              <a:t>5</a:t>
+                  <a:srgbClr val="FFFFFF"/>
+                </a:solidFill>
+                <a:latin typeface="Arial"/>
+              </a:rPr>
+              <a:t>5-9 steps. No tools yet.</a:t>
             </a:r>
           </a:p>
         </p:txBody>
@@ -22630,111 +21900,6 @@
       <p:sp>
         <p:nvSpPr>
           <p:cNvPr id="19" name="TextBox 18"/>
-          <p:cNvSpPr txBox="1"/>
-          <p:nvPr/>
-        </p:nvSpPr>
-        <p:spPr>
-          <a:xfrm>
-            <a:off x="697347" y="5465057"/>
-            <a:ext cx="412948" cy="518159"/>
-          </a:xfrm>
-          <a:prstGeom prst="rect">
-            <a:avLst/>
-          </a:prstGeom>
-          <a:noFill/>
-        </p:spPr>
-        <p:txBody>
-          <a:bodyPr wrap="none" lIns="0" rIns="0">
-            <a:noAutofit/>
-          </a:bodyPr>
-          <a:lstStyle/>
-          <a:p>
-            <a:pPr algn="l"/>
-            <a:r>
-              <a:rPr sz="3400" b="0" i="0">
-                <a:solidFill>
-                  <a:srgbClr val="D4D4D4"/>
-                </a:solidFill>
-                <a:latin typeface="Arial"/>
-              </a:rPr>
-              <a:t>-</a:t>
-            </a:r>
-          </a:p>
-        </p:txBody>
-      </p:sp>
-      <p:sp>
-        <p:nvSpPr>
-          <p:cNvPr id="20" name="TextBox 19"/>
-          <p:cNvSpPr txBox="1"/>
-          <p:nvPr/>
-        </p:nvSpPr>
-        <p:spPr>
-          <a:xfrm>
-            <a:off x="841139" y="5465057"/>
-            <a:ext cx="567115" cy="518159"/>
-          </a:xfrm>
-          <a:prstGeom prst="rect">
-            <a:avLst/>
-          </a:prstGeom>
-          <a:noFill/>
-        </p:spPr>
-        <p:txBody>
-          <a:bodyPr wrap="none" lIns="0" rIns="0">
-            <a:noAutofit/>
-          </a:bodyPr>
-          <a:lstStyle/>
-          <a:p>
-            <a:pPr algn="l"/>
-            <a:r>
-              <a:rPr sz="3400" b="0" i="0">
-                <a:solidFill>
-                  <a:srgbClr val="B5CEA8"/>
-                </a:solidFill>
-                <a:latin typeface="Arial"/>
-              </a:rPr>
-              <a:t>9</a:t>
-            </a:r>
-          </a:p>
-        </p:txBody>
-      </p:sp>
-      <p:sp>
-        <p:nvSpPr>
-          <p:cNvPr id="21" name="TextBox 20"/>
-          <p:cNvSpPr txBox="1"/>
-          <p:nvPr/>
-        </p:nvSpPr>
-        <p:spPr>
-          <a:xfrm>
-            <a:off x="1081286" y="5465057"/>
-            <a:ext cx="6250008" cy="518159"/>
-          </a:xfrm>
-          <a:prstGeom prst="rect">
-            <a:avLst/>
-          </a:prstGeom>
-          <a:noFill/>
-        </p:spPr>
-        <p:txBody>
-          <a:bodyPr wrap="none" lIns="0" rIns="0">
-            <a:noAutofit/>
-          </a:bodyPr>
-          <a:lstStyle/>
-          <a:p>
-            <a:pPr algn="l"/>
-            <a:r>
-              <a:rPr sz="3400" b="0" i="0">
-                <a:solidFill>
-                  <a:srgbClr val="D4D4D4"/>
-                </a:solidFill>
-                <a:latin typeface="Arial"/>
-              </a:rPr>
-              <a:t> steps. No tools yet.</a:t>
-            </a:r>
-          </a:p>
-        </p:txBody>
-      </p:sp>
-      <p:sp>
-        <p:nvSpPr>
-          <p:cNvPr id="22" name="TextBox 21"/>
           <p:cNvSpPr/>
           <p:nvPr>
             <p:ph type="sldNum" idx="12"/>
@@ -22760,7 +21925,7 @@
             <a:fld id="{4B0E1F8A-6C1D-4E2A-9F3B-7A5C8D2E1F60}" type="slidenum">
               <a:rPr sz="1600" b="0" i="0">
                 <a:solidFill>
-                  <a:srgbClr val="5B6B82"/>
+                  <a:srgbClr val="0A2240"/>
                 </a:solidFill>
                 <a:latin typeface="Arial"/>
               </a:rPr>
@@ -22856,7 +22021,7 @@
             <a:r>
               <a:rPr sz="4200" b="1" i="0">
                 <a:solidFill>
-                  <a:srgbClr val="123A6B"/>
+                  <a:srgbClr val="0072CE"/>
                 </a:solidFill>
                 <a:latin typeface="Arial"/>
               </a:rPr>
@@ -22874,13 +22039,13 @@
         <p:spPr>
           <a:xfrm>
             <a:off x="457200" y="2194560"/>
-            <a:ext cx="784098" cy="54864"/>
+            <a:ext cx="593303" cy="54864"/>
           </a:xfrm>
           <a:prstGeom prst="rect">
             <a:avLst/>
           </a:prstGeom>
           <a:solidFill>
-            <a:srgbClr val="123A6B"/>
+            <a:srgbClr val="0072CE"/>
           </a:solidFill>
           <a:ln>
             <a:noFill/>
@@ -22935,7 +22100,7 @@
             <a:r>
               <a:rPr sz="3400" b="1" i="0">
                 <a:solidFill>
-                  <a:srgbClr val="123A6B"/>
+                  <a:srgbClr val="0072CE"/>
                 </a:solidFill>
                 <a:latin typeface="Arial"/>
               </a:rPr>
@@ -23005,7 +22170,7 @@
             <a:r>
               <a:rPr sz="4200" b="1" i="0">
                 <a:solidFill>
-                  <a:srgbClr val="123A6B"/>
+                  <a:srgbClr val="0072CE"/>
                 </a:solidFill>
                 <a:latin typeface="Arial"/>
               </a:rPr>
@@ -23023,13 +22188,13 @@
         <p:spPr>
           <a:xfrm>
             <a:off x="3345180" y="2194560"/>
-            <a:ext cx="784098" cy="54864"/>
+            <a:ext cx="593303" cy="54864"/>
           </a:xfrm>
           <a:prstGeom prst="rect">
             <a:avLst/>
           </a:prstGeom>
           <a:solidFill>
-            <a:srgbClr val="123A6B"/>
+            <a:srgbClr val="0072CE"/>
           </a:solidFill>
           <a:ln>
             <a:noFill/>
@@ -23084,7 +22249,7 @@
             <a:r>
               <a:rPr sz="3400" b="1" i="0">
                 <a:solidFill>
-                  <a:srgbClr val="123A6B"/>
+                  <a:srgbClr val="0072CE"/>
                 </a:solidFill>
                 <a:latin typeface="Arial"/>
               </a:rPr>
@@ -23154,7 +22319,7 @@
             <a:r>
               <a:rPr sz="4200" b="1" i="0">
                 <a:solidFill>
-                  <a:srgbClr val="123A6B"/>
+                  <a:srgbClr val="0072CE"/>
                 </a:solidFill>
                 <a:latin typeface="Arial"/>
               </a:rPr>
@@ -23172,13 +22337,13 @@
         <p:spPr>
           <a:xfrm>
             <a:off x="6233160" y="2194560"/>
-            <a:ext cx="784098" cy="54864"/>
+            <a:ext cx="593303" cy="54864"/>
           </a:xfrm>
           <a:prstGeom prst="rect">
             <a:avLst/>
           </a:prstGeom>
           <a:solidFill>
-            <a:srgbClr val="123A6B"/>
+            <a:srgbClr val="0072CE"/>
           </a:solidFill>
           <a:ln>
             <a:noFill/>
@@ -23233,7 +22398,7 @@
             <a:r>
               <a:rPr sz="3400" b="1" i="0">
                 <a:solidFill>
-                  <a:srgbClr val="123A6B"/>
+                  <a:srgbClr val="0072CE"/>
                 </a:solidFill>
                 <a:latin typeface="Arial"/>
               </a:rPr>
@@ -23303,7 +22468,7 @@
             <a:r>
               <a:rPr sz="4200" b="1" i="0">
                 <a:solidFill>
-                  <a:srgbClr val="123A6B"/>
+                  <a:srgbClr val="0072CE"/>
                 </a:solidFill>
                 <a:latin typeface="Arial"/>
               </a:rPr>
@@ -23321,13 +22486,13 @@
         <p:spPr>
           <a:xfrm>
             <a:off x="9121140" y="2194560"/>
-            <a:ext cx="784098" cy="54864"/>
+            <a:ext cx="593303" cy="54864"/>
           </a:xfrm>
           <a:prstGeom prst="rect">
             <a:avLst/>
           </a:prstGeom>
           <a:solidFill>
-            <a:srgbClr val="123A6B"/>
+            <a:srgbClr val="0072CE"/>
           </a:solidFill>
           <a:ln>
             <a:noFill/>
@@ -23382,7 +22547,7 @@
             <a:r>
               <a:rPr sz="3400" b="1" i="0">
                 <a:solidFill>
-                  <a:srgbClr val="123A6B"/>
+                  <a:srgbClr val="0072CE"/>
                 </a:solidFill>
                 <a:latin typeface="Arial"/>
               </a:rPr>
@@ -23454,7 +22619,7 @@
             <a:fld id="{4B0E1F8A-6C1D-4E2A-9F3B-7A5C8D2E1F60}" type="slidenum">
               <a:rPr sz="1600" b="0" i="0">
                 <a:solidFill>
-                  <a:srgbClr val="5B6B82"/>
+                  <a:srgbClr val="0A2240"/>
                 </a:solidFill>
                 <a:latin typeface="Arial"/>
               </a:rPr>
@@ -23692,7 +22857,7 @@
             <a:fld id="{4B0E1F8A-6C1D-4E2A-9F3B-7A5C8D2E1F60}" type="slidenum">
               <a:rPr sz="1600" b="0" i="0">
                 <a:solidFill>
-                  <a:srgbClr val="5B6B82"/>
+                  <a:srgbClr val="0A2240"/>
                 </a:solidFill>
                 <a:latin typeface="Arial"/>
               </a:rPr>
@@ -23805,8 +22970,8 @@
         </p:nvSpPr>
         <p:spPr>
           <a:xfrm>
-            <a:off x="548640" y="2176271"/>
-            <a:ext cx="1650492" cy="54864"/>
+            <a:off x="457200" y="2176271"/>
+            <a:ext cx="1295822" cy="54864"/>
           </a:xfrm>
           <a:prstGeom prst="rect">
             <a:avLst/>
@@ -23867,7 +23032,7 @@
             <a:r>
               <a:rPr sz="3400" b="1" i="0">
                 <a:solidFill>
-                  <a:srgbClr val="5B6B82"/>
+                  <a:srgbClr val="0A2240"/>
                 </a:solidFill>
                 <a:latin typeface="Arial"/>
               </a:rPr>
@@ -23884,14 +23049,14 @@
         </p:nvSpPr>
         <p:spPr>
           <a:xfrm>
-            <a:off x="6324600" y="2176271"/>
-            <a:ext cx="1650492" cy="54864"/>
+            <a:off x="6233160" y="2176271"/>
+            <a:ext cx="2135175" cy="54864"/>
           </a:xfrm>
           <a:prstGeom prst="rect">
             <a:avLst/>
           </a:prstGeom>
           <a:solidFill>
-            <a:srgbClr val="5B6B82"/>
+            <a:srgbClr val="0A2240"/>
           </a:solidFill>
           <a:ln>
             <a:noFill/>
@@ -24158,7 +23323,7 @@
             <a:fld id="{4B0E1F8A-6C1D-4E2A-9F3B-7A5C8D2E1F60}" type="slidenum">
               <a:rPr sz="1600" b="0" i="0">
                 <a:solidFill>
-                  <a:srgbClr val="5B6B82"/>
+                  <a:srgbClr val="0A2240"/>
                 </a:solidFill>
                 <a:latin typeface="Arial"/>
               </a:rPr>
@@ -24333,7 +23498,7 @@
             <a:r>
               <a:rPr sz="3400" b="0" i="0">
                 <a:solidFill>
-                  <a:srgbClr val="5B6B82"/>
+                  <a:srgbClr val="0A2240"/>
                 </a:solidFill>
                 <a:latin typeface="Arial"/>
               </a:rPr>
@@ -24370,7 +23535,7 @@
             <a:fld id="{4B0E1F8A-6C1D-4E2A-9F3B-7A5C8D2E1F60}" type="slidenum">
               <a:rPr sz="1600" b="0" i="0">
                 <a:solidFill>
-                  <a:srgbClr val="5B6B82"/>
+                  <a:srgbClr val="0A2240"/>
                 </a:solidFill>
                 <a:latin typeface="Arial"/>
               </a:rPr>
@@ -24547,7 +23712,7 @@
             <a:fld id="{4B0E1F8A-6C1D-4E2A-9F3B-7A5C8D2E1F60}" type="slidenum">
               <a:rPr sz="1600" b="0" i="0">
                 <a:solidFill>
-                  <a:srgbClr val="5B6B82"/>
+                  <a:srgbClr val="0A2240"/>
                 </a:solidFill>
                 <a:latin typeface="Arial"/>
               </a:rPr>
@@ -24750,7 +23915,7 @@
             <a:fld id="{4B0E1F8A-6C1D-4E2A-9F3B-7A5C8D2E1F60}" type="slidenum">
               <a:rPr sz="1600" b="0" i="0">
                 <a:solidFill>
-                  <a:srgbClr val="5B6B82"/>
+                  <a:srgbClr val="0A2240"/>
                 </a:solidFill>
                 <a:latin typeface="Arial"/>
               </a:rPr>
@@ -24890,7 +24055,7 @@
             <a:r>
               <a:rPr sz="3400" b="0" i="0">
                 <a:solidFill>
-                  <a:srgbClr val="5B6B82"/>
+                  <a:srgbClr val="0A2240"/>
                 </a:solidFill>
                 <a:latin typeface="Arial"/>
               </a:rPr>
@@ -24927,7 +24092,7 @@
             <a:fld id="{4B0E1F8A-6C1D-4E2A-9F3B-7A5C8D2E1F60}" type="slidenum">
               <a:rPr sz="1600" b="0" i="0">
                 <a:solidFill>
-                  <a:srgbClr val="5B6B82"/>
+                  <a:srgbClr val="0A2240"/>
                 </a:solidFill>
                 <a:latin typeface="Arial"/>
               </a:rPr>
@@ -25104,7 +24269,7 @@
             <a:fld id="{4B0E1F8A-6C1D-4E2A-9F3B-7A5C8D2E1F60}" type="slidenum">
               <a:rPr sz="1600" b="0" i="0">
                 <a:solidFill>
-                  <a:srgbClr val="5B6B82"/>
+                  <a:srgbClr val="0A2240"/>
                 </a:solidFill>
                 <a:latin typeface="Arial"/>
               </a:rPr>
@@ -25281,7 +24446,7 @@
             <a:fld id="{4B0E1F8A-6C1D-4E2A-9F3B-7A5C8D2E1F60}" type="slidenum">
               <a:rPr sz="1600" b="0" i="0">
                 <a:solidFill>
-                  <a:srgbClr val="5B6B82"/>
+                  <a:srgbClr val="0A2240"/>
                 </a:solidFill>
                 <a:latin typeface="Arial"/>
               </a:rPr>
@@ -25377,7 +24542,7 @@
             <a:r>
               <a:rPr sz="3400" b="1" i="0">
                 <a:solidFill>
-                  <a:srgbClr val="5B6B82"/>
+                  <a:srgbClr val="0A2240"/>
                 </a:solidFill>
                 <a:latin typeface="Arial"/>
               </a:rPr>
@@ -25394,14 +24559,14 @@
         </p:nvSpPr>
         <p:spPr>
           <a:xfrm>
-            <a:off x="548640" y="2176271"/>
-            <a:ext cx="1650492" cy="54864"/>
+            <a:off x="457200" y="2176271"/>
+            <a:ext cx="2087947" cy="54864"/>
           </a:xfrm>
           <a:prstGeom prst="rect">
             <a:avLst/>
           </a:prstGeom>
           <a:solidFill>
-            <a:srgbClr val="5B6B82"/>
+            <a:srgbClr val="0A2240"/>
           </a:solidFill>
           <a:ln>
             <a:noFill/>
@@ -25473,8 +24638,8 @@
         </p:nvSpPr>
         <p:spPr>
           <a:xfrm>
-            <a:off x="6324600" y="2176271"/>
-            <a:ext cx="1650492" cy="54864"/>
+            <a:off x="6233160" y="2176271"/>
+            <a:ext cx="1319647" cy="54864"/>
           </a:xfrm>
           <a:prstGeom prst="rect">
             <a:avLst/>
@@ -25747,7 +24912,7 @@
             <a:fld id="{4B0E1F8A-6C1D-4E2A-9F3B-7A5C8D2E1F60}" type="slidenum">
               <a:rPr sz="1600" b="0" i="0">
                 <a:solidFill>
-                  <a:srgbClr val="5B6B82"/>
+                  <a:srgbClr val="0A2240"/>
                 </a:solidFill>
                 <a:latin typeface="Arial"/>
               </a:rPr>
@@ -26055,7 +25220,7 @@
             <a:fld id="{4B0E1F8A-6C1D-4E2A-9F3B-7A5C8D2E1F60}" type="slidenum">
               <a:rPr sz="1600" b="0" i="0">
                 <a:solidFill>
-                  <a:srgbClr val="5B6B82"/>
+                  <a:srgbClr val="0A2240"/>
                 </a:solidFill>
                 <a:latin typeface="Arial"/>
               </a:rPr>
@@ -26151,7 +25316,7 @@
             <a:r>
               <a:rPr sz="4200" b="1" i="0">
                 <a:solidFill>
-                  <a:srgbClr val="123A6B"/>
+                  <a:srgbClr val="0072CE"/>
                 </a:solidFill>
                 <a:latin typeface="Arial"/>
               </a:rPr>
@@ -26186,7 +25351,7 @@
             <a:r>
               <a:rPr sz="4200" b="1" i="0">
                 <a:solidFill>
-                  <a:srgbClr val="123A6B"/>
+                  <a:srgbClr val="0072CE"/>
                 </a:solidFill>
                 <a:latin typeface="Arial"/>
               </a:rPr>
@@ -26256,7 +25421,7 @@
             <a:r>
               <a:rPr sz="4200" b="1" i="0">
                 <a:solidFill>
-                  <a:srgbClr val="123A6B"/>
+                  <a:srgbClr val="0072CE"/>
                 </a:solidFill>
                 <a:latin typeface="Arial"/>
               </a:rPr>
@@ -26291,7 +25456,7 @@
             <a:r>
               <a:rPr sz="4200" b="1" i="0">
                 <a:solidFill>
-                  <a:srgbClr val="123A6B"/>
+                  <a:srgbClr val="0072CE"/>
                 </a:solidFill>
                 <a:latin typeface="Arial"/>
               </a:rPr>
@@ -26361,7 +25526,7 @@
             <a:r>
               <a:rPr sz="4200" b="1" i="0">
                 <a:solidFill>
-                  <a:srgbClr val="123A6B"/>
+                  <a:srgbClr val="0072CE"/>
                 </a:solidFill>
                 <a:latin typeface="Arial"/>
               </a:rPr>
@@ -26396,7 +25561,7 @@
             <a:r>
               <a:rPr sz="4200" b="1" i="0">
                 <a:solidFill>
-                  <a:srgbClr val="123A6B"/>
+                  <a:srgbClr val="0072CE"/>
                 </a:solidFill>
                 <a:latin typeface="Arial"/>
               </a:rPr>
@@ -26468,7 +25633,7 @@
             <a:fld id="{4B0E1F8A-6C1D-4E2A-9F3B-7A5C8D2E1F60}" type="slidenum">
               <a:rPr sz="1600" b="0" i="0">
                 <a:solidFill>
-                  <a:srgbClr val="5B6B82"/>
+                  <a:srgbClr val="0A2240"/>
                 </a:solidFill>
                 <a:latin typeface="Arial"/>
               </a:rPr>
@@ -26518,7 +25683,7 @@
             <a:avLst/>
           </a:prstGeom>
           <a:solidFill>
-            <a:srgbClr val="FF5F56"/>
+            <a:srgbClr val="FFFFFF"/>
           </a:solidFill>
           <a:ln>
             <a:noFill/>
@@ -26562,7 +25727,7 @@
             <a:avLst/>
           </a:prstGeom>
           <a:solidFill>
-            <a:srgbClr val="FFBD2E"/>
+            <a:srgbClr val="FFFFFF"/>
           </a:solidFill>
           <a:ln>
             <a:noFill/>
@@ -26606,7 +25771,7 @@
             <a:avLst/>
           </a:prstGeom>
           <a:solidFill>
-            <a:srgbClr val="27C93F"/>
+            <a:srgbClr val="FFFFFF"/>
           </a:solidFill>
           <a:ln>
             <a:noFill/>
@@ -26661,7 +25826,7 @@
             <a:r>
               <a:rPr sz="4200" b="0" i="0">
                 <a:solidFill>
-                  <a:srgbClr val="D4D4D4"/>
+                  <a:srgbClr val="FFFFFF"/>
                 </a:solidFill>
                 <a:latin typeface="Arial"/>
               </a:rPr>
@@ -26696,7 +25861,7 @@
             <a:r>
               <a:rPr sz="3400" b="0" i="0">
                 <a:solidFill>
-                  <a:srgbClr val="D4D4D4"/>
+                  <a:srgbClr val="FFFFFF"/>
                 </a:solidFill>
                 <a:latin typeface="Arial"/>
               </a:rPr>
@@ -26731,7 +25896,7 @@
             <a:r>
               <a:rPr sz="3400" b="0" i="0">
                 <a:solidFill>
-                  <a:srgbClr val="D4D4D4"/>
+                  <a:srgbClr val="FFFFFF"/>
                 </a:solidFill>
                 <a:latin typeface="Arial"/>
               </a:rPr>
@@ -26766,7 +25931,7 @@
             <a:r>
               <a:rPr sz="3400" b="0" i="0">
                 <a:solidFill>
-                  <a:srgbClr val="D4D4D4"/>
+                  <a:srgbClr val="FFFFFF"/>
                 </a:solidFill>
                 <a:latin typeface="Arial"/>
               </a:rPr>
@@ -26801,7 +25966,7 @@
             <a:r>
               <a:rPr sz="3400" b="0" i="0">
                 <a:solidFill>
-                  <a:srgbClr val="D4D4D4"/>
+                  <a:srgbClr val="FFFFFF"/>
                 </a:solidFill>
                 <a:latin typeface="Arial"/>
               </a:rPr>
@@ -26836,7 +26001,7 @@
             <a:r>
               <a:rPr sz="3400" b="0" i="0">
                 <a:solidFill>
-                  <a:srgbClr val="D4D4D4"/>
+                  <a:srgbClr val="FFFFFF"/>
                 </a:solidFill>
                 <a:latin typeface="Arial"/>
               </a:rPr>
@@ -26871,7 +26036,7 @@
             <a:r>
               <a:rPr sz="3400" b="0" i="0">
                 <a:solidFill>
-                  <a:srgbClr val="D4D4D4"/>
+                  <a:srgbClr val="FFFFFF"/>
                 </a:solidFill>
                 <a:latin typeface="Arial"/>
               </a:rPr>
@@ -26906,7 +26071,7 @@
             <a:r>
               <a:rPr sz="3400" b="0" i="0">
                 <a:solidFill>
-                  <a:srgbClr val="C586C0"/>
+                  <a:srgbClr val="569CD6"/>
                 </a:solidFill>
                 <a:latin typeface="Arial"/>
               </a:rPr>
@@ -26941,7 +26106,7 @@
             <a:r>
               <a:rPr sz="3400" b="0" i="0">
                 <a:solidFill>
-                  <a:srgbClr val="D4D4D4"/>
+                  <a:srgbClr val="FFFFFF"/>
                 </a:solidFill>
                 <a:latin typeface="Arial"/>
               </a:rPr>
@@ -26976,7 +26141,7 @@
             <a:r>
               <a:rPr sz="3400" b="0" i="0">
                 <a:solidFill>
-                  <a:srgbClr val="D4D4D4"/>
+                  <a:srgbClr val="FFFFFF"/>
                 </a:solidFill>
                 <a:latin typeface="Arial"/>
               </a:rPr>
@@ -27013,7 +26178,7 @@
             <a:fld id="{4B0E1F8A-6C1D-4E2A-9F3B-7A5C8D2E1F60}" type="slidenum">
               <a:rPr sz="1600" b="0" i="0">
                 <a:solidFill>
-                  <a:srgbClr val="5B6B82"/>
+                  <a:srgbClr val="0A2240"/>
                 </a:solidFill>
                 <a:latin typeface="Arial"/>
               </a:rPr>
@@ -27251,7 +26416,7 @@
             <a:fld id="{4B0E1F8A-6C1D-4E2A-9F3B-7A5C8D2E1F60}" type="slidenum">
               <a:rPr sz="1600" b="0" i="0">
                 <a:solidFill>
-                  <a:srgbClr val="5B6B82"/>
+                  <a:srgbClr val="0A2240"/>
                 </a:solidFill>
                 <a:latin typeface="Arial"/>
               </a:rPr>
@@ -27673,7 +26838,7 @@
             <a:fld id="{4B0E1F8A-6C1D-4E2A-9F3B-7A5C8D2E1F60}" type="slidenum">
               <a:rPr sz="1600" b="0" i="0">
                 <a:solidFill>
-                  <a:srgbClr val="5B6B82"/>
+                  <a:srgbClr val="0A2240"/>
                 </a:solidFill>
                 <a:latin typeface="Arial"/>
               </a:rPr>
@@ -27876,7 +27041,7 @@
             <a:fld id="{4B0E1F8A-6C1D-4E2A-9F3B-7A5C8D2E1F60}" type="slidenum">
               <a:rPr sz="1600" b="0" i="0">
                 <a:solidFill>
-                  <a:srgbClr val="5B6B82"/>
+                  <a:srgbClr val="0A2240"/>
                 </a:solidFill>
                 <a:latin typeface="Arial"/>
               </a:rPr>
@@ -28079,7 +27244,7 @@
             <a:fld id="{4B0E1F8A-6C1D-4E2A-9F3B-7A5C8D2E1F60}" type="slidenum">
               <a:rPr sz="1600" b="0" i="0">
                 <a:solidFill>
-                  <a:srgbClr val="5B6B82"/>
+                  <a:srgbClr val="0A2240"/>
                 </a:solidFill>
                 <a:latin typeface="Arial"/>
               </a:rPr>
@@ -28282,7 +27447,7 @@
             <a:fld id="{4B0E1F8A-6C1D-4E2A-9F3B-7A5C8D2E1F60}" type="slidenum">
               <a:rPr sz="1600" b="0" i="0">
                 <a:solidFill>
-                  <a:srgbClr val="5B6B82"/>
+                  <a:srgbClr val="0A2240"/>
                 </a:solidFill>
                 <a:latin typeface="Arial"/>
               </a:rPr>
@@ -28518,7 +27683,7 @@
             <a:r>
               <a:rPr sz="4200" b="1" i="0">
                 <a:solidFill>
-                  <a:srgbClr val="5B6B82"/>
+                  <a:srgbClr val="0A2240"/>
                 </a:solidFill>
                 <a:latin typeface="Arial"/>
               </a:rPr>
@@ -28555,7 +27720,7 @@
             <a:fld id="{4B0E1F8A-6C1D-4E2A-9F3B-7A5C8D2E1F60}" type="slidenum">
               <a:rPr sz="1600" b="0" i="0">
                 <a:solidFill>
-                  <a:srgbClr val="5B6B82"/>
+                  <a:srgbClr val="0A2240"/>
                 </a:solidFill>
                 <a:latin typeface="Arial"/>
               </a:rPr>
@@ -28732,7 +27897,7 @@
             <a:fld id="{4B0E1F8A-6C1D-4E2A-9F3B-7A5C8D2E1F60}" type="slidenum">
               <a:rPr sz="1600" b="0" i="0">
                 <a:solidFill>
-                  <a:srgbClr val="5B6B82"/>
+                  <a:srgbClr val="0A2240"/>
                 </a:solidFill>
                 <a:latin typeface="Arial"/>
               </a:rPr>
@@ -28811,7 +27976,7 @@
         <p:spPr>
           <a:xfrm>
             <a:off x="457200" y="1499616"/>
-            <a:ext cx="2613660" cy="518159"/>
+            <a:ext cx="1872297" cy="518159"/>
           </a:xfrm>
           <a:prstGeom prst="rect">
             <a:avLst/>
@@ -28828,11 +27993,11 @@
             <a:r>
               <a:rPr sz="3400" b="1" i="0">
                 <a:solidFill>
-                  <a:srgbClr val="0A2240"/>
-                </a:solidFill>
-                <a:latin typeface="Arial"/>
-              </a:rPr>
-              <a:t>Data</a:t>
+                  <a:srgbClr val="0072CE"/>
+                </a:solidFill>
+                <a:latin typeface="Arial"/>
+              </a:rPr>
+              <a:t>Need</a:t>
             </a:r>
           </a:p>
         </p:txBody>
@@ -28845,65 +28010,74 @@
         </p:nvSpPr>
         <p:spPr>
           <a:xfrm>
-            <a:off x="457200" y="2154935"/>
-            <a:ext cx="2613660" cy="3605785"/>
-          </a:xfrm>
-          <a:prstGeom prst="rect">
-            <a:avLst/>
-          </a:prstGeom>
-          <a:noFill/>
-        </p:spPr>
-        <p:txBody>
-          <a:bodyPr wrap="square" lIns="0" rIns="0">
-            <a:noAutofit/>
-          </a:bodyPr>
-          <a:lstStyle/>
-          <a:p>
-            <a:pPr algn="l"/>
-            <a:r>
-              <a:rPr sz="3400" b="0" i="0">
-                <a:solidFill>
-                  <a:srgbClr val="0A2240"/>
-                </a:solidFill>
-                <a:latin typeface="Arial"/>
-              </a:rPr>
-              <a:t>Something must be supplied</a:t>
-            </a:r>
-          </a:p>
-        </p:txBody>
-      </p:sp>
-      <p:sp>
-        <p:nvSpPr>
-          <p:cNvPr id="5" name="TextBox 4"/>
-          <p:cNvSpPr txBox="1"/>
+            <a:off x="2859918" y="1499616"/>
+            <a:ext cx="5814494" cy="518159"/>
+          </a:xfrm>
+          <a:prstGeom prst="rect">
+            <a:avLst/>
+          </a:prstGeom>
+          <a:noFill/>
+        </p:spPr>
+        <p:txBody>
+          <a:bodyPr wrap="none" lIns="0" rIns="0">
+            <a:noAutofit/>
+          </a:bodyPr>
+          <a:lstStyle/>
+          <a:p>
+            <a:pPr algn="l"/>
+            <a:r>
+              <a:rPr sz="3400" b="1" i="0">
+                <a:solidFill>
+                  <a:srgbClr val="0072CE"/>
+                </a:solidFill>
+                <a:latin typeface="Arial"/>
+              </a:rPr>
+              <a:t>What it means</a:t>
+            </a:r>
+          </a:p>
+        </p:txBody>
+      </p:sp>
+      <p:sp>
+        <p:nvSpPr>
+          <p:cNvPr id="5" name="Rectangle 4"/>
+          <p:cNvSpPr/>
           <p:nvPr/>
         </p:nvSpPr>
         <p:spPr>
           <a:xfrm>
-            <a:off x="3345180" y="1499616"/>
-            <a:ext cx="2613660" cy="518159"/>
-          </a:xfrm>
-          <a:prstGeom prst="rect">
-            <a:avLst/>
-          </a:prstGeom>
-          <a:noFill/>
-        </p:spPr>
-        <p:txBody>
-          <a:bodyPr wrap="none" lIns="0" rIns="0">
-            <a:noAutofit/>
-          </a:bodyPr>
-          <a:lstStyle/>
-          <a:p>
-            <a:pPr algn="l"/>
-            <a:r>
-              <a:rPr sz="3400" b="1" i="0">
-                <a:solidFill>
-                  <a:srgbClr val="0A2240"/>
-                </a:solidFill>
-                <a:latin typeface="Arial"/>
-              </a:rPr>
-              <a:t>Tool</a:t>
-            </a:r>
+            <a:off x="457200" y="2072639"/>
+            <a:ext cx="8217212" cy="54864"/>
+          </a:xfrm>
+          <a:prstGeom prst="rect">
+            <a:avLst/>
+          </a:prstGeom>
+          <a:solidFill>
+            <a:srgbClr val="0072CE"/>
+          </a:solidFill>
+          <a:ln>
+            <a:noFill/>
+          </a:ln>
+          <a:effectLst/>
+        </p:spPr>
+        <p:style>
+          <a:lnRef idx="1">
+            <a:schemeClr val="accent1"/>
+          </a:lnRef>
+          <a:fillRef idx="3">
+            <a:schemeClr val="accent1"/>
+          </a:fillRef>
+          <a:effectRef idx="2">
+            <a:schemeClr val="accent1"/>
+          </a:effectRef>
+          <a:fontRef idx="minor">
+            <a:schemeClr val="lt1"/>
+          </a:fontRef>
+        </p:style>
+        <p:txBody>
+          <a:bodyPr rtlCol="0" anchor="ctr"/>
+          <a:lstStyle/>
+          <a:p>
+            <a:pPr algn="ctr"/>
           </a:p>
         </p:txBody>
       </p:sp>
@@ -28915,16 +28089,16 @@
         </p:nvSpPr>
         <p:spPr>
           <a:xfrm>
-            <a:off x="3345180" y="2154935"/>
-            <a:ext cx="2613660" cy="3605785"/>
-          </a:xfrm>
-          <a:prstGeom prst="rect">
-            <a:avLst/>
-          </a:prstGeom>
-          <a:noFill/>
-        </p:spPr>
-        <p:txBody>
-          <a:bodyPr wrap="square" lIns="0" rIns="0">
+            <a:off x="457200" y="2401823"/>
+            <a:ext cx="1854078" cy="633984"/>
+          </a:xfrm>
+          <a:prstGeom prst="rect">
+            <a:avLst/>
+          </a:prstGeom>
+          <a:noFill/>
+        </p:spPr>
+        <p:txBody>
+          <a:bodyPr wrap="none" lIns="0" rIns="0">
             <a:noAutofit/>
           </a:bodyPr>
           <a:lstStyle/>
@@ -28937,7 +28111,7 @@
                 </a:solidFill>
                 <a:latin typeface="Arial"/>
               </a:rPr>
-              <a:t>Code, API, or model call</a:t>
+              <a:t>Data</a:t>
             </a:r>
           </a:p>
         </p:txBody>
@@ -28950,29 +28124,29 @@
         </p:nvSpPr>
         <p:spPr>
           <a:xfrm>
-            <a:off x="6233160" y="1499616"/>
-            <a:ext cx="2754113" cy="518159"/>
-          </a:xfrm>
-          <a:prstGeom prst="rect">
-            <a:avLst/>
-          </a:prstGeom>
-          <a:noFill/>
-        </p:spPr>
-        <p:txBody>
-          <a:bodyPr wrap="none" lIns="0" rIns="0">
-            <a:noAutofit/>
-          </a:bodyPr>
-          <a:lstStyle/>
-          <a:p>
-            <a:pPr algn="l"/>
-            <a:r>
-              <a:rPr sz="3400" b="1" i="0">
+            <a:off x="2859918" y="2401823"/>
+            <a:ext cx="8900854" cy="633984"/>
+          </a:xfrm>
+          <a:prstGeom prst="rect">
+            <a:avLst/>
+          </a:prstGeom>
+          <a:noFill/>
+        </p:spPr>
+        <p:txBody>
+          <a:bodyPr wrap="none" lIns="0" rIns="0">
+            <a:noAutofit/>
+          </a:bodyPr>
+          <a:lstStyle/>
+          <a:p>
+            <a:pPr algn="l"/>
+            <a:r>
+              <a:rPr sz="3400" b="0" i="0">
                 <a:solidFill>
                   <a:srgbClr val="0A2240"/>
                 </a:solidFill>
                 <a:latin typeface="Arial"/>
               </a:rPr>
-              <a:t>Routine</a:t>
+              <a:t>Something must be supplied</a:t>
             </a:r>
           </a:p>
         </p:txBody>
@@ -28985,16 +28159,16 @@
         </p:nvSpPr>
         <p:spPr>
           <a:xfrm>
-            <a:off x="6233160" y="2154935"/>
-            <a:ext cx="2613660" cy="3605785"/>
-          </a:xfrm>
-          <a:prstGeom prst="rect">
-            <a:avLst/>
-          </a:prstGeom>
-          <a:noFill/>
-        </p:spPr>
-        <p:txBody>
-          <a:bodyPr wrap="square" lIns="0" rIns="0">
+            <a:off x="457200" y="3310127"/>
+            <a:ext cx="1854078" cy="633984"/>
+          </a:xfrm>
+          <a:prstGeom prst="rect">
+            <a:avLst/>
+          </a:prstGeom>
+          <a:noFill/>
+        </p:spPr>
+        <p:txBody>
+          <a:bodyPr wrap="none" lIns="0" rIns="0">
             <a:noAutofit/>
           </a:bodyPr>
           <a:lstStyle/>
@@ -29007,7 +28181,7 @@
                 </a:solidFill>
                 <a:latin typeface="Arial"/>
               </a:rPr>
-              <a:t>It runs on a schedule</a:t>
+              <a:t>Tool</a:t>
             </a:r>
           </a:p>
         </p:txBody>
@@ -29020,29 +28194,29 @@
         </p:nvSpPr>
         <p:spPr>
           <a:xfrm>
-            <a:off x="9121140" y="1499616"/>
-            <a:ext cx="2613660" cy="518159"/>
-          </a:xfrm>
-          <a:prstGeom prst="rect">
-            <a:avLst/>
-          </a:prstGeom>
-          <a:noFill/>
-        </p:spPr>
-        <p:txBody>
-          <a:bodyPr wrap="none" lIns="0" rIns="0">
-            <a:noAutofit/>
-          </a:bodyPr>
-          <a:lstStyle/>
-          <a:p>
-            <a:pPr algn="l"/>
-            <a:r>
-              <a:rPr sz="3400" b="1" i="0">
+            <a:off x="2859918" y="3310127"/>
+            <a:ext cx="7594321" cy="633984"/>
+          </a:xfrm>
+          <a:prstGeom prst="rect">
+            <a:avLst/>
+          </a:prstGeom>
+          <a:noFill/>
+        </p:spPr>
+        <p:txBody>
+          <a:bodyPr wrap="none" lIns="0" rIns="0">
+            <a:noAutofit/>
+          </a:bodyPr>
+          <a:lstStyle/>
+          <a:p>
+            <a:pPr algn="l"/>
+            <a:r>
+              <a:rPr sz="3400" b="0" i="0">
                 <a:solidFill>
                   <a:srgbClr val="0A2240"/>
                 </a:solidFill>
                 <a:latin typeface="Arial"/>
               </a:rPr>
-              <a:t>Human</a:t>
+              <a:t>Code, API, or model call</a:t>
             </a:r>
           </a:p>
         </p:txBody>
@@ -29055,16 +28229,16 @@
         </p:nvSpPr>
         <p:spPr>
           <a:xfrm>
-            <a:off x="9121140" y="2154935"/>
-            <a:ext cx="2613660" cy="3605785"/>
-          </a:xfrm>
-          <a:prstGeom prst="rect">
-            <a:avLst/>
-          </a:prstGeom>
-          <a:noFill/>
-        </p:spPr>
-        <p:txBody>
-          <a:bodyPr wrap="square" lIns="0" rIns="0">
+            <a:off x="457200" y="4218431"/>
+            <a:ext cx="2564188" cy="633984"/>
+          </a:xfrm>
+          <a:prstGeom prst="rect">
+            <a:avLst/>
+          </a:prstGeom>
+          <a:noFill/>
+        </p:spPr>
+        <p:txBody>
+          <a:bodyPr wrap="none" lIns="0" rIns="0">
             <a:noAutofit/>
           </a:bodyPr>
           <a:lstStyle/>
@@ -29077,6 +28251,111 @@
                 </a:solidFill>
                 <a:latin typeface="Arial"/>
               </a:rPr>
+              <a:t>Routine</a:t>
+            </a:r>
+          </a:p>
+        </p:txBody>
+      </p:sp>
+      <p:sp>
+        <p:nvSpPr>
+          <p:cNvPr id="11" name="TextBox 10"/>
+          <p:cNvSpPr txBox="1"/>
+          <p:nvPr/>
+        </p:nvSpPr>
+        <p:spPr>
+          <a:xfrm>
+            <a:off x="2859918" y="4218431"/>
+            <a:ext cx="6596796" cy="633984"/>
+          </a:xfrm>
+          <a:prstGeom prst="rect">
+            <a:avLst/>
+          </a:prstGeom>
+          <a:noFill/>
+        </p:spPr>
+        <p:txBody>
+          <a:bodyPr wrap="none" lIns="0" rIns="0">
+            <a:noAutofit/>
+          </a:bodyPr>
+          <a:lstStyle/>
+          <a:p>
+            <a:pPr algn="l"/>
+            <a:r>
+              <a:rPr sz="3400" b="0" i="0">
+                <a:solidFill>
+                  <a:srgbClr val="0A2240"/>
+                </a:solidFill>
+                <a:latin typeface="Arial"/>
+              </a:rPr>
+              <a:t>It runs on a schedule</a:t>
+            </a:r>
+          </a:p>
+        </p:txBody>
+      </p:sp>
+      <p:sp>
+        <p:nvSpPr>
+          <p:cNvPr id="12" name="TextBox 11"/>
+          <p:cNvSpPr txBox="1"/>
+          <p:nvPr/>
+        </p:nvSpPr>
+        <p:spPr>
+          <a:xfrm>
+            <a:off x="457200" y="5126735"/>
+            <a:ext cx="2410024" cy="633984"/>
+          </a:xfrm>
+          <a:prstGeom prst="rect">
+            <a:avLst/>
+          </a:prstGeom>
+          <a:noFill/>
+        </p:spPr>
+        <p:txBody>
+          <a:bodyPr wrap="none" lIns="0" rIns="0">
+            <a:noAutofit/>
+          </a:bodyPr>
+          <a:lstStyle/>
+          <a:p>
+            <a:pPr algn="l"/>
+            <a:r>
+              <a:rPr sz="3400" b="0" i="0">
+                <a:solidFill>
+                  <a:srgbClr val="0A2240"/>
+                </a:solidFill>
+                <a:latin typeface="Arial"/>
+              </a:rPr>
+              <a:t>Human</a:t>
+            </a:r>
+          </a:p>
+        </p:txBody>
+      </p:sp>
+      <p:sp>
+        <p:nvSpPr>
+          <p:cNvPr id="13" name="TextBox 12"/>
+          <p:cNvSpPr txBox="1"/>
+          <p:nvPr/>
+        </p:nvSpPr>
+        <p:spPr>
+          <a:xfrm>
+            <a:off x="2859918" y="5126735"/>
+            <a:ext cx="5814494" cy="633984"/>
+          </a:xfrm>
+          <a:prstGeom prst="rect">
+            <a:avLst/>
+          </a:prstGeom>
+          <a:noFill/>
+        </p:spPr>
+        <p:txBody>
+          <a:bodyPr wrap="none" lIns="0" rIns="0">
+            <a:noAutofit/>
+          </a:bodyPr>
+          <a:lstStyle/>
+          <a:p>
+            <a:pPr algn="l"/>
+            <a:r>
+              <a:rPr sz="3400" b="0" i="0">
+                <a:solidFill>
+                  <a:srgbClr val="0A2240"/>
+                </a:solidFill>
+                <a:latin typeface="Arial"/>
+              </a:rPr>
               <a:t>A person decides</a:t>
             </a:r>
           </a:p>
@@ -29084,7 +28363,7 @@
       </p:sp>
       <p:sp>
         <p:nvSpPr>
-          <p:cNvPr id="11" name="TextBox 10"/>
+          <p:cNvPr id="14" name="TextBox 13"/>
           <p:cNvSpPr/>
           <p:nvPr>
             <p:ph type="sldNum" idx="12"/>
@@ -29110,7 +28389,7 @@
             <a:fld id="{4B0E1F8A-6C1D-4E2A-9F3B-7A5C8D2E1F60}" type="slidenum">
               <a:rPr sz="1600" b="0" i="0">
                 <a:solidFill>
-                  <a:srgbClr val="5B6B82"/>
+                  <a:srgbClr val="0A2240"/>
                 </a:solidFill>
                 <a:latin typeface="Arial"/>
               </a:rPr>
@@ -29313,7 +28592,7 @@
             <a:fld id="{4B0E1F8A-6C1D-4E2A-9F3B-7A5C8D2E1F60}" type="slidenum">
               <a:rPr sz="1600" b="0" i="0">
                 <a:solidFill>
-                  <a:srgbClr val="5B6B82"/>
+                  <a:srgbClr val="0A2240"/>
                 </a:solidFill>
                 <a:latin typeface="Arial"/>
               </a:rPr>
@@ -29490,7 +28769,7 @@
             <a:fld id="{4B0E1F8A-6C1D-4E2A-9F3B-7A5C8D2E1F60}" type="slidenum">
               <a:rPr sz="1600" b="0" i="0">
                 <a:solidFill>
-                  <a:srgbClr val="5B6B82"/>
+                  <a:srgbClr val="0A2240"/>
                 </a:solidFill>
                 <a:latin typeface="Arial"/>
               </a:rPr>
@@ -29693,7 +28972,7 @@
             <a:fld id="{4B0E1F8A-6C1D-4E2A-9F3B-7A5C8D2E1F60}" type="slidenum">
               <a:rPr sz="1600" b="0" i="0">
                 <a:solidFill>
-                  <a:srgbClr val="5B6B82"/>
+                  <a:srgbClr val="0A2240"/>
                 </a:solidFill>
                 <a:latin typeface="Arial"/>
               </a:rPr>
@@ -29754,7 +29033,7 @@
             <a:r>
               <a:rPr sz="4200" b="0" i="0">
                 <a:solidFill>
-                  <a:srgbClr val="D4D4D4"/>
+                  <a:srgbClr val="FFFFFF"/>
                 </a:solidFill>
                 <a:latin typeface="Arial"/>
               </a:rPr>
@@ -29772,7 +29051,7 @@
         <p:spPr>
           <a:xfrm>
             <a:off x="457200" y="1371600"/>
-            <a:ext cx="5827652" cy="518159"/>
+            <a:ext cx="7172305" cy="518159"/>
           </a:xfrm>
           <a:prstGeom prst="rect">
             <a:avLst/>
@@ -29789,11 +29068,11 @@
             <a:r>
               <a:rPr sz="3400" b="0" i="0">
                 <a:solidFill>
-                  <a:srgbClr val="D4D4D4"/>
-                </a:solidFill>
-                <a:latin typeface="Arial"/>
-              </a:rPr>
-              <a:t>Every weekday at </a:t>
+                  <a:srgbClr val="FFFFFF"/>
+                </a:solidFill>
+                <a:latin typeface="Arial"/>
+              </a:rPr>
+              <a:t>Every weekday at 8:00</a:t>
             </a:r>
           </a:p>
         </p:txBody>
@@ -29806,8 +29085,8 @@
         </p:nvSpPr>
         <p:spPr>
           <a:xfrm>
-            <a:off x="3985183" y="1371600"/>
-            <a:ext cx="567115" cy="518159"/>
+            <a:off x="457200" y="2407918"/>
+            <a:ext cx="5674499" cy="518159"/>
           </a:xfrm>
           <a:prstGeom prst="rect">
             <a:avLst/>
@@ -29824,11 +29103,11 @@
             <a:r>
               <a:rPr sz="3400" b="0" i="0">
                 <a:solidFill>
-                  <a:srgbClr val="B5CEA8"/>
-                </a:solidFill>
-                <a:latin typeface="Arial"/>
-              </a:rPr>
-              <a:t>8</a:t>
+                  <a:srgbClr val="FFFFFF"/>
+                </a:solidFill>
+                <a:latin typeface="Arial"/>
+              </a:rPr>
+              <a:t>1. Read new files </a:t>
             </a:r>
           </a:p>
         </p:txBody>
@@ -29841,8 +29120,8 @@
         </p:nvSpPr>
         <p:spPr>
           <a:xfrm>
-            <a:off x="4225330" y="1371600"/>
-            <a:ext cx="374828" cy="518159"/>
+            <a:off x="3889462" y="2407918"/>
+            <a:ext cx="720606" cy="518159"/>
           </a:xfrm>
           <a:prstGeom prst="rect">
             <a:avLst/>
@@ -29859,11 +29138,11 @@
             <a:r>
               <a:rPr sz="3400" b="0" i="0">
                 <a:solidFill>
-                  <a:srgbClr val="D4D4D4"/>
-                </a:solidFill>
-                <a:latin typeface="Arial"/>
-              </a:rPr>
-              <a:t>:</a:t>
+                  <a:srgbClr val="569CD6"/>
+                </a:solidFill>
+                <a:latin typeface="Arial"/>
+              </a:rPr>
+              <a:t>in</a:t>
             </a:r>
           </a:p>
         </p:txBody>
@@ -29876,8 +29155,8 @@
         </p:nvSpPr>
         <p:spPr>
           <a:xfrm>
-            <a:off x="4345298" y="1371600"/>
-            <a:ext cx="951348" cy="518159"/>
+            <a:off x="4225541" y="2407918"/>
+            <a:ext cx="2410360" cy="518159"/>
           </a:xfrm>
           <a:prstGeom prst="rect">
             <a:avLst/>
@@ -29894,11 +29173,11 @@
             <a:r>
               <a:rPr sz="3400" b="0" i="0">
                 <a:solidFill>
-                  <a:srgbClr val="B5CEA8"/>
-                </a:solidFill>
-                <a:latin typeface="Arial"/>
-              </a:rPr>
-              <a:t>00</a:t>
+                  <a:srgbClr val="FFFFFF"/>
+                </a:solidFill>
+                <a:latin typeface="Arial"/>
+              </a:rPr>
+              <a:t> /intake</a:t>
             </a:r>
           </a:p>
         </p:txBody>
@@ -29911,8 +29190,8 @@
         </p:nvSpPr>
         <p:spPr>
           <a:xfrm>
-            <a:off x="457200" y="2407918"/>
-            <a:ext cx="567115" cy="518159"/>
+            <a:off x="457200" y="2926077"/>
+            <a:ext cx="9362003" cy="518159"/>
           </a:xfrm>
           <a:prstGeom prst="rect">
             <a:avLst/>
@@ -29929,11 +29208,11 @@
             <a:r>
               <a:rPr sz="3400" b="0" i="0">
                 <a:solidFill>
-                  <a:srgbClr val="B5CEA8"/>
-                </a:solidFill>
-                <a:latin typeface="Arial"/>
-              </a:rPr>
-              <a:t>1</a:t>
+                  <a:srgbClr val="FFFFFF"/>
+                </a:solidFill>
+                <a:latin typeface="Arial"/>
+              </a:rPr>
+              <a:t>2. Score each against the role</a:t>
             </a:r>
           </a:p>
         </p:txBody>
@@ -29946,8 +29225,8 @@
         </p:nvSpPr>
         <p:spPr>
           <a:xfrm>
-            <a:off x="697347" y="2407918"/>
-            <a:ext cx="5290264" cy="518159"/>
+            <a:off x="457200" y="3444236"/>
+            <a:ext cx="9401809" cy="518159"/>
           </a:xfrm>
           <a:prstGeom prst="rect">
             <a:avLst/>
@@ -29964,11 +29243,11 @@
             <a:r>
               <a:rPr sz="3400" b="0" i="0">
                 <a:solidFill>
-                  <a:srgbClr val="D4D4D4"/>
-                </a:solidFill>
-                <a:latin typeface="Arial"/>
-              </a:rPr>
-              <a:t>. Read new files </a:t>
+                  <a:srgbClr val="FFFFFF"/>
+                </a:solidFill>
+                <a:latin typeface="Arial"/>
+              </a:rPr>
+              <a:t>3. Append to the ranked sheet</a:t>
             </a:r>
           </a:p>
         </p:txBody>
@@ -29981,8 +29260,8 @@
         </p:nvSpPr>
         <p:spPr>
           <a:xfrm>
-            <a:off x="3889462" y="2407918"/>
-            <a:ext cx="720606" cy="518159"/>
+            <a:off x="457200" y="3962395"/>
+            <a:ext cx="8746688" cy="518159"/>
           </a:xfrm>
           <a:prstGeom prst="rect">
             <a:avLst/>
@@ -29999,11 +29278,11 @@
             <a:r>
               <a:rPr sz="3400" b="0" i="0">
                 <a:solidFill>
-                  <a:srgbClr val="569CD6"/>
-                </a:solidFill>
-                <a:latin typeface="Arial"/>
-              </a:rPr>
-              <a:t>in</a:t>
+                  <a:srgbClr val="FFFFFF"/>
+                </a:solidFill>
+                <a:latin typeface="Arial"/>
+              </a:rPr>
+              <a:t>4. Flag anything scoring low</a:t>
             </a:r>
           </a:p>
         </p:txBody>
@@ -30011,251 +29290,6 @@
       <p:sp>
         <p:nvSpPr>
           <p:cNvPr id="10" name="TextBox 9"/>
-          <p:cNvSpPr txBox="1"/>
-          <p:nvPr/>
-        </p:nvSpPr>
-        <p:spPr>
-          <a:xfrm>
-            <a:off x="4225541" y="2407918"/>
-            <a:ext cx="2410360" cy="518159"/>
-          </a:xfrm>
-          <a:prstGeom prst="rect">
-            <a:avLst/>
-          </a:prstGeom>
-          <a:noFill/>
-        </p:spPr>
-        <p:txBody>
-          <a:bodyPr wrap="none" lIns="0" rIns="0">
-            <a:noAutofit/>
-          </a:bodyPr>
-          <a:lstStyle/>
-          <a:p>
-            <a:pPr algn="l"/>
-            <a:r>
-              <a:rPr sz="3400" b="0" i="0">
-                <a:solidFill>
-                  <a:srgbClr val="D4D4D4"/>
-                </a:solidFill>
-                <a:latin typeface="Arial"/>
-              </a:rPr>
-              <a:t> /intake</a:t>
-            </a:r>
-          </a:p>
-        </p:txBody>
-      </p:sp>
-      <p:sp>
-        <p:nvSpPr>
-          <p:cNvPr id="11" name="TextBox 10"/>
-          <p:cNvSpPr txBox="1"/>
-          <p:nvPr/>
-        </p:nvSpPr>
-        <p:spPr>
-          <a:xfrm>
-            <a:off x="457200" y="2926077"/>
-            <a:ext cx="567115" cy="518159"/>
-          </a:xfrm>
-          <a:prstGeom prst="rect">
-            <a:avLst/>
-          </a:prstGeom>
-          <a:noFill/>
-        </p:spPr>
-        <p:txBody>
-          <a:bodyPr wrap="none" lIns="0" rIns="0">
-            <a:noAutofit/>
-          </a:bodyPr>
-          <a:lstStyle/>
-          <a:p>
-            <a:pPr algn="l"/>
-            <a:r>
-              <a:rPr sz="3400" b="0" i="0">
-                <a:solidFill>
-                  <a:srgbClr val="B5CEA8"/>
-                </a:solidFill>
-                <a:latin typeface="Arial"/>
-              </a:rPr>
-              <a:t>2</a:t>
-            </a:r>
-          </a:p>
-        </p:txBody>
-      </p:sp>
-      <p:sp>
-        <p:nvSpPr>
-          <p:cNvPr id="12" name="TextBox 11"/>
-          <p:cNvSpPr txBox="1"/>
-          <p:nvPr/>
-        </p:nvSpPr>
-        <p:spPr>
-          <a:xfrm>
-            <a:off x="697347" y="2926077"/>
-            <a:ext cx="8977769" cy="518159"/>
-          </a:xfrm>
-          <a:prstGeom prst="rect">
-            <a:avLst/>
-          </a:prstGeom>
-          <a:noFill/>
-        </p:spPr>
-        <p:txBody>
-          <a:bodyPr wrap="none" lIns="0" rIns="0">
-            <a:noAutofit/>
-          </a:bodyPr>
-          <a:lstStyle/>
-          <a:p>
-            <a:pPr algn="l"/>
-            <a:r>
-              <a:rPr sz="3400" b="0" i="0">
-                <a:solidFill>
-                  <a:srgbClr val="D4D4D4"/>
-                </a:solidFill>
-                <a:latin typeface="Arial"/>
-              </a:rPr>
-              <a:t>. Score each against the role</a:t>
-            </a:r>
-          </a:p>
-        </p:txBody>
-      </p:sp>
-      <p:sp>
-        <p:nvSpPr>
-          <p:cNvPr id="13" name="TextBox 12"/>
-          <p:cNvSpPr txBox="1"/>
-          <p:nvPr/>
-        </p:nvSpPr>
-        <p:spPr>
-          <a:xfrm>
-            <a:off x="457200" y="3444236"/>
-            <a:ext cx="567115" cy="518159"/>
-          </a:xfrm>
-          <a:prstGeom prst="rect">
-            <a:avLst/>
-          </a:prstGeom>
-          <a:noFill/>
-        </p:spPr>
-        <p:txBody>
-          <a:bodyPr wrap="none" lIns="0" rIns="0">
-            <a:noAutofit/>
-          </a:bodyPr>
-          <a:lstStyle/>
-          <a:p>
-            <a:pPr algn="l"/>
-            <a:r>
-              <a:rPr sz="3400" b="0" i="0">
-                <a:solidFill>
-                  <a:srgbClr val="B5CEA8"/>
-                </a:solidFill>
-                <a:latin typeface="Arial"/>
-              </a:rPr>
-              <a:t>3</a:t>
-            </a:r>
-          </a:p>
-        </p:txBody>
-      </p:sp>
-      <p:sp>
-        <p:nvSpPr>
-          <p:cNvPr id="14" name="TextBox 13"/>
-          <p:cNvSpPr txBox="1"/>
-          <p:nvPr/>
-        </p:nvSpPr>
-        <p:spPr>
-          <a:xfrm>
-            <a:off x="697347" y="3444236"/>
-            <a:ext cx="9017576" cy="518159"/>
-          </a:xfrm>
-          <a:prstGeom prst="rect">
-            <a:avLst/>
-          </a:prstGeom>
-          <a:noFill/>
-        </p:spPr>
-        <p:txBody>
-          <a:bodyPr wrap="none" lIns="0" rIns="0">
-            <a:noAutofit/>
-          </a:bodyPr>
-          <a:lstStyle/>
-          <a:p>
-            <a:pPr algn="l"/>
-            <a:r>
-              <a:rPr sz="3400" b="0" i="0">
-                <a:solidFill>
-                  <a:srgbClr val="D4D4D4"/>
-                </a:solidFill>
-                <a:latin typeface="Arial"/>
-              </a:rPr>
-              <a:t>. Append to the ranked sheet</a:t>
-            </a:r>
-          </a:p>
-        </p:txBody>
-      </p:sp>
-      <p:sp>
-        <p:nvSpPr>
-          <p:cNvPr id="15" name="TextBox 14"/>
-          <p:cNvSpPr txBox="1"/>
-          <p:nvPr/>
-        </p:nvSpPr>
-        <p:spPr>
-          <a:xfrm>
-            <a:off x="457200" y="3962395"/>
-            <a:ext cx="567115" cy="518159"/>
-          </a:xfrm>
-          <a:prstGeom prst="rect">
-            <a:avLst/>
-          </a:prstGeom>
-          <a:noFill/>
-        </p:spPr>
-        <p:txBody>
-          <a:bodyPr wrap="none" lIns="0" rIns="0">
-            <a:noAutofit/>
-          </a:bodyPr>
-          <a:lstStyle/>
-          <a:p>
-            <a:pPr algn="l"/>
-            <a:r>
-              <a:rPr sz="3400" b="0" i="0">
-                <a:solidFill>
-                  <a:srgbClr val="B5CEA8"/>
-                </a:solidFill>
-                <a:latin typeface="Arial"/>
-              </a:rPr>
-              <a:t>4</a:t>
-            </a:r>
-          </a:p>
-        </p:txBody>
-      </p:sp>
-      <p:sp>
-        <p:nvSpPr>
-          <p:cNvPr id="16" name="TextBox 15"/>
-          <p:cNvSpPr txBox="1"/>
-          <p:nvPr/>
-        </p:nvSpPr>
-        <p:spPr>
-          <a:xfrm>
-            <a:off x="697347" y="3962395"/>
-            <a:ext cx="8362454" cy="518159"/>
-          </a:xfrm>
-          <a:prstGeom prst="rect">
-            <a:avLst/>
-          </a:prstGeom>
-          <a:noFill/>
-        </p:spPr>
-        <p:txBody>
-          <a:bodyPr wrap="none" lIns="0" rIns="0">
-            <a:noAutofit/>
-          </a:bodyPr>
-          <a:lstStyle/>
-          <a:p>
-            <a:pPr algn="l"/>
-            <a:r>
-              <a:rPr sz="3400" b="0" i="0">
-                <a:solidFill>
-                  <a:srgbClr val="D4D4D4"/>
-                </a:solidFill>
-                <a:latin typeface="Arial"/>
-              </a:rPr>
-              <a:t>. Flag anything scoring low</a:t>
-            </a:r>
-          </a:p>
-        </p:txBody>
-      </p:sp>
-      <p:sp>
-        <p:nvSpPr>
-          <p:cNvPr id="17" name="TextBox 16"/>
           <p:cNvSpPr/>
           <p:nvPr>
             <p:ph type="sldNum" idx="12"/>
@@ -30281,7 +29315,7 @@
             <a:fld id="{4B0E1F8A-6C1D-4E2A-9F3B-7A5C8D2E1F60}" type="slidenum">
               <a:rPr sz="1600" b="0" i="0">
                 <a:solidFill>
-                  <a:srgbClr val="5B6B82"/>
+                  <a:srgbClr val="0A2240"/>
                 </a:solidFill>
                 <a:latin typeface="Arial"/>
               </a:rPr>
@@ -30423,7 +29457,7 @@
             <a:fld id="{4B0E1F8A-6C1D-4E2A-9F3B-7A5C8D2E1F60}" type="slidenum">
               <a:rPr sz="1600" b="0" i="0">
                 <a:solidFill>
-                  <a:srgbClr val="5B6B82"/>
+                  <a:srgbClr val="0A2240"/>
                 </a:solidFill>
                 <a:latin typeface="Arial"/>
               </a:rPr>
@@ -30600,7 +29634,7 @@
             <a:fld id="{4B0E1F8A-6C1D-4E2A-9F3B-7A5C8D2E1F60}" type="slidenum">
               <a:rPr sz="1600" b="0" i="0">
                 <a:solidFill>
-                  <a:srgbClr val="5B6B82"/>
+                  <a:srgbClr val="0A2240"/>
                 </a:solidFill>
                 <a:latin typeface="Arial"/>
               </a:rPr>
@@ -30803,7 +29837,7 @@
             <a:fld id="{4B0E1F8A-6C1D-4E2A-9F3B-7A5C8D2E1F60}" type="slidenum">
               <a:rPr sz="1600" b="0" i="0">
                 <a:solidFill>
-                  <a:srgbClr val="5B6B82"/>
+                  <a:srgbClr val="0A2240"/>
                 </a:solidFill>
                 <a:latin typeface="Arial"/>
               </a:rPr>
@@ -30899,7 +29933,7 @@
             <a:r>
               <a:rPr sz="3400" b="1" i="0">
                 <a:solidFill>
-                  <a:srgbClr val="123A6B"/>
+                  <a:srgbClr val="0072CE"/>
                 </a:solidFill>
                 <a:latin typeface="Arial"/>
               </a:rPr>
@@ -30934,7 +29968,7 @@
             <a:r>
               <a:rPr sz="3400" b="1" i="0">
                 <a:solidFill>
-                  <a:srgbClr val="123A6B"/>
+                  <a:srgbClr val="0072CE"/>
                 </a:solidFill>
                 <a:latin typeface="Arial"/>
               </a:rPr>
@@ -31295,7 +30329,7 @@
             <a:fld id="{4B0E1F8A-6C1D-4E2A-9F3B-7A5C8D2E1F60}" type="slidenum">
               <a:rPr sz="1600" b="0" i="0">
                 <a:solidFill>
-                  <a:srgbClr val="5B6B82"/>
+                  <a:srgbClr val="0A2240"/>
                 </a:solidFill>
                 <a:latin typeface="Arial"/>
               </a:rPr>
@@ -31472,7 +30506,7 @@
             <a:fld id="{4B0E1F8A-6C1D-4E2A-9F3B-7A5C8D2E1F60}" type="slidenum">
               <a:rPr sz="1600" b="0" i="0">
                 <a:solidFill>
-                  <a:srgbClr val="5B6B82"/>
+                  <a:srgbClr val="0A2240"/>
                 </a:solidFill>
                 <a:latin typeface="Arial"/>
               </a:rPr>
@@ -31568,7 +30602,7 @@
             <a:r>
               <a:rPr sz="4200" b="1" i="0">
                 <a:solidFill>
-                  <a:srgbClr val="123A6B"/>
+                  <a:srgbClr val="0072CE"/>
                 </a:solidFill>
                 <a:latin typeface="Arial"/>
               </a:rPr>
@@ -31603,7 +30637,7 @@
             <a:r>
               <a:rPr sz="4200" b="1" i="0">
                 <a:solidFill>
-                  <a:srgbClr val="123A6B"/>
+                  <a:srgbClr val="0072CE"/>
                 </a:solidFill>
                 <a:latin typeface="Arial"/>
               </a:rPr>
@@ -31673,7 +30707,7 @@
             <a:r>
               <a:rPr sz="4200" b="1" i="0">
                 <a:solidFill>
-                  <a:srgbClr val="123A6B"/>
+                  <a:srgbClr val="0072CE"/>
                 </a:solidFill>
                 <a:latin typeface="Arial"/>
               </a:rPr>
@@ -31708,7 +30742,7 @@
             <a:r>
               <a:rPr sz="4200" b="1" i="0">
                 <a:solidFill>
-                  <a:srgbClr val="123A6B"/>
+                  <a:srgbClr val="0072CE"/>
                 </a:solidFill>
                 <a:latin typeface="Arial"/>
               </a:rPr>
@@ -31778,7 +30812,7 @@
             <a:r>
               <a:rPr sz="4200" b="1" i="0">
                 <a:solidFill>
-                  <a:srgbClr val="123A6B"/>
+                  <a:srgbClr val="0072CE"/>
                 </a:solidFill>
                 <a:latin typeface="Arial"/>
               </a:rPr>
@@ -31813,7 +30847,7 @@
             <a:r>
               <a:rPr sz="4200" b="1" i="0">
                 <a:solidFill>
-                  <a:srgbClr val="123A6B"/>
+                  <a:srgbClr val="0072CE"/>
                 </a:solidFill>
                 <a:latin typeface="Arial"/>
               </a:rPr>
@@ -31885,7 +30919,7 @@
             <a:fld id="{4B0E1F8A-6C1D-4E2A-9F3B-7A5C8D2E1F60}" type="slidenum">
               <a:rPr sz="1600" b="0" i="0">
                 <a:solidFill>
-                  <a:srgbClr val="5B6B82"/>
+                  <a:srgbClr val="0A2240"/>
                 </a:solidFill>
                 <a:latin typeface="Arial"/>
               </a:rPr>
@@ -31935,7 +30969,7 @@
             <a:avLst/>
           </a:prstGeom>
           <a:solidFill>
-            <a:srgbClr val="FF5F56"/>
+            <a:srgbClr val="FFFFFF"/>
           </a:solidFill>
           <a:ln>
             <a:noFill/>
@@ -31979,7 +31013,7 @@
             <a:avLst/>
           </a:prstGeom>
           <a:solidFill>
-            <a:srgbClr val="FFBD2E"/>
+            <a:srgbClr val="FFFFFF"/>
           </a:solidFill>
           <a:ln>
             <a:noFill/>
@@ -32023,7 +31057,7 @@
             <a:avLst/>
           </a:prstGeom>
           <a:solidFill>
-            <a:srgbClr val="27C93F"/>
+            <a:srgbClr val="FFFFFF"/>
           </a:solidFill>
           <a:ln>
             <a:noFill/>
@@ -32078,7 +31112,7 @@
             <a:r>
               <a:rPr sz="4200" b="0" i="0">
                 <a:solidFill>
-                  <a:srgbClr val="D4D4D4"/>
+                  <a:srgbClr val="FFFFFF"/>
                 </a:solidFill>
                 <a:latin typeface="Arial"/>
               </a:rPr>
@@ -32113,7 +31147,7 @@
             <a:r>
               <a:rPr sz="3400" b="0" i="0">
                 <a:solidFill>
-                  <a:srgbClr val="D4D4D4"/>
+                  <a:srgbClr val="FFFFFF"/>
                 </a:solidFill>
                 <a:latin typeface="Arial"/>
               </a:rPr>
@@ -32148,7 +31182,7 @@
             <a:r>
               <a:rPr sz="3400" b="0" i="0">
                 <a:solidFill>
-                  <a:srgbClr val="CE9178"/>
+                  <a:srgbClr val="FFFFFF"/>
                 </a:solidFill>
                 <a:latin typeface="Arial"/>
               </a:rPr>
@@ -32183,7 +31217,7 @@
             <a:r>
               <a:rPr sz="3400" b="0" i="0">
                 <a:solidFill>
-                  <a:srgbClr val="D4D4D4"/>
+                  <a:srgbClr val="FFFFFF"/>
                 </a:solidFill>
                 <a:latin typeface="Arial"/>
               </a:rPr>
@@ -32218,7 +31252,7 @@
             <a:r>
               <a:rPr sz="3400" b="0" i="0">
                 <a:solidFill>
-                  <a:srgbClr val="D4D4D4"/>
+                  <a:srgbClr val="FFFFFF"/>
                 </a:solidFill>
                 <a:latin typeface="Arial"/>
               </a:rPr>
@@ -32288,7 +31322,7 @@
             <a:r>
               <a:rPr sz="3400" b="0" i="0">
                 <a:solidFill>
-                  <a:srgbClr val="D4D4D4"/>
+                  <a:srgbClr val="FFFFFF"/>
                 </a:solidFill>
                 <a:latin typeface="Arial"/>
               </a:rPr>
@@ -32323,7 +31357,7 @@
             <a:r>
               <a:rPr sz="3400" b="0" i="0">
                 <a:solidFill>
-                  <a:srgbClr val="D4D4D4"/>
+                  <a:srgbClr val="FFFFFF"/>
                 </a:solidFill>
                 <a:latin typeface="Arial"/>
               </a:rPr>
@@ -32358,7 +31392,7 @@
             <a:r>
               <a:rPr sz="3400" b="0" i="0">
                 <a:solidFill>
-                  <a:srgbClr val="D4D4D4"/>
+                  <a:srgbClr val="FFFFFF"/>
                 </a:solidFill>
                 <a:latin typeface="Arial"/>
               </a:rPr>
@@ -32393,7 +31427,7 @@
             <a:r>
               <a:rPr sz="3400" b="0" i="0">
                 <a:solidFill>
-                  <a:srgbClr val="D4D4D4"/>
+                  <a:srgbClr val="FFFFFF"/>
                 </a:solidFill>
                 <a:latin typeface="Arial"/>
               </a:rPr>
@@ -32430,7 +31464,7 @@
             <a:fld id="{4B0E1F8A-6C1D-4E2A-9F3B-7A5C8D2E1F60}" type="slidenum">
               <a:rPr sz="1600" b="0" i="0">
                 <a:solidFill>
-                  <a:srgbClr val="5B6B82"/>
+                  <a:srgbClr val="0A2240"/>
                 </a:solidFill>
                 <a:latin typeface="Arial"/>
               </a:rPr>
@@ -32738,7 +31772,7 @@
             <a:fld id="{4B0E1F8A-6C1D-4E2A-9F3B-7A5C8D2E1F60}" type="slidenum">
               <a:rPr sz="1600" b="0" i="0">
                 <a:solidFill>
-                  <a:srgbClr val="5B6B82"/>
+                  <a:srgbClr val="0A2240"/>
                 </a:solidFill>
                 <a:latin typeface="Arial"/>
               </a:rPr>
@@ -32941,7 +31975,7 @@
             <a:fld id="{4B0E1F8A-6C1D-4E2A-9F3B-7A5C8D2E1F60}" type="slidenum">
               <a:rPr sz="1600" b="0" i="0">
                 <a:solidFill>
-                  <a:srgbClr val="5B6B82"/>
+                  <a:srgbClr val="0A2240"/>
                 </a:solidFill>
                 <a:latin typeface="Arial"/>
               </a:rPr>
@@ -33652,7 +32686,7 @@
             <a:fld id="{4B0E1F8A-6C1D-4E2A-9F3B-7A5C8D2E1F60}" type="slidenum">
               <a:rPr sz="1600" b="0" i="0">
                 <a:solidFill>
-                  <a:srgbClr val="5B6B82"/>
+                  <a:srgbClr val="0A2240"/>
                 </a:solidFill>
                 <a:latin typeface="Arial"/>
               </a:rPr>
@@ -33855,7 +32889,7 @@
             <a:fld id="{4B0E1F8A-6C1D-4E2A-9F3B-7A5C8D2E1F60}" type="slidenum">
               <a:rPr sz="1600" b="0" i="0">
                 <a:solidFill>
-                  <a:srgbClr val="5B6B82"/>
+                  <a:srgbClr val="0A2240"/>
                 </a:solidFill>
                 <a:latin typeface="Arial"/>
               </a:rPr>
@@ -34091,7 +33125,7 @@
             <a:r>
               <a:rPr sz="4200" b="1" i="0">
                 <a:solidFill>
-                  <a:srgbClr val="5B6B82"/>
+                  <a:srgbClr val="0A2240"/>
                 </a:solidFill>
                 <a:latin typeface="Arial"/>
               </a:rPr>
@@ -34128,7 +33162,7 @@
             <a:fld id="{4B0E1F8A-6C1D-4E2A-9F3B-7A5C8D2E1F60}" type="slidenum">
               <a:rPr sz="1600" b="0" i="0">
                 <a:solidFill>
-                  <a:srgbClr val="5B6B82"/>
+                  <a:srgbClr val="0A2240"/>
                 </a:solidFill>
                 <a:latin typeface="Arial"/>
               </a:rPr>
@@ -34366,7 +33400,7 @@
             <a:fld id="{4B0E1F8A-6C1D-4E2A-9F3B-7A5C8D2E1F60}" type="slidenum">
               <a:rPr sz="1600" b="0" i="0">
                 <a:solidFill>
-                  <a:srgbClr val="5B6B82"/>
+                  <a:srgbClr val="0A2240"/>
                 </a:solidFill>
                 <a:latin typeface="Arial"/>
               </a:rPr>
@@ -34674,7 +33708,7 @@
             <a:fld id="{4B0E1F8A-6C1D-4E2A-9F3B-7A5C8D2E1F60}" type="slidenum">
               <a:rPr sz="1600" b="0" i="0">
                 <a:solidFill>
-                  <a:srgbClr val="5B6B82"/>
+                  <a:srgbClr val="0A2240"/>
                 </a:solidFill>
                 <a:latin typeface="Arial"/>
               </a:rPr>
@@ -34877,153 +33911,11 @@
             <a:fld id="{4B0E1F8A-6C1D-4E2A-9F3B-7A5C8D2E1F60}" type="slidenum">
               <a:rPr sz="1600" b="0" i="0">
                 <a:solidFill>
-                  <a:srgbClr val="5B6B82"/>
+                  <a:srgbClr val="0A2240"/>
                 </a:solidFill>
                 <a:latin typeface="Arial"/>
               </a:rPr>
               <a:t>52</a:t>
-            </a:fld>
-          </a:p>
-        </p:txBody>
-      </p:sp>
-    </p:spTree>
-  </p:cSld>
-  <p:clrMapOvr>
-    <a:masterClrMapping/>
-  </p:clrMapOvr>
-</p:sld>
-</file>
-
-<file path=ppt/slides/slide53.xml><?xml version="1.0" encoding="utf-8"?>
-<p:sld xmlns:a="http://schemas.openxmlformats.org/drawingml/2006/main" xmlns:p="http://schemas.openxmlformats.org/presentationml/2006/main" xmlns:r="http://schemas.openxmlformats.org/officeDocument/2006/relationships" showMasterSp="0">
-  <p:cSld>
-    <p:bg>
-      <p:bgPr>
-        <a:solidFill>
-          <a:srgbClr val="FFFFFF"/>
-        </a:solidFill>
-        <a:effectLst/>
-      </p:bgPr>
-    </p:bg>
-    <p:spTree>
-      <p:nvGrpSpPr>
-        <p:cNvPr id="1" name=""/>
-        <p:cNvGrpSpPr/>
-        <p:nvPr/>
-      </p:nvGrpSpPr>
-      <p:grpSpPr/>
-      <p:sp>
-        <p:nvSpPr>
-          <p:cNvPr id="2" name="Rectangle 1"/>
-          <p:cNvSpPr/>
-          <p:nvPr/>
-        </p:nvSpPr>
-        <p:spPr>
-          <a:xfrm>
-            <a:off x="457200" y="2926080"/>
-            <a:ext cx="128016" cy="1005840"/>
-          </a:xfrm>
-          <a:prstGeom prst="rect">
-            <a:avLst/>
-          </a:prstGeom>
-          <a:solidFill>
-            <a:srgbClr val="0072CE"/>
-          </a:solidFill>
-          <a:ln>
-            <a:noFill/>
-          </a:ln>
-          <a:effectLst/>
-        </p:spPr>
-        <p:style>
-          <a:lnRef idx="1">
-            <a:schemeClr val="accent1"/>
-          </a:lnRef>
-          <a:fillRef idx="3">
-            <a:schemeClr val="accent1"/>
-          </a:fillRef>
-          <a:effectRef idx="2">
-            <a:schemeClr val="accent1"/>
-          </a:effectRef>
-          <a:fontRef idx="minor">
-            <a:schemeClr val="lt1"/>
-          </a:fontRef>
-        </p:style>
-        <p:txBody>
-          <a:bodyPr rtlCol="0" anchor="ctr"/>
-          <a:lstStyle/>
-          <a:p>
-            <a:pPr algn="ctr"/>
-          </a:p>
-        </p:txBody>
-      </p:sp>
-      <p:sp>
-        <p:nvSpPr>
-          <p:cNvPr id="3" name="TextBox 2"/>
-          <p:cNvSpPr txBox="1"/>
-          <p:nvPr/>
-        </p:nvSpPr>
-        <p:spPr>
-          <a:xfrm>
-            <a:off x="996696" y="2926080"/>
-            <a:ext cx="11195304" cy="1005840"/>
-          </a:xfrm>
-          <a:prstGeom prst="rect">
-            <a:avLst/>
-          </a:prstGeom>
-          <a:noFill/>
-        </p:spPr>
-        <p:txBody>
-          <a:bodyPr wrap="none" lIns="0" rIns="0">
-            <a:noAutofit/>
-          </a:bodyPr>
-          <a:lstStyle/>
-          <a:p>
-            <a:pPr algn="l"/>
-            <a:r>
-              <a:rPr sz="6000" b="1" i="0">
-                <a:solidFill>
-                  <a:srgbClr val="0A2240"/>
-                </a:solidFill>
-                <a:latin typeface="Arial"/>
-              </a:rPr>
-              <a:t>Which box comes last?</a:t>
-            </a:r>
-          </a:p>
-        </p:txBody>
-      </p:sp>
-      <p:sp>
-        <p:nvSpPr>
-          <p:cNvPr id="4" name="TextBox 3"/>
-          <p:cNvSpPr/>
-          <p:nvPr>
-            <p:ph type="sldNum" idx="12"/>
-          </p:nvPr>
-        </p:nvSpPr>
-        <p:spPr>
-          <a:xfrm>
-            <a:off x="11186160" y="6035040"/>
-            <a:ext cx="548640" cy="365760"/>
-          </a:xfrm>
-          <a:prstGeom prst="rect">
-            <a:avLst/>
-          </a:prstGeom>
-          <a:noFill/>
-        </p:spPr>
-        <p:txBody>
-          <a:bodyPr wrap="none" lIns="0" rIns="0">
-            <a:noAutofit/>
-          </a:bodyPr>
-          <a:lstStyle/>
-          <a:p>
-            <a:pPr algn="r"/>
-            <a:fld id="{4B0E1F8A-6C1D-4E2A-9F3B-7A5C8D2E1F60}" type="slidenum">
-              <a:rPr sz="1600" b="0" i="0">
-                <a:solidFill>
-                  <a:srgbClr val="5B6B82"/>
-                </a:solidFill>
-                <a:latin typeface="Arial"/>
-              </a:rPr>
-              <a:t>53</a:t>
             </a:fld>
           </a:p>
         </p:txBody>
@@ -35115,7 +34007,7 @@
             <a:r>
               <a:rPr sz="4200" b="1" i="0">
                 <a:solidFill>
-                  <a:srgbClr val="123A6B"/>
+                  <a:srgbClr val="0072CE"/>
                 </a:solidFill>
                 <a:latin typeface="Arial"/>
               </a:rPr>
@@ -35133,13 +34025,13 @@
         <p:spPr>
           <a:xfrm>
             <a:off x="457200" y="2194560"/>
-            <a:ext cx="784098" cy="54864"/>
+            <a:ext cx="593303" cy="54864"/>
           </a:xfrm>
           <a:prstGeom prst="rect">
             <a:avLst/>
           </a:prstGeom>
           <a:solidFill>
-            <a:srgbClr val="123A6B"/>
+            <a:srgbClr val="0072CE"/>
           </a:solidFill>
           <a:ln>
             <a:noFill/>
@@ -35194,7 +34086,7 @@
             <a:r>
               <a:rPr sz="3400" b="1" i="0">
                 <a:solidFill>
-                  <a:srgbClr val="123A6B"/>
+                  <a:srgbClr val="0072CE"/>
                 </a:solidFill>
                 <a:latin typeface="Arial"/>
               </a:rPr>
@@ -35264,7 +34156,7 @@
             <a:r>
               <a:rPr sz="4200" b="1" i="0">
                 <a:solidFill>
-                  <a:srgbClr val="123A6B"/>
+                  <a:srgbClr val="0072CE"/>
                 </a:solidFill>
                 <a:latin typeface="Arial"/>
               </a:rPr>
@@ -35282,13 +34174,13 @@
         <p:spPr>
           <a:xfrm>
             <a:off x="3345180" y="2194560"/>
-            <a:ext cx="784098" cy="54864"/>
+            <a:ext cx="593303" cy="54864"/>
           </a:xfrm>
           <a:prstGeom prst="rect">
             <a:avLst/>
           </a:prstGeom>
           <a:solidFill>
-            <a:srgbClr val="123A6B"/>
+            <a:srgbClr val="0072CE"/>
           </a:solidFill>
           <a:ln>
             <a:noFill/>
@@ -35343,7 +34235,7 @@
             <a:r>
               <a:rPr sz="3400" b="1" i="0">
                 <a:solidFill>
-                  <a:srgbClr val="123A6B"/>
+                  <a:srgbClr val="0072CE"/>
                 </a:solidFill>
                 <a:latin typeface="Arial"/>
               </a:rPr>
@@ -35413,7 +34305,7 @@
             <a:r>
               <a:rPr sz="4200" b="1" i="0">
                 <a:solidFill>
-                  <a:srgbClr val="123A6B"/>
+                  <a:srgbClr val="0072CE"/>
                 </a:solidFill>
                 <a:latin typeface="Arial"/>
               </a:rPr>
@@ -35431,13 +34323,13 @@
         <p:spPr>
           <a:xfrm>
             <a:off x="6233160" y="2194560"/>
-            <a:ext cx="784098" cy="54864"/>
+            <a:ext cx="593303" cy="54864"/>
           </a:xfrm>
           <a:prstGeom prst="rect">
             <a:avLst/>
           </a:prstGeom>
           <a:solidFill>
-            <a:srgbClr val="123A6B"/>
+            <a:srgbClr val="0072CE"/>
           </a:solidFill>
           <a:ln>
             <a:noFill/>
@@ -35492,7 +34384,7 @@
             <a:r>
               <a:rPr sz="3400" b="1" i="0">
                 <a:solidFill>
-                  <a:srgbClr val="123A6B"/>
+                  <a:srgbClr val="0072CE"/>
                 </a:solidFill>
                 <a:latin typeface="Arial"/>
               </a:rPr>
@@ -35562,7 +34454,7 @@
             <a:r>
               <a:rPr sz="4200" b="1" i="0">
                 <a:solidFill>
-                  <a:srgbClr val="123A6B"/>
+                  <a:srgbClr val="0072CE"/>
                 </a:solidFill>
                 <a:latin typeface="Arial"/>
               </a:rPr>
@@ -35580,13 +34472,13 @@
         <p:spPr>
           <a:xfrm>
             <a:off x="9121140" y="2194560"/>
-            <a:ext cx="784098" cy="54864"/>
+            <a:ext cx="593303" cy="54864"/>
           </a:xfrm>
           <a:prstGeom prst="rect">
             <a:avLst/>
           </a:prstGeom>
           <a:solidFill>
-            <a:srgbClr val="123A6B"/>
+            <a:srgbClr val="0072CE"/>
           </a:solidFill>
           <a:ln>
             <a:noFill/>
@@ -35641,7 +34533,7 @@
             <a:r>
               <a:rPr sz="3400" b="1" i="0">
                 <a:solidFill>
-                  <a:srgbClr val="123A6B"/>
+                  <a:srgbClr val="0072CE"/>
                 </a:solidFill>
                 <a:latin typeface="Arial"/>
               </a:rPr>
@@ -35713,7 +34605,7 @@
             <a:fld id="{4B0E1F8A-6C1D-4E2A-9F3B-7A5C8D2E1F60}" type="slidenum">
               <a:rPr sz="1600" b="0" i="0">
                 <a:solidFill>
-                  <a:srgbClr val="5B6B82"/>
+                  <a:srgbClr val="0A2240"/>
                 </a:solidFill>
                 <a:latin typeface="Arial"/>
               </a:rPr>
@@ -35890,7 +34782,7 @@
             <a:fld id="{4B0E1F8A-6C1D-4E2A-9F3B-7A5C8D2E1F60}" type="slidenum">
               <a:rPr sz="1600" b="0" i="0">
                 <a:solidFill>
-                  <a:srgbClr val="5B6B82"/>
+                  <a:srgbClr val="0A2240"/>
                 </a:solidFill>
                 <a:latin typeface="Arial"/>
               </a:rPr>
@@ -36067,7 +34959,7 @@
             <a:fld id="{4B0E1F8A-6C1D-4E2A-9F3B-7A5C8D2E1F60}" type="slidenum">
               <a:rPr sz="1600" b="0" i="0">
                 <a:solidFill>
-                  <a:srgbClr val="5B6B82"/>
+                  <a:srgbClr val="0A2240"/>
                 </a:solidFill>
                 <a:latin typeface="Arial"/>
               </a:rPr>
@@ -36244,7 +35136,7 @@
             <a:fld id="{4B0E1F8A-6C1D-4E2A-9F3B-7A5C8D2E1F60}" type="slidenum">
               <a:rPr sz="1600" b="0" i="0">
                 <a:solidFill>
-                  <a:srgbClr val="5B6B82"/>
+                  <a:srgbClr val="0A2240"/>
                 </a:solidFill>
                 <a:latin typeface="Arial"/>
               </a:rPr>
